--- a/decks/day3/module-7-eval-lab-kickoff.pptx
+++ b/decks/day3/module-7-eval-lab-kickoff.pptx
@@ -18,9 +18,10 @@
     <p:sldId id="266" r:id="rId12"/>
     <p:sldId id="267" r:id="rId13"/>
     <p:sldId id="268" r:id="rId14"/>
+    <p:sldId id="269" r:id="rId15"/>
   </p:sldIdLst>
   <p:notesMasterIdLst>
-    <p:notesMasterId r:id="rId15"/>
+    <p:notesMasterId r:id="rId16"/>
   </p:notesMasterIdLst>
   <p:sldSz cx="9144000" cy="5143500"/>
   <p:notesSz cx="5143500" cy="9144000"/>
@@ -603,8 +604,9 @@
           <a:p>
             <a:r>
               <a:rPr lang="en-US" dirty="0"/>
-              <a:t>• Include positive read, positive write, and no-tool cases. Ground truth must include the consolidated tool plus action. Repeat enough to observe variation, then report the observed rate without inventing a universal threshold.
-• GROUNDING SOURCE: https://learn.microsoft.com/en-us/agent-framework/agents/evaluation?tabs=python</a:t>
+              <a:t>• Part C uses only the read dispatcher with the wit toolset and read-only header. Part D enables only the needed write tool and requires approval after showing the current record and proposed arguments.
+• GROUNDING SOURCE: https://learn.microsoft.com/en-us/azure/devops/mcp-server/remote-mcp-server?view=azure-devops
+• GROUNDING SOURCE: https://learn.microsoft.com/en-us/agent-framework/agents/tools/tool-approval?tabs=python</a:t>
             </a:r>
             <a:endParaRPr lang="en-US" dirty="0"/>
           </a:p>
@@ -692,8 +694,7 @@
           <a:p>
             <a:r>
               <a:rPr lang="en-US" dirty="0"/>
-              <a:t>• Do not claim setup has already happened. A future lab author must supply a dedicated Entra-backed Azure DevOps Services organization/project, Foundry project and judge deployment, least-privilege identity, and known work-item fixtures.
-• GROUNDING SOURCE: https://learn.microsoft.com/en-us/azure/devops/mcp-server/remote-mcp-server?view=azure-devops
+              <a:t>• Include positive read, positive write, and no-tool cases. Ground truth must include the consolidated tool plus action. Repeat enough to observe variation, then report the observed rate without inventing a universal threshold.
 • GROUNDING SOURCE: https://learn.microsoft.com/en-us/agent-framework/agents/evaluation?tabs=python</a:t>
             </a:r>
             <a:endParaRPr lang="en-US" dirty="0"/>
@@ -782,9 +783,9 @@
           <a:p>
             <a:r>
               <a:rPr lang="en-US" dirty="0"/>
-              <a:t>• Definition of done is behavioral, not an arbitrary score. Troubleshoot from auth to discovery to selection to execution. Preserve the read-first boundary while debugging.
-• GROUNDING SOURCE: https://learn.microsoft.com/en-us/agent-framework/agents/evaluation?tabs=python
-• GROUNDING SOURCE: https://learn.microsoft.com/en-us/azure/devops/mcp-server/remote-mcp-server?view=azure-devops</a:t>
+              <a:t>• Do not claim setup has already happened. A future lab author must supply a dedicated Entra-backed Azure DevOps Services organization/project, Foundry project and judge deployment, least-privilege identity, and known work-item fixtures.
+• GROUNDING SOURCE: https://learn.microsoft.com/en-us/azure/devops/mcp-server/remote-mcp-server?view=azure-devops
+• GROUNDING SOURCE: https://learn.microsoft.com/en-us/agent-framework/agents/evaluation?tabs=python</a:t>
             </a:r>
             <a:endParaRPr lang="en-US" dirty="0"/>
           </a:p>
@@ -872,8 +873,9 @@
           <a:p>
             <a:r>
               <a:rPr lang="en-US" dirty="0"/>
-              <a:t>• Close the core Day 3 live time here. If time permits, continue to the explicitly optional harness comparison. Otherwise, learners have all required primitives for a future lab.
-• GROUNDING SOURCE: https://learn.microsoft.com/en-us/agent-framework/agents/evaluation?tabs=python</a:t>
+              <a:t>• Definition of done is behavioral, not an arbitrary score. Troubleshoot from auth to discovery to selection to execution. Preserve the read-first boundary while debugging.
+• GROUNDING SOURCE: https://learn.microsoft.com/en-us/agent-framework/agents/evaluation?tabs=python
+• GROUNDING SOURCE: https://learn.microsoft.com/en-us/azure/devops/mcp-server/remote-mcp-server?view=azure-devops</a:t>
             </a:r>
             <a:endParaRPr lang="en-US" dirty="0"/>
           </a:p>
@@ -897,6 +899,95 @@
             <a:fld id="{F7021451-1387-4CA6-816F-3879F97B5CBC}" type="slidenum">
               <a:rPr lang="en-US"/>
               <a:t>13</a:t>
+            </a:fld>
+            <a:endParaRPr lang="en-US"/>
+          </a:p>
+        </p:txBody>
+      </p:sp>
+    </p:spTree>
+    <p:extLst>
+      <p:ext uri="{BB962C8B-B14F-4D97-AF65-F5344CB8AC3E}">
+        <p14:creationId xmlns:p14="http://schemas.microsoft.com/office/powerpoint/2010/main" val="1024086991"/>
+      </p:ext>
+    </p:extLst>
+  </p:cSld>
+  <p:clrMapOvr>
+    <a:masterClrMapping/>
+  </p:clrMapOvr>
+</p:notes>
+</file>
+
+<file path=ppt/notesSlides/notesSlide14.xml><?xml version="1.0" encoding="utf-8"?>
+<p:notes xmlns:a="http://schemas.openxmlformats.org/drawingml/2006/main" xmlns:r="http://schemas.openxmlformats.org/officeDocument/2006/relationships" xmlns:p="http://schemas.openxmlformats.org/presentationml/2006/main">
+  <p:cSld>
+    <p:spTree>
+      <p:nvGrpSpPr>
+        <p:cNvPr id="1" name=""/>
+        <p:cNvGrpSpPr/>
+        <p:nvPr/>
+      </p:nvGrpSpPr>
+      <p:grpSpPr>
+        <a:xfrm>
+          <a:off x="0" y="0"/>
+          <a:ext cx="0" cy="0"/>
+          <a:chOff x="0" y="0"/>
+          <a:chExt cx="0" cy="0"/>
+        </a:xfrm>
+      </p:grpSpPr>
+      <p:sp>
+        <p:nvSpPr>
+          <p:cNvPr id="2" name="Slide Image Placeholder 1"/>
+          <p:cNvSpPr>
+            <a:spLocks noGrp="1" noRot="1" noChangeAspect="1"/>
+          </p:cNvSpPr>
+          <p:nvPr>
+            <p:ph type="sldImg"/>
+          </p:nvPr>
+        </p:nvSpPr>
+        <p:spPr/>
+      </p:sp>
+      <p:sp>
+        <p:nvSpPr>
+          <p:cNvPr id="3" name="Notes Placeholder 2"/>
+          <p:cNvSpPr>
+            <a:spLocks noGrp="1"/>
+          </p:cNvSpPr>
+          <p:nvPr>
+            <p:ph type="body" idx="1"/>
+          </p:nvPr>
+        </p:nvSpPr>
+        <p:spPr/>
+        <p:txBody>
+          <a:bodyPr/>
+          <a:lstStyle/>
+          <a:p>
+            <a:r>
+              <a:rPr lang="en-US" dirty="0"/>
+              <a:t>• Close the core Day 3 live time here. If time permits, continue to the explicitly optional harness comparison. Otherwise, learners have all required primitives for a future lab.
+• GROUNDING SOURCE: https://learn.microsoft.com/en-us/agent-framework/agents/evaluation?tabs=python</a:t>
+            </a:r>
+            <a:endParaRPr lang="en-US" dirty="0"/>
+          </a:p>
+        </p:txBody>
+      </p:sp>
+      <p:sp>
+        <p:nvSpPr>
+          <p:cNvPr id="4" name="Slide Number Placeholder 3"/>
+          <p:cNvSpPr>
+            <a:spLocks noGrp="1"/>
+          </p:cNvSpPr>
+          <p:nvPr>
+            <p:ph type="sldNum" sz="quarter" idx="10"/>
+          </p:nvPr>
+        </p:nvSpPr>
+        <p:spPr/>
+        <p:txBody>
+          <a:bodyPr/>
+          <a:lstStyle/>
+          <a:p>
+            <a:fld id="{F7021451-1387-4CA6-816F-3879F97B5CBC}" type="slidenum">
+              <a:rPr lang="en-US"/>
+              <a:t>14</a:t>
             </a:fld>
             <a:endParaRPr lang="en-US"/>
           </a:p>
@@ -1139,8 +1230,8 @@
           <a:p>
             <a:r>
               <a:rPr lang="en-US" dirty="0"/>
-              <a:t>• num_repetitions runs each query independently multiple times. Do not teach one universal pass percentage; choose acceptance criteria from risk, use case, sample size, and observed variance.
-• GROUNDING SOURCE: https://learn.microsoft.com/en-us/agent-framework/agents/evaluation?tabs=python</a:t>
+              <a:t>• Placeholder marker slide — the runbook has full narration, setup, and fallback plan. Runs evaluate_with_expected.py as-is, with one seeded query the agent is known to mis-tool on.
+• GROUNDING SOURCE: https://github.com/microsoft/agent-framework/blob/main/python/samples/02-agents/evaluation/evaluate_with_expected.py</a:t>
             </a:r>
             <a:endParaRPr lang="en-US" dirty="0"/>
           </a:p>
@@ -1228,9 +1319,8 @@
           <a:p>
             <a:r>
               <a:rPr lang="en-US" dirty="0"/>
-              <a:t>• Local checks are fast and deterministic. FoundryEvals uses the Foundry evaluation service and requires a project plus judge model deployment. A single run can include both providers and returns separate results.
-• GROUNDING SOURCE: https://learn.microsoft.com/en-us/agent-framework/agents/evaluation?tabs=python
-• GROUNDING SOURCE: https://learn.microsoft.com/en-us/agent-framework/integrations/by-component/evaluation/microsoft-foundry?tabs=python</a:t>
+              <a:t>• num_repetitions runs each query independently multiple times. Do not teach one universal pass percentage; choose acceptance criteria from risk, use case, sample size, and observed variance.
+• GROUNDING SOURCE: https://learn.microsoft.com/en-us/agent-framework/agents/evaluation?tabs=python</a:t>
             </a:r>
             <a:endParaRPr lang="en-US" dirty="0"/>
           </a:p>
@@ -1318,8 +1408,9 @@
           <a:p>
             <a:r>
               <a:rPr lang="en-US" dirty="0"/>
-              <a:t>• Highlight relevant categories rather than all available evaluators. FoundryEvals automatically adds tool call accuracy when items contain tool definitions; explicit constants are also available.
-• GROUNDING SOURCE: https://learn.microsoft.com/en-us/agent-framework/agents/evaluation?tabs=python</a:t>
+              <a:t>• Local checks are fast and deterministic. FoundryEvals uses the Foundry evaluation service and requires a project plus judge model deployment. A single run can include both providers and returns separate results.
+• GROUNDING SOURCE: https://learn.microsoft.com/en-us/agent-framework/agents/evaluation?tabs=python
+• GROUNDING SOURCE: https://learn.microsoft.com/en-us/agent-framework/integrations/by-component/evaluation/microsoft-foundry?tabs=python</a:t>
             </a:r>
             <a:endParaRPr lang="en-US" dirty="0"/>
           </a:p>
@@ -1407,9 +1498,7 @@
           <a:p>
             <a:r>
               <a:rPr lang="en-US" dirty="0"/>
-              <a:t>• This sequence composes the day's primitives. It is a proposed lab flow only; the repository intentionally has no labs/day3 implementation yet.
-• GROUNDING SOURCE: https://learn.microsoft.com/en-us/agent-framework/concepts/agents/conversations/session?tabs=python
-• GROUNDING SOURCE: https://learn.microsoft.com/en-us/agent-framework/agents/structured-outputs?tabs=python
+              <a:t>• Highlight relevant categories rather than all available evaluators. FoundryEvals automatically adds tool call accuracy when items contain tool definitions; explicit constants are also available.
 • GROUNDING SOURCE: https://learn.microsoft.com/en-us/agent-framework/agents/evaluation?tabs=python</a:t>
             </a:r>
             <a:endParaRPr lang="en-US" dirty="0"/>
@@ -1498,10 +1587,10 @@
           <a:p>
             <a:r>
               <a:rPr lang="en-US" dirty="0"/>
-              <a:t>• Part A proves continuity and the response contract. Part B adds cross-cutting controls without changing the core docs-assistant instructions or tools.
+              <a:t>• This sequence composes the day's primitives. It is a proposed lab flow only; the repository intentionally has no labs/day3 implementation yet.
 • GROUNDING SOURCE: https://learn.microsoft.com/en-us/agent-framework/concepts/agents/conversations/session?tabs=python
 • GROUNDING SOURCE: https://learn.microsoft.com/en-us/agent-framework/agents/structured-outputs?tabs=python
-• GROUNDING SOURCE: https://learn.microsoft.com/en-us/agent-framework/concepts/agents/middleware/?tabs=python</a:t>
+• GROUNDING SOURCE: https://learn.microsoft.com/en-us/agent-framework/agents/evaluation?tabs=python</a:t>
             </a:r>
             <a:endParaRPr lang="en-US" dirty="0"/>
           </a:p>
@@ -1589,9 +1678,10 @@
           <a:p>
             <a:r>
               <a:rPr lang="en-US" dirty="0"/>
-              <a:t>• Part C uses only the read dispatcher with the wit toolset and read-only header. Part D enables only the needed write tool and requires approval after showing the current record and proposed arguments.
-• GROUNDING SOURCE: https://learn.microsoft.com/en-us/azure/devops/mcp-server/remote-mcp-server?view=azure-devops
-• GROUNDING SOURCE: https://learn.microsoft.com/en-us/agent-framework/agents/tools/tool-approval?tabs=python</a:t>
+              <a:t>• Part A proves continuity and the response contract. Part B adds cross-cutting controls without changing the core docs-assistant instructions or tools.
+• GROUNDING SOURCE: https://learn.microsoft.com/en-us/agent-framework/concepts/agents/conversations/session?tabs=python
+• GROUNDING SOURCE: https://learn.microsoft.com/en-us/agent-framework/agents/structured-outputs?tabs=python
+• GROUNDING SOURCE: https://learn.microsoft.com/en-us/agent-framework/concepts/agents/middleware/?tabs=python</a:t>
             </a:r>
             <a:endParaRPr lang="en-US" dirty="0"/>
           </a:p>
@@ -2312,7 +2402,7 @@
                 <a:ea typeface="Calibri" pitchFamily="34" charset="-122"/>
                 <a:cs typeface="Calibri" pitchFamily="34" charset="-120"/>
               </a:rPr>
-              <a:t>Part E: evaluate the tool contract</a:t>
+              <a:t>Part C + D: read before write</a:t>
             </a:r>
             <a:endParaRPr lang="en-US" sz="2800" dirty="0"/>
           </a:p>
@@ -2326,18 +2416,178 @@
         </p:nvSpPr>
         <p:spPr>
           <a:xfrm>
-            <a:off x="365760" y="1216152"/>
-            <a:ext cx="2633472" cy="1572768"/>
+            <a:off x="365760" y="1078992"/>
+            <a:ext cx="4114800" cy="3493008"/>
           </a:xfrm>
           <a:prstGeom prst="roundRect">
-            <a:avLst>
-              <a:gd name="adj" fmla="val 3488"/>
-            </a:avLst>
+            <a:avLst/>
+          </a:prstGeom>
+          <a:solidFill>
+            <a:srgbClr val="F3F4F6"/>
+          </a:solidFill>
+          <a:ln w="11430">
+            <a:solidFill>
+              <a:srgbClr val="D1D5DB"/>
+            </a:solidFill>
+            <a:prstDash val="solid"/>
+          </a:ln>
+        </p:spPr>
+      </p:sp>
+      <p:sp>
+        <p:nvSpPr>
+          <p:cNvPr id="6" name="Text 4"/>
+          <p:cNvSpPr/>
+          <p:nvPr/>
+        </p:nvSpPr>
+        <p:spPr>
+          <a:xfrm>
+            <a:off x="566928" y="1298448"/>
+            <a:ext cx="3712464" cy="411480"/>
+          </a:xfrm>
+          <a:prstGeom prst="rect">
+            <a:avLst/>
+          </a:prstGeom>
+          <a:noFill/>
+          <a:ln/>
+        </p:spPr>
+        <p:txBody>
+          <a:bodyPr wrap="square" lIns="0" tIns="0" rIns="0" bIns="0" rtlCol="0" anchor="ctr">
+            <a:normAutofit/>
+          </a:bodyPr>
+          <a:lstStyle/>
+          <a:p>
+            <a:pPr indent="0" marL="0">
+              <a:buNone/>
+            </a:pPr>
+            <a:r>
+              <a:rPr lang="en-US" sz="2000" b="1" dirty="0">
+                <a:solidFill>
+                  <a:srgbClr val="1E2761"/>
+                </a:solidFill>
+                <a:latin typeface="Calibri" pitchFamily="34" charset="0"/>
+                <a:ea typeface="Calibri" pitchFamily="34" charset="-122"/>
+                <a:cs typeface="Calibri" pitchFamily="34" charset="-120"/>
+              </a:rPr>
+              <a:t>Part C · Read-only</a:t>
+            </a:r>
+            <a:endParaRPr lang="en-US" sz="2000" dirty="0"/>
+          </a:p>
+        </p:txBody>
+      </p:sp>
+      <p:sp>
+        <p:nvSpPr>
+          <p:cNvPr id="7" name="Text 5"/>
+          <p:cNvSpPr/>
+          <p:nvPr/>
+        </p:nvSpPr>
+        <p:spPr>
+          <a:xfrm>
+            <a:off x="594360" y="1828800"/>
+            <a:ext cx="3639312" cy="2395728"/>
+          </a:xfrm>
+          <a:prstGeom prst="rect">
+            <a:avLst/>
+          </a:prstGeom>
+          <a:noFill/>
+          <a:ln/>
+        </p:spPr>
+        <p:txBody>
+          <a:bodyPr wrap="square" lIns="381" tIns="381" rIns="381" bIns="381" rtlCol="0" anchor="ctr">
+            <a:normAutofit/>
+          </a:bodyPr>
+          <a:lstStyle/>
+          <a:p>
+            <a:pPr marL="342900" indent="-342900">
+              <a:buSzPct val="100000"/>
+              <a:buChar char="•"/>
+            </a:pPr>
+            <a:r>
+              <a:rPr lang="en-US" sz="1300" dirty="0">
+                <a:solidFill>
+                  <a:srgbClr val="212121"/>
+                </a:solidFill>
+                <a:latin typeface="Calibri" pitchFamily="34" charset="0"/>
+                <a:ea typeface="Calibri" pitchFamily="34" charset="-122"/>
+                <a:cs typeface="Calibri" pitchFamily="34" charset="-120"/>
+              </a:rPr>
+              <a:t>X-MCP-Toolsets: wit</a:t>
+            </a:r>
+            <a:endParaRPr lang="en-US" sz="1300" dirty="0"/>
+          </a:p>
+          <a:p>
+            <a:pPr marL="342900" indent="-342900">
+              <a:buSzPct val="100000"/>
+              <a:buChar char="•"/>
+            </a:pPr>
+            <a:r>
+              <a:rPr lang="en-US" sz="1300" dirty="0">
+                <a:solidFill>
+                  <a:srgbClr val="212121"/>
+                </a:solidFill>
+                <a:latin typeface="Calibri" pitchFamily="34" charset="0"/>
+                <a:ea typeface="Calibri" pitchFamily="34" charset="-122"/>
+                <a:cs typeface="Calibri" pitchFamily="34" charset="-120"/>
+              </a:rPr>
+              <a:t>X-MCP-Readonly: true</a:t>
+            </a:r>
+            <a:endParaRPr lang="en-US" sz="1300" dirty="0"/>
+          </a:p>
+          <a:p>
+            <a:pPr marL="342900" indent="-342900">
+              <a:buSzPct val="100000"/>
+              <a:buChar char="•"/>
+            </a:pPr>
+            <a:r>
+              <a:rPr lang="en-US" sz="1300" dirty="0">
+                <a:solidFill>
+                  <a:srgbClr val="212121"/>
+                </a:solidFill>
+                <a:latin typeface="Calibri" pitchFamily="34" charset="0"/>
+                <a:ea typeface="Calibri" pitchFamily="34" charset="-122"/>
+                <a:cs typeface="Calibri" pitchFamily="34" charset="-120"/>
+              </a:rPr>
+              <a:t>wit_work_item with get or my</a:t>
+            </a:r>
+            <a:endParaRPr lang="en-US" sz="1300" dirty="0"/>
+          </a:p>
+          <a:p>
+            <a:pPr marL="342900" indent="-342900">
+              <a:buSzPct val="100000"/>
+              <a:buChar char="•"/>
+            </a:pPr>
+            <a:r>
+              <a:rPr lang="en-US" sz="1300" dirty="0">
+                <a:solidFill>
+                  <a:srgbClr val="212121"/>
+                </a:solidFill>
+                <a:latin typeface="Calibri" pitchFamily="34" charset="0"/>
+                <a:ea typeface="Calibri" pitchFamily="34" charset="-122"/>
+                <a:cs typeface="Calibri" pitchFamily="34" charset="-120"/>
+              </a:rPr>
+              <a:t>Verify result against the workshop project</a:t>
+            </a:r>
+            <a:endParaRPr lang="en-US" sz="1300" dirty="0"/>
+          </a:p>
+        </p:txBody>
+      </p:sp>
+      <p:sp>
+        <p:nvSpPr>
+          <p:cNvPr id="8" name="Shape 6"/>
+          <p:cNvSpPr/>
+          <p:nvPr/>
+        </p:nvSpPr>
+        <p:spPr>
+          <a:xfrm>
+            <a:off x="4663440" y="1078992"/>
+            <a:ext cx="4114800" cy="3493008"/>
+          </a:xfrm>
+          <a:prstGeom prst="roundRect">
+            <a:avLst/>
           </a:prstGeom>
           <a:solidFill>
             <a:srgbClr val="CADCFC"/>
           </a:solidFill>
-          <a:ln w="10160">
+          <a:ln w="11430">
             <a:solidFill>
               <a:srgbClr val="1E2761"/>
             </a:solidFill>
@@ -2347,73 +2597,14 @@
       </p:sp>
       <p:sp>
         <p:nvSpPr>
-          <p:cNvPr id="6" name="Shape 4"/>
-          <p:cNvSpPr/>
-          <p:nvPr/>
-        </p:nvSpPr>
-        <p:spPr>
-          <a:xfrm>
-            <a:off x="475488" y="1335024"/>
-            <a:ext cx="320040" cy="320040"/>
-          </a:xfrm>
-          <a:prstGeom prst="ellipse">
-            <a:avLst/>
-          </a:prstGeom>
-          <a:solidFill>
-            <a:srgbClr val="1E2761"/>
-          </a:solidFill>
-          <a:ln/>
-        </p:spPr>
-      </p:sp>
-      <p:sp>
-        <p:nvSpPr>
-          <p:cNvPr id="7" name="Text 5"/>
-          <p:cNvSpPr/>
-          <p:nvPr/>
-        </p:nvSpPr>
-        <p:spPr>
-          <a:xfrm>
-            <a:off x="475488" y="1385316"/>
-            <a:ext cx="320040" cy="146304"/>
-          </a:xfrm>
-          <a:prstGeom prst="rect">
-            <a:avLst/>
-          </a:prstGeom>
-          <a:noFill/>
-          <a:ln/>
-        </p:spPr>
-        <p:txBody>
-          <a:bodyPr wrap="square" lIns="0" tIns="0" rIns="0" bIns="0" rtlCol="0" anchor="ctr"/>
-          <a:lstStyle/>
-          <a:p>
-            <a:pPr algn="ctr" indent="0" marL="0">
-              <a:buNone/>
-            </a:pPr>
-            <a:r>
-              <a:rPr lang="en-US" sz="900" b="1" dirty="0">
-                <a:solidFill>
-                  <a:srgbClr val="FFFFFF"/>
-                </a:solidFill>
-                <a:latin typeface="Calibri" pitchFamily="34" charset="0"/>
-                <a:ea typeface="Calibri" pitchFamily="34" charset="-122"/>
-                <a:cs typeface="Calibri" pitchFamily="34" charset="-120"/>
-              </a:rPr>
-              <a:t>1</a:t>
-            </a:r>
-            <a:endParaRPr lang="en-US" sz="900" dirty="0"/>
-          </a:p>
-        </p:txBody>
-      </p:sp>
-      <p:sp>
-        <p:nvSpPr>
-          <p:cNvPr id="8" name="Text 6"/>
-          <p:cNvSpPr/>
-          <p:nvPr/>
-        </p:nvSpPr>
-        <p:spPr>
-          <a:xfrm>
-            <a:off x="896112" y="1335024"/>
-            <a:ext cx="1975104" cy="310896"/>
+          <p:cNvPr id="9" name="Text 7"/>
+          <p:cNvSpPr/>
+          <p:nvPr/>
+        </p:nvSpPr>
+        <p:spPr>
+          <a:xfrm>
+            <a:off x="4864608" y="1298448"/>
+            <a:ext cx="3712464" cy="411480"/>
           </a:xfrm>
           <a:prstGeom prst="rect">
             <a:avLst/>
@@ -2431,7 +2622,7 @@
               <a:buNone/>
             </a:pPr>
             <a:r>
-              <a:rPr lang="en-US" sz="1500" b="1" dirty="0">
+              <a:rPr lang="en-US" sz="2000" b="1" dirty="0">
                 <a:solidFill>
                   <a:srgbClr val="1E2761"/>
                 </a:solidFill>
@@ -2439,40 +2630,41 @@
                 <a:ea typeface="Calibri" pitchFamily="34" charset="-122"/>
                 <a:cs typeface="Calibri" pitchFamily="34" charset="-120"/>
               </a:rPr>
-              <a:t>Golden cases</a:t>
-            </a:r>
-            <a:endParaRPr lang="en-US" sz="1500" dirty="0"/>
-          </a:p>
-        </p:txBody>
-      </p:sp>
-      <p:sp>
-        <p:nvSpPr>
-          <p:cNvPr id="9" name="Text 7"/>
-          <p:cNvSpPr/>
-          <p:nvPr/>
-        </p:nvSpPr>
-        <p:spPr>
-          <a:xfrm>
-            <a:off x="512064" y="1719072"/>
-            <a:ext cx="2340864" cy="950976"/>
-          </a:xfrm>
-          <a:prstGeom prst="rect">
-            <a:avLst/>
-          </a:prstGeom>
-          <a:noFill/>
-          <a:ln/>
-        </p:spPr>
-        <p:txBody>
-          <a:bodyPr wrap="square" lIns="0" tIns="0" rIns="0" bIns="0" rtlCol="0" anchor="t">
+              <a:t>Part D · Approved write</a:t>
+            </a:r>
+            <a:endParaRPr lang="en-US" sz="2000" dirty="0"/>
+          </a:p>
+        </p:txBody>
+      </p:sp>
+      <p:sp>
+        <p:nvSpPr>
+          <p:cNvPr id="10" name="Text 8"/>
+          <p:cNvSpPr/>
+          <p:nvPr/>
+        </p:nvSpPr>
+        <p:spPr>
+          <a:xfrm>
+            <a:off x="4892040" y="1828800"/>
+            <a:ext cx="3639312" cy="2395728"/>
+          </a:xfrm>
+          <a:prstGeom prst="rect">
+            <a:avLst/>
+          </a:prstGeom>
+          <a:noFill/>
+          <a:ln/>
+        </p:spPr>
+        <p:txBody>
+          <a:bodyPr wrap="square" lIns="381" tIns="381" rIns="381" bIns="381" rtlCol="0" anchor="ctr">
             <a:normAutofit/>
           </a:bodyPr>
           <a:lstStyle/>
           <a:p>
-            <a:pPr indent="0" marL="0">
-              <a:buNone/>
-            </a:pPr>
-            <a:r>
-              <a:rPr lang="en-US" sz="1150" dirty="0">
+            <a:pPr marL="342900" indent="-342900">
+              <a:buSzPct val="100000"/>
+              <a:buChar char="•"/>
+            </a:pPr>
+            <a:r>
+              <a:rPr lang="en-US" sz="1300" dirty="0">
                 <a:solidFill>
                   <a:srgbClr val="212121"/>
                 </a:solidFill>
@@ -2480,747 +2672,69 @@
                 <a:ea typeface="Calibri" pitchFamily="34" charset="-122"/>
                 <a:cs typeface="Calibri" pitchFamily="34" charset="-120"/>
               </a:rPr>
-              <a:t>Read, approved write, rejected write, and no-tool request</a:t>
-            </a:r>
-            <a:endParaRPr lang="en-US" sz="1150" dirty="0"/>
-          </a:p>
-        </p:txBody>
-      </p:sp>
-      <p:sp>
-        <p:nvSpPr>
-          <p:cNvPr id="10" name="Shape 8"/>
-          <p:cNvSpPr/>
-          <p:nvPr/>
-        </p:nvSpPr>
-        <p:spPr>
-          <a:xfrm>
-            <a:off x="3035808" y="1892808"/>
-            <a:ext cx="164592" cy="219456"/>
-          </a:xfrm>
-          <a:prstGeom prst="chevron">
-            <a:avLst/>
-          </a:prstGeom>
-          <a:solidFill>
-            <a:srgbClr val="E8A87C"/>
-          </a:solidFill>
-          <a:ln/>
-        </p:spPr>
+              <a:t>Allow wit_work_item_write</a:t>
+            </a:r>
+            <a:endParaRPr lang="en-US" sz="1300" dirty="0"/>
+          </a:p>
+          <a:p>
+            <a:pPr marL="342900" indent="-342900">
+              <a:buSzPct val="100000"/>
+              <a:buChar char="•"/>
+            </a:pPr>
+            <a:r>
+              <a:rPr lang="en-US" sz="1300" dirty="0">
+                <a:solidFill>
+                  <a:srgbClr val="212121"/>
+                </a:solidFill>
+                <a:latin typeface="Calibri" pitchFamily="34" charset="0"/>
+                <a:ea typeface="Calibri" pitchFamily="34" charset="-122"/>
+                <a:cs typeface="Calibri" pitchFamily="34" charset="-120"/>
+              </a:rPr>
+              <a:t>Use create or update</a:t>
+            </a:r>
+            <a:endParaRPr lang="en-US" sz="1300" dirty="0"/>
+          </a:p>
+          <a:p>
+            <a:pPr marL="342900" indent="-342900">
+              <a:buSzPct val="100000"/>
+              <a:buChar char="•"/>
+            </a:pPr>
+            <a:r>
+              <a:rPr lang="en-US" sz="1300" dirty="0">
+                <a:solidFill>
+                  <a:srgbClr val="212121"/>
+                </a:solidFill>
+                <a:latin typeface="Calibri" pitchFamily="34" charset="0"/>
+                <a:ea typeface="Calibri" pitchFamily="34" charset="-122"/>
+                <a:cs typeface="Calibri" pitchFamily="34" charset="-120"/>
+              </a:rPr>
+              <a:t>Show exact arguments before approval</a:t>
+            </a:r>
+            <a:endParaRPr lang="en-US" sz="1300" dirty="0"/>
+          </a:p>
+          <a:p>
+            <a:pPr marL="342900" indent="-342900">
+              <a:buSzPct val="100000"/>
+              <a:buChar char="•"/>
+            </a:pPr>
+            <a:r>
+              <a:rPr lang="en-US" sz="1300" dirty="0">
+                <a:solidFill>
+                  <a:srgbClr val="212121"/>
+                </a:solidFill>
+                <a:latin typeface="Calibri" pitchFamily="34" charset="0"/>
+                <a:ea typeface="Calibri" pitchFamily="34" charset="-122"/>
+                <a:cs typeface="Calibri" pitchFamily="34" charset="-120"/>
+              </a:rPr>
+              <a:t>Read again to verify the mutation</a:t>
+            </a:r>
+            <a:endParaRPr lang="en-US" sz="1300" dirty="0"/>
+          </a:p>
+        </p:txBody>
       </p:sp>
       <p:sp>
         <p:nvSpPr>
           <p:cNvPr id="11" name="Shape 9"/>
-          <p:cNvSpPr/>
-          <p:nvPr/>
-        </p:nvSpPr>
-        <p:spPr>
-          <a:xfrm>
-            <a:off x="3255264" y="1216152"/>
-            <a:ext cx="2633472" cy="1572768"/>
-          </a:xfrm>
-          <a:prstGeom prst="roundRect">
-            <a:avLst>
-              <a:gd name="adj" fmla="val 3488"/>
-            </a:avLst>
-          </a:prstGeom>
-          <a:solidFill>
-            <a:srgbClr val="F3F4F6"/>
-          </a:solidFill>
-          <a:ln w="10160">
-            <a:solidFill>
-              <a:srgbClr val="D1D5DB"/>
-            </a:solidFill>
-            <a:prstDash val="solid"/>
-          </a:ln>
-        </p:spPr>
-      </p:sp>
-      <p:sp>
-        <p:nvSpPr>
-          <p:cNvPr id="12" name="Shape 10"/>
-          <p:cNvSpPr/>
-          <p:nvPr/>
-        </p:nvSpPr>
-        <p:spPr>
-          <a:xfrm>
-            <a:off x="3364992" y="1335024"/>
-            <a:ext cx="320040" cy="320040"/>
-          </a:xfrm>
-          <a:prstGeom prst="ellipse">
-            <a:avLst/>
-          </a:prstGeom>
-          <a:solidFill>
-            <a:srgbClr val="1E2761"/>
-          </a:solidFill>
-          <a:ln/>
-        </p:spPr>
-      </p:sp>
-      <p:sp>
-        <p:nvSpPr>
-          <p:cNvPr id="13" name="Text 11"/>
-          <p:cNvSpPr/>
-          <p:nvPr/>
-        </p:nvSpPr>
-        <p:spPr>
-          <a:xfrm>
-            <a:off x="3364992" y="1385316"/>
-            <a:ext cx="320040" cy="146304"/>
-          </a:xfrm>
-          <a:prstGeom prst="rect">
-            <a:avLst/>
-          </a:prstGeom>
-          <a:noFill/>
-          <a:ln/>
-        </p:spPr>
-        <p:txBody>
-          <a:bodyPr wrap="square" lIns="0" tIns="0" rIns="0" bIns="0" rtlCol="0" anchor="ctr"/>
-          <a:lstStyle/>
-          <a:p>
-            <a:pPr algn="ctr" indent="0" marL="0">
-              <a:buNone/>
-            </a:pPr>
-            <a:r>
-              <a:rPr lang="en-US" sz="900" b="1" dirty="0">
-                <a:solidFill>
-                  <a:srgbClr val="FFFFFF"/>
-                </a:solidFill>
-                <a:latin typeface="Calibri" pitchFamily="34" charset="0"/>
-                <a:ea typeface="Calibri" pitchFamily="34" charset="-122"/>
-                <a:cs typeface="Calibri" pitchFamily="34" charset="-120"/>
-              </a:rPr>
-              <a:t>2</a:t>
-            </a:r>
-            <a:endParaRPr lang="en-US" sz="900" dirty="0"/>
-          </a:p>
-        </p:txBody>
-      </p:sp>
-      <p:sp>
-        <p:nvSpPr>
-          <p:cNvPr id="14" name="Text 12"/>
-          <p:cNvSpPr/>
-          <p:nvPr/>
-        </p:nvSpPr>
-        <p:spPr>
-          <a:xfrm>
-            <a:off x="3785616" y="1335024"/>
-            <a:ext cx="1975104" cy="310896"/>
-          </a:xfrm>
-          <a:prstGeom prst="rect">
-            <a:avLst/>
-          </a:prstGeom>
-          <a:noFill/>
-          <a:ln/>
-        </p:spPr>
-        <p:txBody>
-          <a:bodyPr wrap="square" lIns="0" tIns="0" rIns="0" bIns="0" rtlCol="0" anchor="ctr">
-            <a:normAutofit/>
-          </a:bodyPr>
-          <a:lstStyle/>
-          <a:p>
-            <a:pPr indent="0" marL="0">
-              <a:buNone/>
-            </a:pPr>
-            <a:r>
-              <a:rPr lang="en-US" sz="1500" b="1" dirty="0">
-                <a:solidFill>
-                  <a:srgbClr val="1E2761"/>
-                </a:solidFill>
-                <a:latin typeface="Calibri" pitchFamily="34" charset="0"/>
-                <a:ea typeface="Calibri" pitchFamily="34" charset="-122"/>
-                <a:cs typeface="Calibri" pitchFamily="34" charset="-120"/>
-              </a:rPr>
-              <a:t>Expected calls</a:t>
-            </a:r>
-            <a:endParaRPr lang="en-US" sz="1500" dirty="0"/>
-          </a:p>
-        </p:txBody>
-      </p:sp>
-      <p:sp>
-        <p:nvSpPr>
-          <p:cNvPr id="15" name="Text 13"/>
-          <p:cNvSpPr/>
-          <p:nvPr/>
-        </p:nvSpPr>
-        <p:spPr>
-          <a:xfrm>
-            <a:off x="3401568" y="1719072"/>
-            <a:ext cx="2340864" cy="950976"/>
-          </a:xfrm>
-          <a:prstGeom prst="rect">
-            <a:avLst/>
-          </a:prstGeom>
-          <a:noFill/>
-          <a:ln/>
-        </p:spPr>
-        <p:txBody>
-          <a:bodyPr wrap="square" lIns="0" tIns="0" rIns="0" bIns="0" rtlCol="0" anchor="t">
-            <a:normAutofit/>
-          </a:bodyPr>
-          <a:lstStyle/>
-          <a:p>
-            <a:pPr indent="0" marL="0">
-              <a:buNone/>
-            </a:pPr>
-            <a:r>
-              <a:rPr lang="en-US" sz="1150" dirty="0">
-                <a:solidFill>
-                  <a:srgbClr val="212121"/>
-                </a:solidFill>
-                <a:latin typeface="Calibri" pitchFamily="34" charset="0"/>
-                <a:ea typeface="Calibri" pitchFamily="34" charset="-122"/>
-                <a:cs typeface="Calibri" pitchFamily="34" charset="-120"/>
-              </a:rPr>
-              <a:t>Tool name plus action and key arguments</a:t>
-            </a:r>
-            <a:endParaRPr lang="en-US" sz="1150" dirty="0"/>
-          </a:p>
-        </p:txBody>
-      </p:sp>
-      <p:sp>
-        <p:nvSpPr>
-          <p:cNvPr id="16" name="Shape 14"/>
-          <p:cNvSpPr/>
-          <p:nvPr/>
-        </p:nvSpPr>
-        <p:spPr>
-          <a:xfrm>
-            <a:off x="5925312" y="1892808"/>
-            <a:ext cx="164592" cy="219456"/>
-          </a:xfrm>
-          <a:prstGeom prst="chevron">
-            <a:avLst/>
-          </a:prstGeom>
-          <a:solidFill>
-            <a:srgbClr val="E8A87C"/>
-          </a:solidFill>
-          <a:ln/>
-        </p:spPr>
-      </p:sp>
-      <p:sp>
-        <p:nvSpPr>
-          <p:cNvPr id="17" name="Shape 15"/>
-          <p:cNvSpPr/>
-          <p:nvPr/>
-        </p:nvSpPr>
-        <p:spPr>
-          <a:xfrm>
-            <a:off x="6144768" y="1216152"/>
-            <a:ext cx="2633472" cy="1572768"/>
-          </a:xfrm>
-          <a:prstGeom prst="roundRect">
-            <a:avLst>
-              <a:gd name="adj" fmla="val 3488"/>
-            </a:avLst>
-          </a:prstGeom>
-          <a:solidFill>
-            <a:srgbClr val="F3F4F6"/>
-          </a:solidFill>
-          <a:ln w="10160">
-            <a:solidFill>
-              <a:srgbClr val="D1D5DB"/>
-            </a:solidFill>
-            <a:prstDash val="solid"/>
-          </a:ln>
-        </p:spPr>
-      </p:sp>
-      <p:sp>
-        <p:nvSpPr>
-          <p:cNvPr id="18" name="Shape 16"/>
-          <p:cNvSpPr/>
-          <p:nvPr/>
-        </p:nvSpPr>
-        <p:spPr>
-          <a:xfrm>
-            <a:off x="6254496" y="1335024"/>
-            <a:ext cx="320040" cy="320040"/>
-          </a:xfrm>
-          <a:prstGeom prst="ellipse">
-            <a:avLst/>
-          </a:prstGeom>
-          <a:solidFill>
-            <a:srgbClr val="1E2761"/>
-          </a:solidFill>
-          <a:ln/>
-        </p:spPr>
-      </p:sp>
-      <p:sp>
-        <p:nvSpPr>
-          <p:cNvPr id="19" name="Text 17"/>
-          <p:cNvSpPr/>
-          <p:nvPr/>
-        </p:nvSpPr>
-        <p:spPr>
-          <a:xfrm>
-            <a:off x="6254496" y="1385316"/>
-            <a:ext cx="320040" cy="146304"/>
-          </a:xfrm>
-          <a:prstGeom prst="rect">
-            <a:avLst/>
-          </a:prstGeom>
-          <a:noFill/>
-          <a:ln/>
-        </p:spPr>
-        <p:txBody>
-          <a:bodyPr wrap="square" lIns="0" tIns="0" rIns="0" bIns="0" rtlCol="0" anchor="ctr"/>
-          <a:lstStyle/>
-          <a:p>
-            <a:pPr algn="ctr" indent="0" marL="0">
-              <a:buNone/>
-            </a:pPr>
-            <a:r>
-              <a:rPr lang="en-US" sz="900" b="1" dirty="0">
-                <a:solidFill>
-                  <a:srgbClr val="FFFFFF"/>
-                </a:solidFill>
-                <a:latin typeface="Calibri" pitchFamily="34" charset="0"/>
-                <a:ea typeface="Calibri" pitchFamily="34" charset="-122"/>
-                <a:cs typeface="Calibri" pitchFamily="34" charset="-120"/>
-              </a:rPr>
-              <a:t>3</a:t>
-            </a:r>
-            <a:endParaRPr lang="en-US" sz="900" dirty="0"/>
-          </a:p>
-        </p:txBody>
-      </p:sp>
-      <p:sp>
-        <p:nvSpPr>
-          <p:cNvPr id="20" name="Text 18"/>
-          <p:cNvSpPr/>
-          <p:nvPr/>
-        </p:nvSpPr>
-        <p:spPr>
-          <a:xfrm>
-            <a:off x="6675120" y="1335024"/>
-            <a:ext cx="1975104" cy="310896"/>
-          </a:xfrm>
-          <a:prstGeom prst="rect">
-            <a:avLst/>
-          </a:prstGeom>
-          <a:noFill/>
-          <a:ln/>
-        </p:spPr>
-        <p:txBody>
-          <a:bodyPr wrap="square" lIns="0" tIns="0" rIns="0" bIns="0" rtlCol="0" anchor="ctr">
-            <a:normAutofit/>
-          </a:bodyPr>
-          <a:lstStyle/>
-          <a:p>
-            <a:pPr indent="0" marL="0">
-              <a:buNone/>
-            </a:pPr>
-            <a:r>
-              <a:rPr lang="en-US" sz="1500" b="1" dirty="0">
-                <a:solidFill>
-                  <a:srgbClr val="1E2761"/>
-                </a:solidFill>
-                <a:latin typeface="Calibri" pitchFamily="34" charset="0"/>
-                <a:ea typeface="Calibri" pitchFamily="34" charset="-122"/>
-                <a:cs typeface="Calibri" pitchFamily="34" charset="-120"/>
-              </a:rPr>
-              <a:t>Local checks</a:t>
-            </a:r>
-            <a:endParaRPr lang="en-US" sz="1500" dirty="0"/>
-          </a:p>
-        </p:txBody>
-      </p:sp>
-      <p:sp>
-        <p:nvSpPr>
-          <p:cNvPr id="21" name="Text 19"/>
-          <p:cNvSpPr/>
-          <p:nvPr/>
-        </p:nvSpPr>
-        <p:spPr>
-          <a:xfrm>
-            <a:off x="6291072" y="1719072"/>
-            <a:ext cx="2340864" cy="950976"/>
-          </a:xfrm>
-          <a:prstGeom prst="rect">
-            <a:avLst/>
-          </a:prstGeom>
-          <a:noFill/>
-          <a:ln/>
-        </p:spPr>
-        <p:txBody>
-          <a:bodyPr wrap="square" lIns="0" tIns="0" rIns="0" bIns="0" rtlCol="0" anchor="t">
-            <a:normAutofit/>
-          </a:bodyPr>
-          <a:lstStyle/>
-          <a:p>
-            <a:pPr indent="0" marL="0">
-              <a:buNone/>
-            </a:pPr>
-            <a:r>
-              <a:rPr lang="en-US" sz="1150" dirty="0">
-                <a:solidFill>
-                  <a:srgbClr val="212121"/>
-                </a:solidFill>
-                <a:latin typeface="Calibri" pitchFamily="34" charset="0"/>
-                <a:ea typeface="Calibri" pitchFamily="34" charset="-122"/>
-                <a:cs typeface="Calibri" pitchFamily="34" charset="-120"/>
-              </a:rPr>
-              <a:t>Presence and argument subset match</a:t>
-            </a:r>
-            <a:endParaRPr lang="en-US" sz="1150" dirty="0"/>
-          </a:p>
-        </p:txBody>
-      </p:sp>
-      <p:sp>
-        <p:nvSpPr>
-          <p:cNvPr id="22" name="Shape 20"/>
-          <p:cNvSpPr/>
-          <p:nvPr/>
-        </p:nvSpPr>
-        <p:spPr>
-          <a:xfrm>
-            <a:off x="365760" y="3044952"/>
-            <a:ext cx="2633472" cy="1572768"/>
-          </a:xfrm>
-          <a:prstGeom prst="roundRect">
-            <a:avLst>
-              <a:gd name="adj" fmla="val 3488"/>
-            </a:avLst>
-          </a:prstGeom>
-          <a:solidFill>
-            <a:srgbClr val="F3F4F6"/>
-          </a:solidFill>
-          <a:ln w="10160">
-            <a:solidFill>
-              <a:srgbClr val="D1D5DB"/>
-            </a:solidFill>
-            <a:prstDash val="solid"/>
-          </a:ln>
-        </p:spPr>
-      </p:sp>
-      <p:sp>
-        <p:nvSpPr>
-          <p:cNvPr id="23" name="Shape 21"/>
-          <p:cNvSpPr/>
-          <p:nvPr/>
-        </p:nvSpPr>
-        <p:spPr>
-          <a:xfrm>
-            <a:off x="475488" y="3163824"/>
-            <a:ext cx="320040" cy="320040"/>
-          </a:xfrm>
-          <a:prstGeom prst="ellipse">
-            <a:avLst/>
-          </a:prstGeom>
-          <a:solidFill>
-            <a:srgbClr val="1E2761"/>
-          </a:solidFill>
-          <a:ln/>
-        </p:spPr>
-      </p:sp>
-      <p:sp>
-        <p:nvSpPr>
-          <p:cNvPr id="24" name="Text 22"/>
-          <p:cNvSpPr/>
-          <p:nvPr/>
-        </p:nvSpPr>
-        <p:spPr>
-          <a:xfrm>
-            <a:off x="475488" y="3214116"/>
-            <a:ext cx="320040" cy="146304"/>
-          </a:xfrm>
-          <a:prstGeom prst="rect">
-            <a:avLst/>
-          </a:prstGeom>
-          <a:noFill/>
-          <a:ln/>
-        </p:spPr>
-        <p:txBody>
-          <a:bodyPr wrap="square" lIns="0" tIns="0" rIns="0" bIns="0" rtlCol="0" anchor="ctr"/>
-          <a:lstStyle/>
-          <a:p>
-            <a:pPr algn="ctr" indent="0" marL="0">
-              <a:buNone/>
-            </a:pPr>
-            <a:r>
-              <a:rPr lang="en-US" sz="900" b="1" dirty="0">
-                <a:solidFill>
-                  <a:srgbClr val="FFFFFF"/>
-                </a:solidFill>
-                <a:latin typeface="Calibri" pitchFamily="34" charset="0"/>
-                <a:ea typeface="Calibri" pitchFamily="34" charset="-122"/>
-                <a:cs typeface="Calibri" pitchFamily="34" charset="-120"/>
-              </a:rPr>
-              <a:t>4</a:t>
-            </a:r>
-            <a:endParaRPr lang="en-US" sz="900" dirty="0"/>
-          </a:p>
-        </p:txBody>
-      </p:sp>
-      <p:sp>
-        <p:nvSpPr>
-          <p:cNvPr id="25" name="Text 23"/>
-          <p:cNvSpPr/>
-          <p:nvPr/>
-        </p:nvSpPr>
-        <p:spPr>
-          <a:xfrm>
-            <a:off x="896112" y="3163824"/>
-            <a:ext cx="1975104" cy="310896"/>
-          </a:xfrm>
-          <a:prstGeom prst="rect">
-            <a:avLst/>
-          </a:prstGeom>
-          <a:noFill/>
-          <a:ln/>
-        </p:spPr>
-        <p:txBody>
-          <a:bodyPr wrap="square" lIns="0" tIns="0" rIns="0" bIns="0" rtlCol="0" anchor="ctr">
-            <a:normAutofit/>
-          </a:bodyPr>
-          <a:lstStyle/>
-          <a:p>
-            <a:pPr indent="0" marL="0">
-              <a:buNone/>
-            </a:pPr>
-            <a:r>
-              <a:rPr lang="en-US" sz="1500" b="1" dirty="0">
-                <a:solidFill>
-                  <a:srgbClr val="1E2761"/>
-                </a:solidFill>
-                <a:latin typeface="Calibri" pitchFamily="34" charset="0"/>
-                <a:ea typeface="Calibri" pitchFamily="34" charset="-122"/>
-                <a:cs typeface="Calibri" pitchFamily="34" charset="-120"/>
-              </a:rPr>
-              <a:t>Repetitions</a:t>
-            </a:r>
-            <a:endParaRPr lang="en-US" sz="1500" dirty="0"/>
-          </a:p>
-        </p:txBody>
-      </p:sp>
-      <p:sp>
-        <p:nvSpPr>
-          <p:cNvPr id="26" name="Text 24"/>
-          <p:cNvSpPr/>
-          <p:nvPr/>
-        </p:nvSpPr>
-        <p:spPr>
-          <a:xfrm>
-            <a:off x="512064" y="3547872"/>
-            <a:ext cx="2340864" cy="950976"/>
-          </a:xfrm>
-          <a:prstGeom prst="rect">
-            <a:avLst/>
-          </a:prstGeom>
-          <a:noFill/>
-          <a:ln/>
-        </p:spPr>
-        <p:txBody>
-          <a:bodyPr wrap="square" lIns="0" tIns="0" rIns="0" bIns="0" rtlCol="0" anchor="t">
-            <a:normAutofit/>
-          </a:bodyPr>
-          <a:lstStyle/>
-          <a:p>
-            <a:pPr indent="0" marL="0">
-              <a:buNone/>
-            </a:pPr>
-            <a:r>
-              <a:rPr lang="en-US" sz="1150" dirty="0">
-                <a:solidFill>
-                  <a:srgbClr val="212121"/>
-                </a:solidFill>
-                <a:latin typeface="Calibri" pitchFamily="34" charset="0"/>
-                <a:ea typeface="Calibri" pitchFamily="34" charset="-122"/>
-                <a:cs typeface="Calibri" pitchFamily="34" charset="-120"/>
-              </a:rPr>
-              <a:t>Observe consistency across independent runs</a:t>
-            </a:r>
-            <a:endParaRPr lang="en-US" sz="1150" dirty="0"/>
-          </a:p>
-        </p:txBody>
-      </p:sp>
-      <p:sp>
-        <p:nvSpPr>
-          <p:cNvPr id="27" name="Shape 25"/>
-          <p:cNvSpPr/>
-          <p:nvPr/>
-        </p:nvSpPr>
-        <p:spPr>
-          <a:xfrm>
-            <a:off x="3035808" y="3721608"/>
-            <a:ext cx="164592" cy="219456"/>
-          </a:xfrm>
-          <a:prstGeom prst="chevron">
-            <a:avLst/>
-          </a:prstGeom>
-          <a:solidFill>
-            <a:srgbClr val="E8A87C"/>
-          </a:solidFill>
-          <a:ln/>
-        </p:spPr>
-      </p:sp>
-      <p:sp>
-        <p:nvSpPr>
-          <p:cNvPr id="28" name="Shape 26"/>
-          <p:cNvSpPr/>
-          <p:nvPr/>
-        </p:nvSpPr>
-        <p:spPr>
-          <a:xfrm>
-            <a:off x="3255264" y="3044952"/>
-            <a:ext cx="2633472" cy="1572768"/>
-          </a:xfrm>
-          <a:prstGeom prst="roundRect">
-            <a:avLst>
-              <a:gd name="adj" fmla="val 3488"/>
-            </a:avLst>
-          </a:prstGeom>
-          <a:solidFill>
-            <a:srgbClr val="CADCFC"/>
-          </a:solidFill>
-          <a:ln w="10160">
-            <a:solidFill>
-              <a:srgbClr val="1E2761"/>
-            </a:solidFill>
-            <a:prstDash val="solid"/>
-          </a:ln>
-        </p:spPr>
-      </p:sp>
-      <p:sp>
-        <p:nvSpPr>
-          <p:cNvPr id="29" name="Shape 27"/>
-          <p:cNvSpPr/>
-          <p:nvPr/>
-        </p:nvSpPr>
-        <p:spPr>
-          <a:xfrm>
-            <a:off x="3364992" y="3163824"/>
-            <a:ext cx="320040" cy="320040"/>
-          </a:xfrm>
-          <a:prstGeom prst="ellipse">
-            <a:avLst/>
-          </a:prstGeom>
-          <a:solidFill>
-            <a:srgbClr val="1E2761"/>
-          </a:solidFill>
-          <a:ln/>
-        </p:spPr>
-      </p:sp>
-      <p:sp>
-        <p:nvSpPr>
-          <p:cNvPr id="30" name="Text 28"/>
-          <p:cNvSpPr/>
-          <p:nvPr/>
-        </p:nvSpPr>
-        <p:spPr>
-          <a:xfrm>
-            <a:off x="3364992" y="3214116"/>
-            <a:ext cx="320040" cy="146304"/>
-          </a:xfrm>
-          <a:prstGeom prst="rect">
-            <a:avLst/>
-          </a:prstGeom>
-          <a:noFill/>
-          <a:ln/>
-        </p:spPr>
-        <p:txBody>
-          <a:bodyPr wrap="square" lIns="0" tIns="0" rIns="0" bIns="0" rtlCol="0" anchor="ctr"/>
-          <a:lstStyle/>
-          <a:p>
-            <a:pPr algn="ctr" indent="0" marL="0">
-              <a:buNone/>
-            </a:pPr>
-            <a:r>
-              <a:rPr lang="en-US" sz="900" b="1" dirty="0">
-                <a:solidFill>
-                  <a:srgbClr val="FFFFFF"/>
-                </a:solidFill>
-                <a:latin typeface="Calibri" pitchFamily="34" charset="0"/>
-                <a:ea typeface="Calibri" pitchFamily="34" charset="-122"/>
-                <a:cs typeface="Calibri" pitchFamily="34" charset="-120"/>
-              </a:rPr>
-              <a:t>5</a:t>
-            </a:r>
-            <a:endParaRPr lang="en-US" sz="900" dirty="0"/>
-          </a:p>
-        </p:txBody>
-      </p:sp>
-      <p:sp>
-        <p:nvSpPr>
-          <p:cNvPr id="31" name="Text 29"/>
-          <p:cNvSpPr/>
-          <p:nvPr/>
-        </p:nvSpPr>
-        <p:spPr>
-          <a:xfrm>
-            <a:off x="3785616" y="3163824"/>
-            <a:ext cx="1975104" cy="310896"/>
-          </a:xfrm>
-          <a:prstGeom prst="rect">
-            <a:avLst/>
-          </a:prstGeom>
-          <a:noFill/>
-          <a:ln/>
-        </p:spPr>
-        <p:txBody>
-          <a:bodyPr wrap="square" lIns="0" tIns="0" rIns="0" bIns="0" rtlCol="0" anchor="ctr">
-            <a:normAutofit/>
-          </a:bodyPr>
-          <a:lstStyle/>
-          <a:p>
-            <a:pPr indent="0" marL="0">
-              <a:buNone/>
-            </a:pPr>
-            <a:r>
-              <a:rPr lang="en-US" sz="1500" b="1" dirty="0">
-                <a:solidFill>
-                  <a:srgbClr val="1E2761"/>
-                </a:solidFill>
-                <a:latin typeface="Calibri" pitchFamily="34" charset="0"/>
-                <a:ea typeface="Calibri" pitchFamily="34" charset="-122"/>
-                <a:cs typeface="Calibri" pitchFamily="34" charset="-120"/>
-              </a:rPr>
-              <a:t>FoundryEvals</a:t>
-            </a:r>
-            <a:endParaRPr lang="en-US" sz="1500" dirty="0"/>
-          </a:p>
-        </p:txBody>
-      </p:sp>
-      <p:sp>
-        <p:nvSpPr>
-          <p:cNvPr id="32" name="Text 30"/>
-          <p:cNvSpPr/>
-          <p:nvPr/>
-        </p:nvSpPr>
-        <p:spPr>
-          <a:xfrm>
-            <a:off x="3401568" y="3547872"/>
-            <a:ext cx="2340864" cy="950976"/>
-          </a:xfrm>
-          <a:prstGeom prst="rect">
-            <a:avLst/>
-          </a:prstGeom>
-          <a:noFill/>
-          <a:ln/>
-        </p:spPr>
-        <p:txBody>
-          <a:bodyPr wrap="square" lIns="0" tIns="0" rIns="0" bIns="0" rtlCol="0" anchor="t">
-            <a:normAutofit/>
-          </a:bodyPr>
-          <a:lstStyle/>
-          <a:p>
-            <a:pPr indent="0" marL="0">
-              <a:buNone/>
-            </a:pPr>
-            <a:r>
-              <a:rPr lang="en-US" sz="1150" dirty="0">
-                <a:solidFill>
-                  <a:srgbClr val="212121"/>
-                </a:solidFill>
-                <a:latin typeface="Calibri" pitchFamily="34" charset="0"/>
-                <a:ea typeface="Calibri" pitchFamily="34" charset="-122"/>
-                <a:cs typeface="Calibri" pitchFamily="34" charset="-120"/>
-              </a:rPr>
-              <a:t>Add tool selection/input accuracy where available</a:t>
-            </a:r>
-            <a:endParaRPr lang="en-US" sz="1150" dirty="0"/>
-          </a:p>
-        </p:txBody>
-      </p:sp>
-      <p:sp>
-        <p:nvSpPr>
-          <p:cNvPr id="33" name="Shape 31"/>
           <p:cNvSpPr/>
           <p:nvPr/>
         </p:nvSpPr>
@@ -3243,7 +2757,7 @@
       </p:sp>
       <p:sp>
         <p:nvSpPr>
-          <p:cNvPr id="34" name="Text 32"/>
+          <p:cNvPr id="12" name="Text 10"/>
           <p:cNvSpPr/>
           <p:nvPr/>
         </p:nvSpPr>
@@ -3276,7 +2790,7 @@
                 <a:ea typeface="Calibri" pitchFamily="34" charset="-122"/>
                 <a:cs typeface="Calibri" pitchFamily="34" charset="-120"/>
               </a:rPr>
-              <a:t>Source: https://learn.microsoft.com/en-us/agent-framework/agents/evaluation?tabs=python</a:t>
+              <a:t>Source: https://learn.microsoft.com/en-us/azure/devops/mcp-server/remote-mcp-server?view=azure-devops  ·  +1 in notes</a:t>
             </a:r>
             <a:endParaRPr lang="en-US" sz="820" dirty="0"/>
           </a:p>
@@ -3410,7 +2924,7 @@
                 <a:ea typeface="Calibri" pitchFamily="34" charset="-122"/>
                 <a:cs typeface="Calibri" pitchFamily="34" charset="-120"/>
               </a:rPr>
-              <a:t>Prerequisites for the future lab</a:t>
+              <a:t>Part E: evaluate the tool contract</a:t>
             </a:r>
             <a:endParaRPr lang="en-US" sz="2800" dirty="0"/>
           </a:p>
@@ -3424,12 +2938,12 @@
         </p:nvSpPr>
         <p:spPr>
           <a:xfrm>
-            <a:off x="365760" y="1078992"/>
-            <a:ext cx="2670048" cy="1655064"/>
+            <a:off x="365760" y="1216152"/>
+            <a:ext cx="2633472" cy="1572768"/>
           </a:xfrm>
           <a:prstGeom prst="roundRect">
             <a:avLst>
-              <a:gd name="adj" fmla="val 3315"/>
+              <a:gd name="adj" fmla="val 3488"/>
             </a:avLst>
           </a:prstGeom>
           <a:solidFill>
@@ -3445,14 +2959,73 @@
       </p:sp>
       <p:sp>
         <p:nvSpPr>
-          <p:cNvPr id="6" name="Text 4"/>
-          <p:cNvSpPr/>
-          <p:nvPr/>
-        </p:nvSpPr>
-        <p:spPr>
-          <a:xfrm>
-            <a:off x="512064" y="1197864"/>
-            <a:ext cx="2377440" cy="310896"/>
+          <p:cNvPr id="6" name="Shape 4"/>
+          <p:cNvSpPr/>
+          <p:nvPr/>
+        </p:nvSpPr>
+        <p:spPr>
+          <a:xfrm>
+            <a:off x="475488" y="1335024"/>
+            <a:ext cx="320040" cy="320040"/>
+          </a:xfrm>
+          <a:prstGeom prst="ellipse">
+            <a:avLst/>
+          </a:prstGeom>
+          <a:solidFill>
+            <a:srgbClr val="1E2761"/>
+          </a:solidFill>
+          <a:ln/>
+        </p:spPr>
+      </p:sp>
+      <p:sp>
+        <p:nvSpPr>
+          <p:cNvPr id="7" name="Text 5"/>
+          <p:cNvSpPr/>
+          <p:nvPr/>
+        </p:nvSpPr>
+        <p:spPr>
+          <a:xfrm>
+            <a:off x="475488" y="1385316"/>
+            <a:ext cx="320040" cy="146304"/>
+          </a:xfrm>
+          <a:prstGeom prst="rect">
+            <a:avLst/>
+          </a:prstGeom>
+          <a:noFill/>
+          <a:ln/>
+        </p:spPr>
+        <p:txBody>
+          <a:bodyPr wrap="square" lIns="0" tIns="0" rIns="0" bIns="0" rtlCol="0" anchor="ctr"/>
+          <a:lstStyle/>
+          <a:p>
+            <a:pPr algn="ctr" indent="0" marL="0">
+              <a:buNone/>
+            </a:pPr>
+            <a:r>
+              <a:rPr lang="en-US" sz="900" b="1" dirty="0">
+                <a:solidFill>
+                  <a:srgbClr val="FFFFFF"/>
+                </a:solidFill>
+                <a:latin typeface="Calibri" pitchFamily="34" charset="0"/>
+                <a:ea typeface="Calibri" pitchFamily="34" charset="-122"/>
+                <a:cs typeface="Calibri" pitchFamily="34" charset="-120"/>
+              </a:rPr>
+              <a:t>1</a:t>
+            </a:r>
+            <a:endParaRPr lang="en-US" sz="900" dirty="0"/>
+          </a:p>
+        </p:txBody>
+      </p:sp>
+      <p:sp>
+        <p:nvSpPr>
+          <p:cNvPr id="8" name="Text 6"/>
+          <p:cNvSpPr/>
+          <p:nvPr/>
+        </p:nvSpPr>
+        <p:spPr>
+          <a:xfrm>
+            <a:off x="896112" y="1335024"/>
+            <a:ext cx="1975104" cy="310896"/>
           </a:xfrm>
           <a:prstGeom prst="rect">
             <a:avLst/>
@@ -3478,7 +3051,7 @@
                 <a:ea typeface="Calibri" pitchFamily="34" charset="-122"/>
                 <a:cs typeface="Calibri" pitchFamily="34" charset="-120"/>
               </a:rPr>
-              <a:t>Day 2 baseline</a:t>
+              <a:t>Golden cases</a:t>
             </a:r>
             <a:endParaRPr lang="en-US" sz="1500" dirty="0"/>
           </a:p>
@@ -3486,14 +3059,14 @@
       </p:sp>
       <p:sp>
         <p:nvSpPr>
-          <p:cNvPr id="7" name="Text 5"/>
-          <p:cNvSpPr/>
-          <p:nvPr/>
-        </p:nvSpPr>
-        <p:spPr>
-          <a:xfrm>
-            <a:off x="512064" y="1581912"/>
-            <a:ext cx="2377440" cy="1033272"/>
+          <p:cNvPr id="9" name="Text 7"/>
+          <p:cNvSpPr/>
+          <p:nvPr/>
+        </p:nvSpPr>
+        <p:spPr>
+          <a:xfrm>
+            <a:off x="512064" y="1719072"/>
+            <a:ext cx="2340864" cy="950976"/>
           </a:xfrm>
           <a:prstGeom prst="rect">
             <a:avLst/>
@@ -3519,7 +3092,7 @@
                 <a:ea typeface="Calibri" pitchFamily="34" charset="-122"/>
                 <a:cs typeface="Calibri" pitchFamily="34" charset="-120"/>
               </a:rPr>
-              <a:t>Working docs assistant and FoundryChatClient</a:t>
+              <a:t>Read, approved write, rejected write, and no-tool request</a:t>
             </a:r>
             <a:endParaRPr lang="en-US" sz="1150" dirty="0"/>
           </a:p>
@@ -3527,18 +3100,38 @@
       </p:sp>
       <p:sp>
         <p:nvSpPr>
-          <p:cNvPr id="8" name="Shape 6"/>
-          <p:cNvSpPr/>
-          <p:nvPr/>
-        </p:nvSpPr>
-        <p:spPr>
-          <a:xfrm>
-            <a:off x="3236976" y="1078992"/>
-            <a:ext cx="2670048" cy="1655064"/>
+          <p:cNvPr id="10" name="Shape 8"/>
+          <p:cNvSpPr/>
+          <p:nvPr/>
+        </p:nvSpPr>
+        <p:spPr>
+          <a:xfrm>
+            <a:off x="3035808" y="1892808"/>
+            <a:ext cx="164592" cy="219456"/>
+          </a:xfrm>
+          <a:prstGeom prst="chevron">
+            <a:avLst/>
+          </a:prstGeom>
+          <a:solidFill>
+            <a:srgbClr val="E8A87C"/>
+          </a:solidFill>
+          <a:ln/>
+        </p:spPr>
+      </p:sp>
+      <p:sp>
+        <p:nvSpPr>
+          <p:cNvPr id="11" name="Shape 9"/>
+          <p:cNvSpPr/>
+          <p:nvPr/>
+        </p:nvSpPr>
+        <p:spPr>
+          <a:xfrm>
+            <a:off x="3255264" y="1216152"/>
+            <a:ext cx="2633472" cy="1572768"/>
           </a:xfrm>
           <a:prstGeom prst="roundRect">
             <a:avLst>
-              <a:gd name="adj" fmla="val 3315"/>
+              <a:gd name="adj" fmla="val 3488"/>
             </a:avLst>
           </a:prstGeom>
           <a:solidFill>
@@ -3554,14 +3147,73 @@
       </p:sp>
       <p:sp>
         <p:nvSpPr>
-          <p:cNvPr id="9" name="Text 7"/>
-          <p:cNvSpPr/>
-          <p:nvPr/>
-        </p:nvSpPr>
-        <p:spPr>
-          <a:xfrm>
-            <a:off x="3383280" y="1197864"/>
-            <a:ext cx="2377440" cy="310896"/>
+          <p:cNvPr id="12" name="Shape 10"/>
+          <p:cNvSpPr/>
+          <p:nvPr/>
+        </p:nvSpPr>
+        <p:spPr>
+          <a:xfrm>
+            <a:off x="3364992" y="1335024"/>
+            <a:ext cx="320040" cy="320040"/>
+          </a:xfrm>
+          <a:prstGeom prst="ellipse">
+            <a:avLst/>
+          </a:prstGeom>
+          <a:solidFill>
+            <a:srgbClr val="1E2761"/>
+          </a:solidFill>
+          <a:ln/>
+        </p:spPr>
+      </p:sp>
+      <p:sp>
+        <p:nvSpPr>
+          <p:cNvPr id="13" name="Text 11"/>
+          <p:cNvSpPr/>
+          <p:nvPr/>
+        </p:nvSpPr>
+        <p:spPr>
+          <a:xfrm>
+            <a:off x="3364992" y="1385316"/>
+            <a:ext cx="320040" cy="146304"/>
+          </a:xfrm>
+          <a:prstGeom prst="rect">
+            <a:avLst/>
+          </a:prstGeom>
+          <a:noFill/>
+          <a:ln/>
+        </p:spPr>
+        <p:txBody>
+          <a:bodyPr wrap="square" lIns="0" tIns="0" rIns="0" bIns="0" rtlCol="0" anchor="ctr"/>
+          <a:lstStyle/>
+          <a:p>
+            <a:pPr algn="ctr" indent="0" marL="0">
+              <a:buNone/>
+            </a:pPr>
+            <a:r>
+              <a:rPr lang="en-US" sz="900" b="1" dirty="0">
+                <a:solidFill>
+                  <a:srgbClr val="FFFFFF"/>
+                </a:solidFill>
+                <a:latin typeface="Calibri" pitchFamily="34" charset="0"/>
+                <a:ea typeface="Calibri" pitchFamily="34" charset="-122"/>
+                <a:cs typeface="Calibri" pitchFamily="34" charset="-120"/>
+              </a:rPr>
+              <a:t>2</a:t>
+            </a:r>
+            <a:endParaRPr lang="en-US" sz="900" dirty="0"/>
+          </a:p>
+        </p:txBody>
+      </p:sp>
+      <p:sp>
+        <p:nvSpPr>
+          <p:cNvPr id="14" name="Text 12"/>
+          <p:cNvSpPr/>
+          <p:nvPr/>
+        </p:nvSpPr>
+        <p:spPr>
+          <a:xfrm>
+            <a:off x="3785616" y="1335024"/>
+            <a:ext cx="1975104" cy="310896"/>
           </a:xfrm>
           <a:prstGeom prst="rect">
             <a:avLst/>
@@ -3587,7 +3239,7 @@
                 <a:ea typeface="Calibri" pitchFamily="34" charset="-122"/>
                 <a:cs typeface="Calibri" pitchFamily="34" charset="-120"/>
               </a:rPr>
-              <a:t>Azure DevOps</a:t>
+              <a:t>Expected calls</a:t>
             </a:r>
             <a:endParaRPr lang="en-US" sz="1500" dirty="0"/>
           </a:p>
@@ -3595,14 +3247,14 @@
       </p:sp>
       <p:sp>
         <p:nvSpPr>
-          <p:cNvPr id="10" name="Text 8"/>
-          <p:cNvSpPr/>
-          <p:nvPr/>
-        </p:nvSpPr>
-        <p:spPr>
-          <a:xfrm>
-            <a:off x="3383280" y="1581912"/>
-            <a:ext cx="2377440" cy="1033272"/>
+          <p:cNvPr id="15" name="Text 13"/>
+          <p:cNvSpPr/>
+          <p:nvPr/>
+        </p:nvSpPr>
+        <p:spPr>
+          <a:xfrm>
+            <a:off x="3401568" y="1719072"/>
+            <a:ext cx="2340864" cy="950976"/>
           </a:xfrm>
           <a:prstGeom prst="rect">
             <a:avLst/>
@@ -3628,7 +3280,7 @@
                 <a:ea typeface="Calibri" pitchFamily="34" charset="-122"/>
                 <a:cs typeface="Calibri" pitchFamily="34" charset="-120"/>
               </a:rPr>
-              <a:t>Entra-backed Services org plus dedicated workshop project</a:t>
+              <a:t>Tool name plus action and key arguments</a:t>
             </a:r>
             <a:endParaRPr lang="en-US" sz="1150" dirty="0"/>
           </a:p>
@@ -3636,18 +3288,38 @@
       </p:sp>
       <p:sp>
         <p:nvSpPr>
-          <p:cNvPr id="11" name="Shape 9"/>
-          <p:cNvSpPr/>
-          <p:nvPr/>
-        </p:nvSpPr>
-        <p:spPr>
-          <a:xfrm>
-            <a:off x="6108192" y="1078992"/>
-            <a:ext cx="2670048" cy="1655064"/>
+          <p:cNvPr id="16" name="Shape 14"/>
+          <p:cNvSpPr/>
+          <p:nvPr/>
+        </p:nvSpPr>
+        <p:spPr>
+          <a:xfrm>
+            <a:off x="5925312" y="1892808"/>
+            <a:ext cx="164592" cy="219456"/>
+          </a:xfrm>
+          <a:prstGeom prst="chevron">
+            <a:avLst/>
+          </a:prstGeom>
+          <a:solidFill>
+            <a:srgbClr val="E8A87C"/>
+          </a:solidFill>
+          <a:ln/>
+        </p:spPr>
+      </p:sp>
+      <p:sp>
+        <p:nvSpPr>
+          <p:cNvPr id="17" name="Shape 15"/>
+          <p:cNvSpPr/>
+          <p:nvPr/>
+        </p:nvSpPr>
+        <p:spPr>
+          <a:xfrm>
+            <a:off x="6144768" y="1216152"/>
+            <a:ext cx="2633472" cy="1572768"/>
           </a:xfrm>
           <a:prstGeom prst="roundRect">
             <a:avLst>
-              <a:gd name="adj" fmla="val 3315"/>
+              <a:gd name="adj" fmla="val 3488"/>
             </a:avLst>
           </a:prstGeom>
           <a:solidFill>
@@ -3663,14 +3335,73 @@
       </p:sp>
       <p:sp>
         <p:nvSpPr>
-          <p:cNvPr id="12" name="Text 10"/>
-          <p:cNvSpPr/>
-          <p:nvPr/>
-        </p:nvSpPr>
-        <p:spPr>
-          <a:xfrm>
-            <a:off x="6254496" y="1197864"/>
-            <a:ext cx="2377440" cy="310896"/>
+          <p:cNvPr id="18" name="Shape 16"/>
+          <p:cNvSpPr/>
+          <p:nvPr/>
+        </p:nvSpPr>
+        <p:spPr>
+          <a:xfrm>
+            <a:off x="6254496" y="1335024"/>
+            <a:ext cx="320040" cy="320040"/>
+          </a:xfrm>
+          <a:prstGeom prst="ellipse">
+            <a:avLst/>
+          </a:prstGeom>
+          <a:solidFill>
+            <a:srgbClr val="1E2761"/>
+          </a:solidFill>
+          <a:ln/>
+        </p:spPr>
+      </p:sp>
+      <p:sp>
+        <p:nvSpPr>
+          <p:cNvPr id="19" name="Text 17"/>
+          <p:cNvSpPr/>
+          <p:nvPr/>
+        </p:nvSpPr>
+        <p:spPr>
+          <a:xfrm>
+            <a:off x="6254496" y="1385316"/>
+            <a:ext cx="320040" cy="146304"/>
+          </a:xfrm>
+          <a:prstGeom prst="rect">
+            <a:avLst/>
+          </a:prstGeom>
+          <a:noFill/>
+          <a:ln/>
+        </p:spPr>
+        <p:txBody>
+          <a:bodyPr wrap="square" lIns="0" tIns="0" rIns="0" bIns="0" rtlCol="0" anchor="ctr"/>
+          <a:lstStyle/>
+          <a:p>
+            <a:pPr algn="ctr" indent="0" marL="0">
+              <a:buNone/>
+            </a:pPr>
+            <a:r>
+              <a:rPr lang="en-US" sz="900" b="1" dirty="0">
+                <a:solidFill>
+                  <a:srgbClr val="FFFFFF"/>
+                </a:solidFill>
+                <a:latin typeface="Calibri" pitchFamily="34" charset="0"/>
+                <a:ea typeface="Calibri" pitchFamily="34" charset="-122"/>
+                <a:cs typeface="Calibri" pitchFamily="34" charset="-120"/>
+              </a:rPr>
+              <a:t>3</a:t>
+            </a:r>
+            <a:endParaRPr lang="en-US" sz="900" dirty="0"/>
+          </a:p>
+        </p:txBody>
+      </p:sp>
+      <p:sp>
+        <p:nvSpPr>
+          <p:cNvPr id="20" name="Text 18"/>
+          <p:cNvSpPr/>
+          <p:nvPr/>
+        </p:nvSpPr>
+        <p:spPr>
+          <a:xfrm>
+            <a:off x="6675120" y="1335024"/>
+            <a:ext cx="1975104" cy="310896"/>
           </a:xfrm>
           <a:prstGeom prst="rect">
             <a:avLst/>
@@ -3696,7 +3427,7 @@
                 <a:ea typeface="Calibri" pitchFamily="34" charset="-122"/>
                 <a:cs typeface="Calibri" pitchFamily="34" charset="-120"/>
               </a:rPr>
-              <a:t>Permissions</a:t>
+              <a:t>Local checks</a:t>
             </a:r>
             <a:endParaRPr lang="en-US" sz="1500" dirty="0"/>
           </a:p>
@@ -3704,14 +3435,14 @@
       </p:sp>
       <p:sp>
         <p:nvSpPr>
-          <p:cNvPr id="13" name="Text 11"/>
-          <p:cNvSpPr/>
-          <p:nvPr/>
-        </p:nvSpPr>
-        <p:spPr>
-          <a:xfrm>
-            <a:off x="6254496" y="1581912"/>
-            <a:ext cx="2377440" cy="1033272"/>
+          <p:cNvPr id="21" name="Text 19"/>
+          <p:cNvSpPr/>
+          <p:nvPr/>
+        </p:nvSpPr>
+        <p:spPr>
+          <a:xfrm>
+            <a:off x="6291072" y="1719072"/>
+            <a:ext cx="2340864" cy="950976"/>
           </a:xfrm>
           <a:prstGeom prst="rect">
             <a:avLst/>
@@ -3737,7 +3468,7 @@
                 <a:ea typeface="Calibri" pitchFamily="34" charset="-122"/>
                 <a:cs typeface="Calibri" pitchFamily="34" charset="-120"/>
               </a:rPr>
-              <a:t>Read access first; separately approved write access</a:t>
+              <a:t>Presence and argument subset match</a:t>
             </a:r>
             <a:endParaRPr lang="en-US" sz="1150" dirty="0"/>
           </a:p>
@@ -3745,18 +3476,18 @@
       </p:sp>
       <p:sp>
         <p:nvSpPr>
-          <p:cNvPr id="14" name="Shape 12"/>
-          <p:cNvSpPr/>
-          <p:nvPr/>
-        </p:nvSpPr>
-        <p:spPr>
-          <a:xfrm>
-            <a:off x="365760" y="2935224"/>
-            <a:ext cx="2670048" cy="1655064"/>
+          <p:cNvPr id="22" name="Shape 20"/>
+          <p:cNvSpPr/>
+          <p:nvPr/>
+        </p:nvSpPr>
+        <p:spPr>
+          <a:xfrm>
+            <a:off x="365760" y="3044952"/>
+            <a:ext cx="2633472" cy="1572768"/>
           </a:xfrm>
           <a:prstGeom prst="roundRect">
             <a:avLst>
-              <a:gd name="adj" fmla="val 3315"/>
+              <a:gd name="adj" fmla="val 3488"/>
             </a:avLst>
           </a:prstGeom>
           <a:solidFill>
@@ -3772,14 +3503,73 @@
       </p:sp>
       <p:sp>
         <p:nvSpPr>
-          <p:cNvPr id="15" name="Text 13"/>
-          <p:cNvSpPr/>
-          <p:nvPr/>
-        </p:nvSpPr>
-        <p:spPr>
-          <a:xfrm>
-            <a:off x="512064" y="3054096"/>
-            <a:ext cx="2377440" cy="310896"/>
+          <p:cNvPr id="23" name="Shape 21"/>
+          <p:cNvSpPr/>
+          <p:nvPr/>
+        </p:nvSpPr>
+        <p:spPr>
+          <a:xfrm>
+            <a:off x="475488" y="3163824"/>
+            <a:ext cx="320040" cy="320040"/>
+          </a:xfrm>
+          <a:prstGeom prst="ellipse">
+            <a:avLst/>
+          </a:prstGeom>
+          <a:solidFill>
+            <a:srgbClr val="1E2761"/>
+          </a:solidFill>
+          <a:ln/>
+        </p:spPr>
+      </p:sp>
+      <p:sp>
+        <p:nvSpPr>
+          <p:cNvPr id="24" name="Text 22"/>
+          <p:cNvSpPr/>
+          <p:nvPr/>
+        </p:nvSpPr>
+        <p:spPr>
+          <a:xfrm>
+            <a:off x="475488" y="3214116"/>
+            <a:ext cx="320040" cy="146304"/>
+          </a:xfrm>
+          <a:prstGeom prst="rect">
+            <a:avLst/>
+          </a:prstGeom>
+          <a:noFill/>
+          <a:ln/>
+        </p:spPr>
+        <p:txBody>
+          <a:bodyPr wrap="square" lIns="0" tIns="0" rIns="0" bIns="0" rtlCol="0" anchor="ctr"/>
+          <a:lstStyle/>
+          <a:p>
+            <a:pPr algn="ctr" indent="0" marL="0">
+              <a:buNone/>
+            </a:pPr>
+            <a:r>
+              <a:rPr lang="en-US" sz="900" b="1" dirty="0">
+                <a:solidFill>
+                  <a:srgbClr val="FFFFFF"/>
+                </a:solidFill>
+                <a:latin typeface="Calibri" pitchFamily="34" charset="0"/>
+                <a:ea typeface="Calibri" pitchFamily="34" charset="-122"/>
+                <a:cs typeface="Calibri" pitchFamily="34" charset="-120"/>
+              </a:rPr>
+              <a:t>4</a:t>
+            </a:r>
+            <a:endParaRPr lang="en-US" sz="900" dirty="0"/>
+          </a:p>
+        </p:txBody>
+      </p:sp>
+      <p:sp>
+        <p:nvSpPr>
+          <p:cNvPr id="25" name="Text 23"/>
+          <p:cNvSpPr/>
+          <p:nvPr/>
+        </p:nvSpPr>
+        <p:spPr>
+          <a:xfrm>
+            <a:off x="896112" y="3163824"/>
+            <a:ext cx="1975104" cy="310896"/>
           </a:xfrm>
           <a:prstGeom prst="rect">
             <a:avLst/>
@@ -3805,7 +3595,7 @@
                 <a:ea typeface="Calibri" pitchFamily="34" charset="-122"/>
                 <a:cs typeface="Calibri" pitchFamily="34" charset="-120"/>
               </a:rPr>
-              <a:t>Foundry evals</a:t>
+              <a:t>Repetitions</a:t>
             </a:r>
             <a:endParaRPr lang="en-US" sz="1500" dirty="0"/>
           </a:p>
@@ -3813,14 +3603,14 @@
       </p:sp>
       <p:sp>
         <p:nvSpPr>
-          <p:cNvPr id="16" name="Text 14"/>
-          <p:cNvSpPr/>
-          <p:nvPr/>
-        </p:nvSpPr>
-        <p:spPr>
-          <a:xfrm>
-            <a:off x="512064" y="3438144"/>
-            <a:ext cx="2377440" cy="1033272"/>
+          <p:cNvPr id="26" name="Text 24"/>
+          <p:cNvSpPr/>
+          <p:nvPr/>
+        </p:nvSpPr>
+        <p:spPr>
+          <a:xfrm>
+            <a:off x="512064" y="3547872"/>
+            <a:ext cx="2340864" cy="950976"/>
           </a:xfrm>
           <a:prstGeom prst="rect">
             <a:avLst/>
@@ -3846,7 +3636,7 @@
                 <a:ea typeface="Calibri" pitchFamily="34" charset="-122"/>
                 <a:cs typeface="Calibri" pitchFamily="34" charset="-120"/>
               </a:rPr>
-              <a:t>Project client and judge model deployment</a:t>
+              <a:t>Observe consistency across independent runs</a:t>
             </a:r>
             <a:endParaRPr lang="en-US" sz="1150" dirty="0"/>
           </a:p>
@@ -3854,26 +3644,46 @@
       </p:sp>
       <p:sp>
         <p:nvSpPr>
-          <p:cNvPr id="17" name="Shape 15"/>
-          <p:cNvSpPr/>
-          <p:nvPr/>
-        </p:nvSpPr>
-        <p:spPr>
-          <a:xfrm>
-            <a:off x="3236976" y="2935224"/>
-            <a:ext cx="2670048" cy="1655064"/>
+          <p:cNvPr id="27" name="Shape 25"/>
+          <p:cNvSpPr/>
+          <p:nvPr/>
+        </p:nvSpPr>
+        <p:spPr>
+          <a:xfrm>
+            <a:off x="3035808" y="3721608"/>
+            <a:ext cx="164592" cy="219456"/>
+          </a:xfrm>
+          <a:prstGeom prst="chevron">
+            <a:avLst/>
+          </a:prstGeom>
+          <a:solidFill>
+            <a:srgbClr val="E8A87C"/>
+          </a:solidFill>
+          <a:ln/>
+        </p:spPr>
+      </p:sp>
+      <p:sp>
+        <p:nvSpPr>
+          <p:cNvPr id="28" name="Shape 26"/>
+          <p:cNvSpPr/>
+          <p:nvPr/>
+        </p:nvSpPr>
+        <p:spPr>
+          <a:xfrm>
+            <a:off x="3255264" y="3044952"/>
+            <a:ext cx="2633472" cy="1572768"/>
           </a:xfrm>
           <a:prstGeom prst="roundRect">
             <a:avLst>
-              <a:gd name="adj" fmla="val 3315"/>
+              <a:gd name="adj" fmla="val 3488"/>
             </a:avLst>
           </a:prstGeom>
           <a:solidFill>
-            <a:srgbClr val="F3F4F6"/>
+            <a:srgbClr val="CADCFC"/>
           </a:solidFill>
           <a:ln w="10160">
             <a:solidFill>
-              <a:srgbClr val="D1D5DB"/>
+              <a:srgbClr val="1E2761"/>
             </a:solidFill>
             <a:prstDash val="solid"/>
           </a:ln>
@@ -3881,14 +3691,73 @@
       </p:sp>
       <p:sp>
         <p:nvSpPr>
-          <p:cNvPr id="18" name="Text 16"/>
-          <p:cNvSpPr/>
-          <p:nvPr/>
-        </p:nvSpPr>
-        <p:spPr>
-          <a:xfrm>
-            <a:off x="3383280" y="3054096"/>
-            <a:ext cx="2377440" cy="310896"/>
+          <p:cNvPr id="29" name="Shape 27"/>
+          <p:cNvSpPr/>
+          <p:nvPr/>
+        </p:nvSpPr>
+        <p:spPr>
+          <a:xfrm>
+            <a:off x="3364992" y="3163824"/>
+            <a:ext cx="320040" cy="320040"/>
+          </a:xfrm>
+          <a:prstGeom prst="ellipse">
+            <a:avLst/>
+          </a:prstGeom>
+          <a:solidFill>
+            <a:srgbClr val="1E2761"/>
+          </a:solidFill>
+          <a:ln/>
+        </p:spPr>
+      </p:sp>
+      <p:sp>
+        <p:nvSpPr>
+          <p:cNvPr id="30" name="Text 28"/>
+          <p:cNvSpPr/>
+          <p:nvPr/>
+        </p:nvSpPr>
+        <p:spPr>
+          <a:xfrm>
+            <a:off x="3364992" y="3214116"/>
+            <a:ext cx="320040" cy="146304"/>
+          </a:xfrm>
+          <a:prstGeom prst="rect">
+            <a:avLst/>
+          </a:prstGeom>
+          <a:noFill/>
+          <a:ln/>
+        </p:spPr>
+        <p:txBody>
+          <a:bodyPr wrap="square" lIns="0" tIns="0" rIns="0" bIns="0" rtlCol="0" anchor="ctr"/>
+          <a:lstStyle/>
+          <a:p>
+            <a:pPr algn="ctr" indent="0" marL="0">
+              <a:buNone/>
+            </a:pPr>
+            <a:r>
+              <a:rPr lang="en-US" sz="900" b="1" dirty="0">
+                <a:solidFill>
+                  <a:srgbClr val="FFFFFF"/>
+                </a:solidFill>
+                <a:latin typeface="Calibri" pitchFamily="34" charset="0"/>
+                <a:ea typeface="Calibri" pitchFamily="34" charset="-122"/>
+                <a:cs typeface="Calibri" pitchFamily="34" charset="-120"/>
+              </a:rPr>
+              <a:t>5</a:t>
+            </a:r>
+            <a:endParaRPr lang="en-US" sz="900" dirty="0"/>
+          </a:p>
+        </p:txBody>
+      </p:sp>
+      <p:sp>
+        <p:nvSpPr>
+          <p:cNvPr id="31" name="Text 29"/>
+          <p:cNvSpPr/>
+          <p:nvPr/>
+        </p:nvSpPr>
+        <p:spPr>
+          <a:xfrm>
+            <a:off x="3785616" y="3163824"/>
+            <a:ext cx="1975104" cy="310896"/>
           </a:xfrm>
           <a:prstGeom prst="rect">
             <a:avLst/>
@@ -3914,7 +3783,7 @@
                 <a:ea typeface="Calibri" pitchFamily="34" charset="-122"/>
                 <a:cs typeface="Calibri" pitchFamily="34" charset="-120"/>
               </a:rPr>
-              <a:t>Fixtures</a:t>
+              <a:t>FoundryEvals</a:t>
             </a:r>
             <a:endParaRPr lang="en-US" sz="1500" dirty="0"/>
           </a:p>
@@ -3922,14 +3791,14 @@
       </p:sp>
       <p:sp>
         <p:nvSpPr>
-          <p:cNvPr id="19" name="Text 17"/>
-          <p:cNvSpPr/>
-          <p:nvPr/>
-        </p:nvSpPr>
-        <p:spPr>
-          <a:xfrm>
-            <a:off x="3383280" y="3438144"/>
-            <a:ext cx="2377440" cy="1033272"/>
+          <p:cNvPr id="32" name="Text 30"/>
+          <p:cNvSpPr/>
+          <p:nvPr/>
+        </p:nvSpPr>
+        <p:spPr>
+          <a:xfrm>
+            <a:off x="3401568" y="3547872"/>
+            <a:ext cx="2340864" cy="950976"/>
           </a:xfrm>
           <a:prstGeom prst="rect">
             <a:avLst/>
@@ -3955,7 +3824,7 @@
                 <a:ea typeface="Calibri" pitchFamily="34" charset="-122"/>
                 <a:cs typeface="Calibri" pitchFamily="34" charset="-120"/>
               </a:rPr>
-              <a:t>Known work item IDs and a reset/cleanup plan</a:t>
+              <a:t>Add tool selection/input accuracy where available</a:t>
             </a:r>
             <a:endParaRPr lang="en-US" sz="1150" dirty="0"/>
           </a:p>
@@ -3963,7 +3832,7 @@
       </p:sp>
       <p:sp>
         <p:nvSpPr>
-          <p:cNvPr id="20" name="Shape 18"/>
+          <p:cNvPr id="33" name="Shape 31"/>
           <p:cNvSpPr/>
           <p:nvPr/>
         </p:nvSpPr>
@@ -3986,7 +3855,7 @@
       </p:sp>
       <p:sp>
         <p:nvSpPr>
-          <p:cNvPr id="21" name="Text 19"/>
+          <p:cNvPr id="34" name="Text 32"/>
           <p:cNvSpPr/>
           <p:nvPr/>
         </p:nvSpPr>
@@ -4019,7 +3888,7 @@
                 <a:ea typeface="Calibri" pitchFamily="34" charset="-122"/>
                 <a:cs typeface="Calibri" pitchFamily="34" charset="-120"/>
               </a:rPr>
-              <a:t>Source: https://learn.microsoft.com/en-us/azure/devops/mcp-server/remote-mcp-server?view=azure-devops  ·  +1 in notes</a:t>
+              <a:t>Source: https://learn.microsoft.com/en-us/agent-framework/agents/evaluation?tabs=python</a:t>
             </a:r>
             <a:endParaRPr lang="en-US" sz="820" dirty="0"/>
           </a:p>
@@ -4153,6 +4022,749 @@
                 <a:ea typeface="Calibri" pitchFamily="34" charset="-122"/>
                 <a:cs typeface="Calibri" pitchFamily="34" charset="-120"/>
               </a:rPr>
+              <a:t>Prerequisites for the future lab</a:t>
+            </a:r>
+            <a:endParaRPr lang="en-US" sz="2800" dirty="0"/>
+          </a:p>
+        </p:txBody>
+      </p:sp>
+      <p:sp>
+        <p:nvSpPr>
+          <p:cNvPr id="5" name="Shape 3"/>
+          <p:cNvSpPr/>
+          <p:nvPr/>
+        </p:nvSpPr>
+        <p:spPr>
+          <a:xfrm>
+            <a:off x="365760" y="1078992"/>
+            <a:ext cx="2670048" cy="1655064"/>
+          </a:xfrm>
+          <a:prstGeom prst="roundRect">
+            <a:avLst>
+              <a:gd name="adj" fmla="val 3315"/>
+            </a:avLst>
+          </a:prstGeom>
+          <a:solidFill>
+            <a:srgbClr val="CADCFC"/>
+          </a:solidFill>
+          <a:ln w="10160">
+            <a:solidFill>
+              <a:srgbClr val="1E2761"/>
+            </a:solidFill>
+            <a:prstDash val="solid"/>
+          </a:ln>
+        </p:spPr>
+      </p:sp>
+      <p:sp>
+        <p:nvSpPr>
+          <p:cNvPr id="6" name="Text 4"/>
+          <p:cNvSpPr/>
+          <p:nvPr/>
+        </p:nvSpPr>
+        <p:spPr>
+          <a:xfrm>
+            <a:off x="512064" y="1197864"/>
+            <a:ext cx="2377440" cy="310896"/>
+          </a:xfrm>
+          <a:prstGeom prst="rect">
+            <a:avLst/>
+          </a:prstGeom>
+          <a:noFill/>
+          <a:ln/>
+        </p:spPr>
+        <p:txBody>
+          <a:bodyPr wrap="square" lIns="0" tIns="0" rIns="0" bIns="0" rtlCol="0" anchor="ctr">
+            <a:normAutofit/>
+          </a:bodyPr>
+          <a:lstStyle/>
+          <a:p>
+            <a:pPr indent="0" marL="0">
+              <a:buNone/>
+            </a:pPr>
+            <a:r>
+              <a:rPr lang="en-US" sz="1500" b="1" dirty="0">
+                <a:solidFill>
+                  <a:srgbClr val="1E2761"/>
+                </a:solidFill>
+                <a:latin typeface="Calibri" pitchFamily="34" charset="0"/>
+                <a:ea typeface="Calibri" pitchFamily="34" charset="-122"/>
+                <a:cs typeface="Calibri" pitchFamily="34" charset="-120"/>
+              </a:rPr>
+              <a:t>Day 2 baseline</a:t>
+            </a:r>
+            <a:endParaRPr lang="en-US" sz="1500" dirty="0"/>
+          </a:p>
+        </p:txBody>
+      </p:sp>
+      <p:sp>
+        <p:nvSpPr>
+          <p:cNvPr id="7" name="Text 5"/>
+          <p:cNvSpPr/>
+          <p:nvPr/>
+        </p:nvSpPr>
+        <p:spPr>
+          <a:xfrm>
+            <a:off x="512064" y="1581912"/>
+            <a:ext cx="2377440" cy="1033272"/>
+          </a:xfrm>
+          <a:prstGeom prst="rect">
+            <a:avLst/>
+          </a:prstGeom>
+          <a:noFill/>
+          <a:ln/>
+        </p:spPr>
+        <p:txBody>
+          <a:bodyPr wrap="square" lIns="0" tIns="0" rIns="0" bIns="0" rtlCol="0" anchor="t">
+            <a:normAutofit/>
+          </a:bodyPr>
+          <a:lstStyle/>
+          <a:p>
+            <a:pPr indent="0" marL="0">
+              <a:buNone/>
+            </a:pPr>
+            <a:r>
+              <a:rPr lang="en-US" sz="1150" dirty="0">
+                <a:solidFill>
+                  <a:srgbClr val="212121"/>
+                </a:solidFill>
+                <a:latin typeface="Calibri" pitchFamily="34" charset="0"/>
+                <a:ea typeface="Calibri" pitchFamily="34" charset="-122"/>
+                <a:cs typeface="Calibri" pitchFamily="34" charset="-120"/>
+              </a:rPr>
+              <a:t>Working docs assistant and FoundryChatClient</a:t>
+            </a:r>
+            <a:endParaRPr lang="en-US" sz="1150" dirty="0"/>
+          </a:p>
+        </p:txBody>
+      </p:sp>
+      <p:sp>
+        <p:nvSpPr>
+          <p:cNvPr id="8" name="Shape 6"/>
+          <p:cNvSpPr/>
+          <p:nvPr/>
+        </p:nvSpPr>
+        <p:spPr>
+          <a:xfrm>
+            <a:off x="3236976" y="1078992"/>
+            <a:ext cx="2670048" cy="1655064"/>
+          </a:xfrm>
+          <a:prstGeom prst="roundRect">
+            <a:avLst>
+              <a:gd name="adj" fmla="val 3315"/>
+            </a:avLst>
+          </a:prstGeom>
+          <a:solidFill>
+            <a:srgbClr val="F3F4F6"/>
+          </a:solidFill>
+          <a:ln w="10160">
+            <a:solidFill>
+              <a:srgbClr val="D1D5DB"/>
+            </a:solidFill>
+            <a:prstDash val="solid"/>
+          </a:ln>
+        </p:spPr>
+      </p:sp>
+      <p:sp>
+        <p:nvSpPr>
+          <p:cNvPr id="9" name="Text 7"/>
+          <p:cNvSpPr/>
+          <p:nvPr/>
+        </p:nvSpPr>
+        <p:spPr>
+          <a:xfrm>
+            <a:off x="3383280" y="1197864"/>
+            <a:ext cx="2377440" cy="310896"/>
+          </a:xfrm>
+          <a:prstGeom prst="rect">
+            <a:avLst/>
+          </a:prstGeom>
+          <a:noFill/>
+          <a:ln/>
+        </p:spPr>
+        <p:txBody>
+          <a:bodyPr wrap="square" lIns="0" tIns="0" rIns="0" bIns="0" rtlCol="0" anchor="ctr">
+            <a:normAutofit/>
+          </a:bodyPr>
+          <a:lstStyle/>
+          <a:p>
+            <a:pPr indent="0" marL="0">
+              <a:buNone/>
+            </a:pPr>
+            <a:r>
+              <a:rPr lang="en-US" sz="1500" b="1" dirty="0">
+                <a:solidFill>
+                  <a:srgbClr val="1E2761"/>
+                </a:solidFill>
+                <a:latin typeface="Calibri" pitchFamily="34" charset="0"/>
+                <a:ea typeface="Calibri" pitchFamily="34" charset="-122"/>
+                <a:cs typeface="Calibri" pitchFamily="34" charset="-120"/>
+              </a:rPr>
+              <a:t>Azure DevOps</a:t>
+            </a:r>
+            <a:endParaRPr lang="en-US" sz="1500" dirty="0"/>
+          </a:p>
+        </p:txBody>
+      </p:sp>
+      <p:sp>
+        <p:nvSpPr>
+          <p:cNvPr id="10" name="Text 8"/>
+          <p:cNvSpPr/>
+          <p:nvPr/>
+        </p:nvSpPr>
+        <p:spPr>
+          <a:xfrm>
+            <a:off x="3383280" y="1581912"/>
+            <a:ext cx="2377440" cy="1033272"/>
+          </a:xfrm>
+          <a:prstGeom prst="rect">
+            <a:avLst/>
+          </a:prstGeom>
+          <a:noFill/>
+          <a:ln/>
+        </p:spPr>
+        <p:txBody>
+          <a:bodyPr wrap="square" lIns="0" tIns="0" rIns="0" bIns="0" rtlCol="0" anchor="t">
+            <a:normAutofit/>
+          </a:bodyPr>
+          <a:lstStyle/>
+          <a:p>
+            <a:pPr indent="0" marL="0">
+              <a:buNone/>
+            </a:pPr>
+            <a:r>
+              <a:rPr lang="en-US" sz="1150" dirty="0">
+                <a:solidFill>
+                  <a:srgbClr val="212121"/>
+                </a:solidFill>
+                <a:latin typeface="Calibri" pitchFamily="34" charset="0"/>
+                <a:ea typeface="Calibri" pitchFamily="34" charset="-122"/>
+                <a:cs typeface="Calibri" pitchFamily="34" charset="-120"/>
+              </a:rPr>
+              <a:t>Entra-backed Services org plus dedicated workshop project</a:t>
+            </a:r>
+            <a:endParaRPr lang="en-US" sz="1150" dirty="0"/>
+          </a:p>
+        </p:txBody>
+      </p:sp>
+      <p:sp>
+        <p:nvSpPr>
+          <p:cNvPr id="11" name="Shape 9"/>
+          <p:cNvSpPr/>
+          <p:nvPr/>
+        </p:nvSpPr>
+        <p:spPr>
+          <a:xfrm>
+            <a:off x="6108192" y="1078992"/>
+            <a:ext cx="2670048" cy="1655064"/>
+          </a:xfrm>
+          <a:prstGeom prst="roundRect">
+            <a:avLst>
+              <a:gd name="adj" fmla="val 3315"/>
+            </a:avLst>
+          </a:prstGeom>
+          <a:solidFill>
+            <a:srgbClr val="F3F4F6"/>
+          </a:solidFill>
+          <a:ln w="10160">
+            <a:solidFill>
+              <a:srgbClr val="D1D5DB"/>
+            </a:solidFill>
+            <a:prstDash val="solid"/>
+          </a:ln>
+        </p:spPr>
+      </p:sp>
+      <p:sp>
+        <p:nvSpPr>
+          <p:cNvPr id="12" name="Text 10"/>
+          <p:cNvSpPr/>
+          <p:nvPr/>
+        </p:nvSpPr>
+        <p:spPr>
+          <a:xfrm>
+            <a:off x="6254496" y="1197864"/>
+            <a:ext cx="2377440" cy="310896"/>
+          </a:xfrm>
+          <a:prstGeom prst="rect">
+            <a:avLst/>
+          </a:prstGeom>
+          <a:noFill/>
+          <a:ln/>
+        </p:spPr>
+        <p:txBody>
+          <a:bodyPr wrap="square" lIns="0" tIns="0" rIns="0" bIns="0" rtlCol="0" anchor="ctr">
+            <a:normAutofit/>
+          </a:bodyPr>
+          <a:lstStyle/>
+          <a:p>
+            <a:pPr indent="0" marL="0">
+              <a:buNone/>
+            </a:pPr>
+            <a:r>
+              <a:rPr lang="en-US" sz="1500" b="1" dirty="0">
+                <a:solidFill>
+                  <a:srgbClr val="1E2761"/>
+                </a:solidFill>
+                <a:latin typeface="Calibri" pitchFamily="34" charset="0"/>
+                <a:ea typeface="Calibri" pitchFamily="34" charset="-122"/>
+                <a:cs typeface="Calibri" pitchFamily="34" charset="-120"/>
+              </a:rPr>
+              <a:t>Permissions</a:t>
+            </a:r>
+            <a:endParaRPr lang="en-US" sz="1500" dirty="0"/>
+          </a:p>
+        </p:txBody>
+      </p:sp>
+      <p:sp>
+        <p:nvSpPr>
+          <p:cNvPr id="13" name="Text 11"/>
+          <p:cNvSpPr/>
+          <p:nvPr/>
+        </p:nvSpPr>
+        <p:spPr>
+          <a:xfrm>
+            <a:off x="6254496" y="1581912"/>
+            <a:ext cx="2377440" cy="1033272"/>
+          </a:xfrm>
+          <a:prstGeom prst="rect">
+            <a:avLst/>
+          </a:prstGeom>
+          <a:noFill/>
+          <a:ln/>
+        </p:spPr>
+        <p:txBody>
+          <a:bodyPr wrap="square" lIns="0" tIns="0" rIns="0" bIns="0" rtlCol="0" anchor="t">
+            <a:normAutofit/>
+          </a:bodyPr>
+          <a:lstStyle/>
+          <a:p>
+            <a:pPr indent="0" marL="0">
+              <a:buNone/>
+            </a:pPr>
+            <a:r>
+              <a:rPr lang="en-US" sz="1150" dirty="0">
+                <a:solidFill>
+                  <a:srgbClr val="212121"/>
+                </a:solidFill>
+                <a:latin typeface="Calibri" pitchFamily="34" charset="0"/>
+                <a:ea typeface="Calibri" pitchFamily="34" charset="-122"/>
+                <a:cs typeface="Calibri" pitchFamily="34" charset="-120"/>
+              </a:rPr>
+              <a:t>Read access first; separately approved write access</a:t>
+            </a:r>
+            <a:endParaRPr lang="en-US" sz="1150" dirty="0"/>
+          </a:p>
+        </p:txBody>
+      </p:sp>
+      <p:sp>
+        <p:nvSpPr>
+          <p:cNvPr id="14" name="Shape 12"/>
+          <p:cNvSpPr/>
+          <p:nvPr/>
+        </p:nvSpPr>
+        <p:spPr>
+          <a:xfrm>
+            <a:off x="365760" y="2935224"/>
+            <a:ext cx="2670048" cy="1655064"/>
+          </a:xfrm>
+          <a:prstGeom prst="roundRect">
+            <a:avLst>
+              <a:gd name="adj" fmla="val 3315"/>
+            </a:avLst>
+          </a:prstGeom>
+          <a:solidFill>
+            <a:srgbClr val="F3F4F6"/>
+          </a:solidFill>
+          <a:ln w="10160">
+            <a:solidFill>
+              <a:srgbClr val="D1D5DB"/>
+            </a:solidFill>
+            <a:prstDash val="solid"/>
+          </a:ln>
+        </p:spPr>
+      </p:sp>
+      <p:sp>
+        <p:nvSpPr>
+          <p:cNvPr id="15" name="Text 13"/>
+          <p:cNvSpPr/>
+          <p:nvPr/>
+        </p:nvSpPr>
+        <p:spPr>
+          <a:xfrm>
+            <a:off x="512064" y="3054096"/>
+            <a:ext cx="2377440" cy="310896"/>
+          </a:xfrm>
+          <a:prstGeom prst="rect">
+            <a:avLst/>
+          </a:prstGeom>
+          <a:noFill/>
+          <a:ln/>
+        </p:spPr>
+        <p:txBody>
+          <a:bodyPr wrap="square" lIns="0" tIns="0" rIns="0" bIns="0" rtlCol="0" anchor="ctr">
+            <a:normAutofit/>
+          </a:bodyPr>
+          <a:lstStyle/>
+          <a:p>
+            <a:pPr indent="0" marL="0">
+              <a:buNone/>
+            </a:pPr>
+            <a:r>
+              <a:rPr lang="en-US" sz="1500" b="1" dirty="0">
+                <a:solidFill>
+                  <a:srgbClr val="1E2761"/>
+                </a:solidFill>
+                <a:latin typeface="Calibri" pitchFamily="34" charset="0"/>
+                <a:ea typeface="Calibri" pitchFamily="34" charset="-122"/>
+                <a:cs typeface="Calibri" pitchFamily="34" charset="-120"/>
+              </a:rPr>
+              <a:t>Foundry evals</a:t>
+            </a:r>
+            <a:endParaRPr lang="en-US" sz="1500" dirty="0"/>
+          </a:p>
+        </p:txBody>
+      </p:sp>
+      <p:sp>
+        <p:nvSpPr>
+          <p:cNvPr id="16" name="Text 14"/>
+          <p:cNvSpPr/>
+          <p:nvPr/>
+        </p:nvSpPr>
+        <p:spPr>
+          <a:xfrm>
+            <a:off x="512064" y="3438144"/>
+            <a:ext cx="2377440" cy="1033272"/>
+          </a:xfrm>
+          <a:prstGeom prst="rect">
+            <a:avLst/>
+          </a:prstGeom>
+          <a:noFill/>
+          <a:ln/>
+        </p:spPr>
+        <p:txBody>
+          <a:bodyPr wrap="square" lIns="0" tIns="0" rIns="0" bIns="0" rtlCol="0" anchor="t">
+            <a:normAutofit/>
+          </a:bodyPr>
+          <a:lstStyle/>
+          <a:p>
+            <a:pPr indent="0" marL="0">
+              <a:buNone/>
+            </a:pPr>
+            <a:r>
+              <a:rPr lang="en-US" sz="1150" dirty="0">
+                <a:solidFill>
+                  <a:srgbClr val="212121"/>
+                </a:solidFill>
+                <a:latin typeface="Calibri" pitchFamily="34" charset="0"/>
+                <a:ea typeface="Calibri" pitchFamily="34" charset="-122"/>
+                <a:cs typeface="Calibri" pitchFamily="34" charset="-120"/>
+              </a:rPr>
+              <a:t>Project client and judge model deployment</a:t>
+            </a:r>
+            <a:endParaRPr lang="en-US" sz="1150" dirty="0"/>
+          </a:p>
+        </p:txBody>
+      </p:sp>
+      <p:sp>
+        <p:nvSpPr>
+          <p:cNvPr id="17" name="Shape 15"/>
+          <p:cNvSpPr/>
+          <p:nvPr/>
+        </p:nvSpPr>
+        <p:spPr>
+          <a:xfrm>
+            <a:off x="3236976" y="2935224"/>
+            <a:ext cx="2670048" cy="1655064"/>
+          </a:xfrm>
+          <a:prstGeom prst="roundRect">
+            <a:avLst>
+              <a:gd name="adj" fmla="val 3315"/>
+            </a:avLst>
+          </a:prstGeom>
+          <a:solidFill>
+            <a:srgbClr val="F3F4F6"/>
+          </a:solidFill>
+          <a:ln w="10160">
+            <a:solidFill>
+              <a:srgbClr val="D1D5DB"/>
+            </a:solidFill>
+            <a:prstDash val="solid"/>
+          </a:ln>
+        </p:spPr>
+      </p:sp>
+      <p:sp>
+        <p:nvSpPr>
+          <p:cNvPr id="18" name="Text 16"/>
+          <p:cNvSpPr/>
+          <p:nvPr/>
+        </p:nvSpPr>
+        <p:spPr>
+          <a:xfrm>
+            <a:off x="3383280" y="3054096"/>
+            <a:ext cx="2377440" cy="310896"/>
+          </a:xfrm>
+          <a:prstGeom prst="rect">
+            <a:avLst/>
+          </a:prstGeom>
+          <a:noFill/>
+          <a:ln/>
+        </p:spPr>
+        <p:txBody>
+          <a:bodyPr wrap="square" lIns="0" tIns="0" rIns="0" bIns="0" rtlCol="0" anchor="ctr">
+            <a:normAutofit/>
+          </a:bodyPr>
+          <a:lstStyle/>
+          <a:p>
+            <a:pPr indent="0" marL="0">
+              <a:buNone/>
+            </a:pPr>
+            <a:r>
+              <a:rPr lang="en-US" sz="1500" b="1" dirty="0">
+                <a:solidFill>
+                  <a:srgbClr val="1E2761"/>
+                </a:solidFill>
+                <a:latin typeface="Calibri" pitchFamily="34" charset="0"/>
+                <a:ea typeface="Calibri" pitchFamily="34" charset="-122"/>
+                <a:cs typeface="Calibri" pitchFamily="34" charset="-120"/>
+              </a:rPr>
+              <a:t>Fixtures</a:t>
+            </a:r>
+            <a:endParaRPr lang="en-US" sz="1500" dirty="0"/>
+          </a:p>
+        </p:txBody>
+      </p:sp>
+      <p:sp>
+        <p:nvSpPr>
+          <p:cNvPr id="19" name="Text 17"/>
+          <p:cNvSpPr/>
+          <p:nvPr/>
+        </p:nvSpPr>
+        <p:spPr>
+          <a:xfrm>
+            <a:off x="3383280" y="3438144"/>
+            <a:ext cx="2377440" cy="1033272"/>
+          </a:xfrm>
+          <a:prstGeom prst="rect">
+            <a:avLst/>
+          </a:prstGeom>
+          <a:noFill/>
+          <a:ln/>
+        </p:spPr>
+        <p:txBody>
+          <a:bodyPr wrap="square" lIns="0" tIns="0" rIns="0" bIns="0" rtlCol="0" anchor="t">
+            <a:normAutofit/>
+          </a:bodyPr>
+          <a:lstStyle/>
+          <a:p>
+            <a:pPr indent="0" marL="0">
+              <a:buNone/>
+            </a:pPr>
+            <a:r>
+              <a:rPr lang="en-US" sz="1150" dirty="0">
+                <a:solidFill>
+                  <a:srgbClr val="212121"/>
+                </a:solidFill>
+                <a:latin typeface="Calibri" pitchFamily="34" charset="0"/>
+                <a:ea typeface="Calibri" pitchFamily="34" charset="-122"/>
+                <a:cs typeface="Calibri" pitchFamily="34" charset="-120"/>
+              </a:rPr>
+              <a:t>Known work item IDs and a reset/cleanup plan</a:t>
+            </a:r>
+            <a:endParaRPr lang="en-US" sz="1150" dirty="0"/>
+          </a:p>
+        </p:txBody>
+      </p:sp>
+      <p:sp>
+        <p:nvSpPr>
+          <p:cNvPr id="20" name="Shape 18"/>
+          <p:cNvSpPr/>
+          <p:nvPr/>
+        </p:nvSpPr>
+        <p:spPr>
+          <a:xfrm>
+            <a:off x="365760" y="4773168"/>
+            <a:ext cx="8412480" cy="0"/>
+          </a:xfrm>
+          <a:prstGeom prst="line">
+            <a:avLst/>
+          </a:prstGeom>
+          <a:noFill/>
+          <a:ln w="6350">
+            <a:solidFill>
+              <a:srgbClr val="D1D5DB"/>
+            </a:solidFill>
+            <a:prstDash val="solid"/>
+          </a:ln>
+        </p:spPr>
+      </p:sp>
+      <p:sp>
+        <p:nvSpPr>
+          <p:cNvPr id="21" name="Text 19"/>
+          <p:cNvSpPr/>
+          <p:nvPr/>
+        </p:nvSpPr>
+        <p:spPr>
+          <a:xfrm>
+            <a:off x="384048" y="4818888"/>
+            <a:ext cx="8275320" cy="182880"/>
+          </a:xfrm>
+          <a:prstGeom prst="rect">
+            <a:avLst/>
+          </a:prstGeom>
+          <a:noFill/>
+          <a:ln/>
+        </p:spPr>
+        <p:txBody>
+          <a:bodyPr wrap="square" lIns="0" tIns="0" rIns="0" bIns="0" rtlCol="0" anchor="ctr">
+            <a:normAutofit/>
+          </a:bodyPr>
+          <a:lstStyle/>
+          <a:p>
+            <a:pPr indent="0" marL="0">
+              <a:buNone/>
+            </a:pPr>
+            <a:r>
+              <a:rPr lang="en-US" sz="820" dirty="0">
+                <a:solidFill>
+                  <a:srgbClr val="6B7280"/>
+                </a:solidFill>
+                <a:latin typeface="Calibri" pitchFamily="34" charset="0"/>
+                <a:ea typeface="Calibri" pitchFamily="34" charset="-122"/>
+                <a:cs typeface="Calibri" pitchFamily="34" charset="-120"/>
+              </a:rPr>
+              <a:t>Source: https://learn.microsoft.com/en-us/azure/devops/mcp-server/remote-mcp-server?view=azure-devops  ·  +1 in notes</a:t>
+            </a:r>
+            <a:endParaRPr lang="en-US" sz="820" dirty="0"/>
+          </a:p>
+        </p:txBody>
+      </p:sp>
+    </p:spTree>
+  </p:cSld>
+  <p:clrMapOvr>
+    <a:masterClrMapping/>
+  </p:clrMapOvr>
+</p:sld>
+</file>
+
+<file path=ppt/slides/slide13.xml><?xml version="1.0" encoding="utf-8"?>
+<p:sld xmlns:a="http://schemas.openxmlformats.org/drawingml/2006/main" xmlns:r="http://schemas.openxmlformats.org/officeDocument/2006/relationships" xmlns:p="http://schemas.openxmlformats.org/presentationml/2006/main">
+  <p:cSld name="Slide 13">
+    <p:bg>
+      <p:bgPr>
+        <a:solidFill>
+          <a:srgbClr val="FFFFFF"/>
+        </a:solidFill>
+      </p:bgPr>
+    </p:bg>
+    <p:spTree>
+      <p:nvGrpSpPr>
+        <p:cNvPr id="1" name=""/>
+        <p:cNvGrpSpPr/>
+        <p:nvPr/>
+      </p:nvGrpSpPr>
+      <p:grpSpPr>
+        <a:xfrm>
+          <a:off x="0" y="0"/>
+          <a:ext cx="0" cy="0"/>
+          <a:chOff x="0" y="0"/>
+          <a:chExt cx="0" cy="0"/>
+        </a:xfrm>
+      </p:grpSpPr>
+      <p:sp>
+        <p:nvSpPr>
+          <p:cNvPr id="2" name="Shape 0"/>
+          <p:cNvSpPr/>
+          <p:nvPr/>
+        </p:nvSpPr>
+        <p:spPr>
+          <a:xfrm>
+            <a:off x="0" y="0"/>
+            <a:ext cx="54864" cy="5143500"/>
+          </a:xfrm>
+          <a:prstGeom prst="rect">
+            <a:avLst/>
+          </a:prstGeom>
+          <a:solidFill>
+            <a:srgbClr val="1E2761"/>
+          </a:solidFill>
+          <a:ln/>
+        </p:spPr>
+      </p:sp>
+      <p:sp>
+        <p:nvSpPr>
+          <p:cNvPr id="3" name="Text 1"/>
+          <p:cNvSpPr/>
+          <p:nvPr/>
+        </p:nvSpPr>
+        <p:spPr>
+          <a:xfrm>
+            <a:off x="5486400" y="256032"/>
+            <a:ext cx="3337560" cy="228600"/>
+          </a:xfrm>
+          <a:prstGeom prst="rect">
+            <a:avLst/>
+          </a:prstGeom>
+          <a:noFill/>
+          <a:ln/>
+        </p:spPr>
+        <p:txBody>
+          <a:bodyPr wrap="square" lIns="0" tIns="0" rIns="0" bIns="0" rtlCol="0" anchor="ctr">
+            <a:normAutofit/>
+          </a:bodyPr>
+          <a:lstStyle/>
+          <a:p>
+            <a:pPr algn="r" indent="0" marL="0">
+              <a:buNone/>
+            </a:pPr>
+            <a:r>
+              <a:rPr lang="en-US" sz="950" dirty="0">
+                <a:solidFill>
+                  <a:srgbClr val="6B7280"/>
+                </a:solidFill>
+                <a:latin typeface="Calibri" pitchFamily="34" charset="0"/>
+                <a:ea typeface="Calibri" pitchFamily="34" charset="-122"/>
+                <a:cs typeface="Calibri" pitchFamily="34" charset="-120"/>
+              </a:rPr>
+              <a:t>Day 3 · Module 7</a:t>
+            </a:r>
+            <a:endParaRPr lang="en-US" sz="950" dirty="0"/>
+          </a:p>
+        </p:txBody>
+      </p:sp>
+      <p:sp>
+        <p:nvSpPr>
+          <p:cNvPr id="4" name="Text 2"/>
+          <p:cNvSpPr/>
+          <p:nvPr/>
+        </p:nvSpPr>
+        <p:spPr>
+          <a:xfrm>
+            <a:off x="365760" y="310896"/>
+            <a:ext cx="6583680" cy="603504"/>
+          </a:xfrm>
+          <a:prstGeom prst="rect">
+            <a:avLst/>
+          </a:prstGeom>
+          <a:noFill/>
+          <a:ln/>
+        </p:spPr>
+        <p:txBody>
+          <a:bodyPr wrap="square" lIns="0" tIns="0" rIns="0" bIns="0" rtlCol="0" anchor="ctr">
+            <a:normAutofit/>
+          </a:bodyPr>
+          <a:lstStyle/>
+          <a:p>
+            <a:pPr indent="0" marL="0">
+              <a:buNone/>
+            </a:pPr>
+            <a:r>
+              <a:rPr lang="en-US" sz="2800" b="1" dirty="0">
+                <a:solidFill>
+                  <a:srgbClr val="1E2761"/>
+                </a:solidFill>
+                <a:latin typeface="Calibri" pitchFamily="34" charset="0"/>
+                <a:ea typeface="Calibri" pitchFamily="34" charset="-122"/>
+                <a:cs typeface="Calibri" pitchFamily="34" charset="-120"/>
+              </a:rPr>
               <a:t>Definition of done and guardrails</a:t>
             </a:r>
             <a:endParaRPr lang="en-US" sz="2800" dirty="0"/>
@@ -4161,7 +4773,7 @@
       </p:sp>
       <p:graphicFrame>
         <p:nvGraphicFramePr>
-          <p:cNvPr id="13" name="Table 0"/>
+          <p:cNvPr id="14" name="Table 0"/>
           <p:cNvGraphicFramePr>
             <a:graphicFrameLocks noGrp="1"/>
           </p:cNvGraphicFramePr>
@@ -5498,9 +6110,9 @@
 </p:sld>
 </file>
 
-<file path=ppt/slides/slide13.xml><?xml version="1.0" encoding="utf-8"?>
+<file path=ppt/slides/slide14.xml><?xml version="1.0" encoding="utf-8"?>
 <p:sld xmlns:a="http://schemas.openxmlformats.org/drawingml/2006/main" xmlns:r="http://schemas.openxmlformats.org/officeDocument/2006/relationships" xmlns:p="http://schemas.openxmlformats.org/presentationml/2006/main">
-  <p:cSld name="Slide 13">
+  <p:cSld name="Slide 14">
     <p:bg>
       <p:bgPr>
         <a:solidFill>
@@ -7920,7 +8532,7 @@
     <p:bg>
       <p:bgPr>
         <a:solidFill>
-          <a:srgbClr val="FFFFFF"/>
+          <a:srgbClr val="CADCFC"/>
         </a:solidFill>
       </p:bgPr>
     </p:bg>
@@ -7947,7 +8559,7 @@
         <p:spPr>
           <a:xfrm>
             <a:off x="0" y="0"/>
-            <a:ext cx="54864" cy="5143500"/>
+            <a:ext cx="146304" cy="5143500"/>
           </a:xfrm>
           <a:prstGeom prst="rect">
             <a:avLst/>
@@ -7966,26 +8578,24 @@
         </p:nvSpPr>
         <p:spPr>
           <a:xfrm>
-            <a:off x="5486400" y="256032"/>
-            <a:ext cx="3337560" cy="228600"/>
-          </a:xfrm>
-          <a:prstGeom prst="rect">
-            <a:avLst/>
-          </a:prstGeom>
-          <a:noFill/>
-          <a:ln/>
-        </p:spPr>
-        <p:txBody>
-          <a:bodyPr wrap="square" lIns="0" tIns="0" rIns="0" bIns="0" rtlCol="0" anchor="ctr">
-            <a:normAutofit/>
-          </a:bodyPr>
+            <a:off x="5669280" y="274320"/>
+            <a:ext cx="3291840" cy="274320"/>
+          </a:xfrm>
+          <a:prstGeom prst="rect">
+            <a:avLst/>
+          </a:prstGeom>
+          <a:noFill/>
+          <a:ln/>
+        </p:spPr>
+        <p:txBody>
+          <a:bodyPr wrap="square" lIns="0" tIns="0" rIns="0" bIns="0" rtlCol="0" anchor="ctr"/>
           <a:lstStyle/>
           <a:p>
             <a:pPr algn="r" indent="0" marL="0">
               <a:buNone/>
             </a:pPr>
             <a:r>
-              <a:rPr lang="en-US" sz="950" dirty="0">
+              <a:rPr lang="en-US" sz="1000" dirty="0">
                 <a:solidFill>
                   <a:srgbClr val="6B7280"/>
                 </a:solidFill>
@@ -7993,9 +8603,9 @@
                 <a:ea typeface="Calibri" pitchFamily="34" charset="-122"/>
                 <a:cs typeface="Calibri" pitchFamily="34" charset="-120"/>
               </a:rPr>
-              <a:t>Day 3 · Module 7</a:t>
-            </a:r>
-            <a:endParaRPr lang="en-US" sz="950" dirty="0"/>
+              <a:t>Day 3 · Module 7 · Demo</a:t>
+            </a:r>
+            <a:endParaRPr lang="en-US" sz="1000" dirty="0"/>
           </a:p>
         </p:txBody>
       </p:sp>
@@ -8007,26 +8617,24 @@
         </p:nvSpPr>
         <p:spPr>
           <a:xfrm>
-            <a:off x="365760" y="310896"/>
-            <a:ext cx="6583680" cy="603504"/>
-          </a:xfrm>
-          <a:prstGeom prst="rect">
-            <a:avLst/>
-          </a:prstGeom>
-          <a:noFill/>
-          <a:ln/>
-        </p:spPr>
-        <p:txBody>
-          <a:bodyPr wrap="square" lIns="0" tIns="0" rIns="0" bIns="0" rtlCol="0" anchor="ctr">
-            <a:normAutofit/>
-          </a:bodyPr>
+            <a:off x="548640" y="1051560"/>
+            <a:ext cx="5486400" cy="502920"/>
+          </a:xfrm>
+          <a:prstGeom prst="rect">
+            <a:avLst/>
+          </a:prstGeom>
+          <a:noFill/>
+          <a:ln/>
+        </p:spPr>
+        <p:txBody>
+          <a:bodyPr wrap="square" lIns="0" tIns="0" rIns="0" bIns="0" rtlCol="0" anchor="ctr"/>
           <a:lstStyle/>
           <a:p>
             <a:pPr indent="0" marL="0">
               <a:buNone/>
             </a:pPr>
             <a:r>
-              <a:rPr lang="en-US" sz="2800" b="1" dirty="0">
+              <a:rPr lang="en-US" sz="3200" b="1" spc="800" kern="0" dirty="0">
                 <a:solidFill>
                   <a:srgbClr val="1E2761"/>
                 </a:solidFill>
@@ -8034,58 +8642,89 @@
                 <a:ea typeface="Calibri" pitchFamily="34" charset="-122"/>
                 <a:cs typeface="Calibri" pitchFamily="34" charset="-120"/>
               </a:rPr>
-              <a:t>Repetitions reveal nondeterminism</a:t>
-            </a:r>
-            <a:endParaRPr lang="en-US" sz="2800" dirty="0"/>
-          </a:p>
-        </p:txBody>
-      </p:sp>
-      <p:sp>
-        <p:nvSpPr>
-          <p:cNvPr id="5" name="Shape 3"/>
-          <p:cNvSpPr/>
-          <p:nvPr/>
-        </p:nvSpPr>
-        <p:spPr>
-          <a:xfrm>
-            <a:off x="365760" y="1216152"/>
-            <a:ext cx="1911096" cy="2148840"/>
-          </a:xfrm>
-          <a:prstGeom prst="roundRect">
-            <a:avLst>
-              <a:gd name="adj" fmla="val 2871"/>
-            </a:avLst>
-          </a:prstGeom>
-          <a:solidFill>
-            <a:srgbClr val="CADCFC"/>
-          </a:solidFill>
-          <a:ln w="10160">
-            <a:solidFill>
-              <a:srgbClr val="1E2761"/>
-            </a:solidFill>
-            <a:prstDash val="solid"/>
-          </a:ln>
-        </p:spPr>
-      </p:sp>
-      <p:sp>
-        <p:nvSpPr>
-          <p:cNvPr id="6" name="Shape 4"/>
-          <p:cNvSpPr/>
-          <p:nvPr/>
-        </p:nvSpPr>
-        <p:spPr>
-          <a:xfrm>
-            <a:off x="475488" y="1335024"/>
-            <a:ext cx="320040" cy="320040"/>
-          </a:xfrm>
-          <a:prstGeom prst="ellipse">
-            <a:avLst/>
-          </a:prstGeom>
-          <a:solidFill>
-            <a:srgbClr val="1E2761"/>
-          </a:solidFill>
-          <a:ln/>
-        </p:spPr>
+              <a:t>DEMO</a:t>
+            </a:r>
+            <a:endParaRPr lang="en-US" sz="3200" dirty="0"/>
+          </a:p>
+        </p:txBody>
+      </p:sp>
+      <p:sp>
+        <p:nvSpPr>
+          <p:cNvPr id="5" name="Text 3"/>
+          <p:cNvSpPr/>
+          <p:nvPr/>
+        </p:nvSpPr>
+        <p:spPr>
+          <a:xfrm>
+            <a:off x="548640" y="1691640"/>
+            <a:ext cx="8046720" cy="914400"/>
+          </a:xfrm>
+          <a:prstGeom prst="rect">
+            <a:avLst/>
+          </a:prstGeom>
+          <a:noFill/>
+          <a:ln/>
+        </p:spPr>
+        <p:txBody>
+          <a:bodyPr wrap="square" lIns="0" tIns="0" rIns="0" bIns="0" rtlCol="0" anchor="ctr"/>
+          <a:lstStyle/>
+          <a:p>
+            <a:pPr indent="0" marL="0">
+              <a:buNone/>
+            </a:pPr>
+            <a:r>
+              <a:rPr lang="en-US" sz="3000" b="1" dirty="0">
+                <a:solidFill>
+                  <a:srgbClr val="1E2761"/>
+                </a:solidFill>
+                <a:latin typeface="Calibri" pitchFamily="34" charset="0"/>
+                <a:ea typeface="Calibri" pitchFamily="34" charset="-122"/>
+                <a:cs typeface="Calibri" pitchFamily="34" charset="-120"/>
+              </a:rPr>
+              <a:t>evaluate_agent catches a wrong tool call</a:t>
+            </a:r>
+            <a:endParaRPr lang="en-US" sz="3000" dirty="0"/>
+          </a:p>
+        </p:txBody>
+      </p:sp>
+      <p:sp>
+        <p:nvSpPr>
+          <p:cNvPr id="6" name="Text 4"/>
+          <p:cNvSpPr/>
+          <p:nvPr/>
+        </p:nvSpPr>
+        <p:spPr>
+          <a:xfrm>
+            <a:off x="6583680" y="1051560"/>
+            <a:ext cx="2194560" cy="502920"/>
+          </a:xfrm>
+          <a:prstGeom prst="rect">
+            <a:avLst/>
+          </a:prstGeom>
+          <a:noFill/>
+          <a:ln/>
+        </p:spPr>
+        <p:txBody>
+          <a:bodyPr wrap="square" lIns="0" tIns="0" rIns="0" bIns="0" rtlCol="0" anchor="ctr"/>
+          <a:lstStyle/>
+          <a:p>
+            <a:pPr algn="r" indent="0" marL="0">
+              <a:buNone/>
+            </a:pPr>
+            <a:r>
+              <a:rPr lang="en-US" sz="1800" i="1" dirty="0">
+                <a:solidFill>
+                  <a:srgbClr val="6B7280"/>
+                </a:solidFill>
+                <a:latin typeface="Calibri" pitchFamily="34" charset="0"/>
+                <a:ea typeface="Calibri" pitchFamily="34" charset="-122"/>
+                <a:cs typeface="Calibri" pitchFamily="34" charset="-120"/>
+              </a:rPr>
+              <a:t>~5 min</a:t>
+            </a:r>
+            <a:endParaRPr lang="en-US" sz="1800" dirty="0"/>
+          </a:p>
+        </p:txBody>
       </p:sp>
       <p:sp>
         <p:nvSpPr>
@@ -8095,8 +8734,8 @@
         </p:nvSpPr>
         <p:spPr>
           <a:xfrm>
-            <a:off x="475488" y="1385316"/>
-            <a:ext cx="320040" cy="146304"/>
+            <a:off x="548640" y="2788920"/>
+            <a:ext cx="8046720" cy="1371600"/>
           </a:xfrm>
           <a:prstGeom prst="rect">
             <a:avLst/>
@@ -8108,21 +8747,24 @@
           <a:bodyPr wrap="square" lIns="0" tIns="0" rIns="0" bIns="0" rtlCol="0" anchor="ctr"/>
           <a:lstStyle/>
           <a:p>
-            <a:pPr algn="ctr" indent="0" marL="0">
-              <a:buNone/>
-            </a:pPr>
-            <a:r>
-              <a:rPr lang="en-US" sz="900" b="1" dirty="0">
-                <a:solidFill>
-                  <a:srgbClr val="FFFFFF"/>
-                </a:solidFill>
-                <a:latin typeface="Calibri" pitchFamily="34" charset="0"/>
-                <a:ea typeface="Calibri" pitchFamily="34" charset="-122"/>
-                <a:cs typeface="Calibri" pitchFamily="34" charset="-120"/>
-              </a:rPr>
-              <a:t>1</a:t>
-            </a:r>
-            <a:endParaRPr lang="en-US" sz="900" dirty="0"/>
+            <a:pPr indent="0" marL="0">
+              <a:spcAft>
+                <a:spcPts val="600"/>
+              </a:spcAft>
+              <a:buNone/>
+            </a:pPr>
+            <a:r>
+              <a:rPr lang="en-US" sz="1600" dirty="0">
+                <a:solidFill>
+                  <a:srgbClr val="212121"/>
+                </a:solidFill>
+                <a:latin typeface="Calibri" pitchFamily="34" charset="0"/>
+                <a:ea typeface="Calibri" pitchFamily="34" charset="-122"/>
+                <a:cs typeface="Calibri" pitchFamily="34" charset="-120"/>
+              </a:rPr>
+              <a:t>Run the previous slide's exact evaluate_agent call against a seeded query the agent picks the wrong tool for: tool_calls_present/tool_call_args_match fail the check and print exactly which expectation didn't match — evaluation catching a real regression, not a synthetic pass.</a:t>
+            </a:r>
+            <a:endParaRPr lang="en-US" sz="1600" dirty="0"/>
           </a:p>
         </p:txBody>
       </p:sp>
@@ -8134,647 +8776,40 @@
         </p:nvSpPr>
         <p:spPr>
           <a:xfrm>
-            <a:off x="896112" y="1335024"/>
-            <a:ext cx="1252728" cy="310896"/>
-          </a:xfrm>
-          <a:prstGeom prst="rect">
-            <a:avLst/>
-          </a:prstGeom>
-          <a:noFill/>
-          <a:ln/>
-        </p:spPr>
-        <p:txBody>
-          <a:bodyPr wrap="square" lIns="0" tIns="0" rIns="0" bIns="0" rtlCol="0" anchor="ctr">
-            <a:normAutofit/>
-          </a:bodyPr>
+            <a:off x="548640" y="4434840"/>
+            <a:ext cx="8046720" cy="320040"/>
+          </a:xfrm>
+          <a:prstGeom prst="rect">
+            <a:avLst/>
+          </a:prstGeom>
+          <a:noFill/>
+          <a:ln/>
+        </p:spPr>
+        <p:txBody>
+          <a:bodyPr wrap="square" lIns="0" tIns="0" rIns="0" bIns="0" rtlCol="0" anchor="ctr"/>
           <a:lstStyle/>
           <a:p>
             <a:pPr indent="0" marL="0">
               <a:buNone/>
             </a:pPr>
             <a:r>
-              <a:rPr lang="en-US" sz="1500" b="1" dirty="0">
-                <a:solidFill>
-                  <a:srgbClr val="1E2761"/>
-                </a:solidFill>
-                <a:latin typeface="Calibri" pitchFamily="34" charset="0"/>
-                <a:ea typeface="Calibri" pitchFamily="34" charset="-122"/>
-                <a:cs typeface="Calibri" pitchFamily="34" charset="-120"/>
-              </a:rPr>
-              <a:t>Run</a:t>
-            </a:r>
-            <a:endParaRPr lang="en-US" sz="1500" dirty="0"/>
-          </a:p>
-        </p:txBody>
-      </p:sp>
-      <p:sp>
-        <p:nvSpPr>
-          <p:cNvPr id="9" name="Text 7"/>
-          <p:cNvSpPr/>
-          <p:nvPr/>
-        </p:nvSpPr>
-        <p:spPr>
-          <a:xfrm>
-            <a:off x="512064" y="1719072"/>
-            <a:ext cx="1618488" cy="1527048"/>
-          </a:xfrm>
-          <a:prstGeom prst="rect">
-            <a:avLst/>
-          </a:prstGeom>
-          <a:noFill/>
-          <a:ln/>
-        </p:spPr>
-        <p:txBody>
-          <a:bodyPr wrap="square" lIns="0" tIns="0" rIns="0" bIns="0" rtlCol="0" anchor="t">
-            <a:normAutofit/>
-          </a:bodyPr>
-          <a:lstStyle/>
-          <a:p>
-            <a:pPr indent="0" marL="0">
-              <a:buNone/>
-            </a:pPr>
-            <a:r>
-              <a:rPr lang="en-US" sz="1150" dirty="0">
-                <a:solidFill>
-                  <a:srgbClr val="212121"/>
-                </a:solidFill>
-                <a:latin typeface="Calibri" pitchFamily="34" charset="0"/>
-                <a:ea typeface="Calibri" pitchFamily="34" charset="-122"/>
-                <a:cs typeface="Calibri" pitchFamily="34" charset="-120"/>
-              </a:rPr>
-              <a:t>Set num_repetitions for each query</a:t>
-            </a:r>
-            <a:endParaRPr lang="en-US" sz="1150" dirty="0"/>
-          </a:p>
-        </p:txBody>
-      </p:sp>
-      <p:sp>
-        <p:nvSpPr>
-          <p:cNvPr id="10" name="Shape 8"/>
-          <p:cNvSpPr/>
-          <p:nvPr/>
-        </p:nvSpPr>
-        <p:spPr>
-          <a:xfrm>
-            <a:off x="2313432" y="2180844"/>
-            <a:ext cx="164592" cy="219456"/>
-          </a:xfrm>
-          <a:prstGeom prst="chevron">
-            <a:avLst/>
-          </a:prstGeom>
-          <a:solidFill>
-            <a:srgbClr val="E8A87C"/>
-          </a:solidFill>
-          <a:ln/>
-        </p:spPr>
-      </p:sp>
-      <p:sp>
-        <p:nvSpPr>
-          <p:cNvPr id="11" name="Shape 9"/>
-          <p:cNvSpPr/>
-          <p:nvPr/>
-        </p:nvSpPr>
-        <p:spPr>
-          <a:xfrm>
-            <a:off x="2532888" y="1216152"/>
-            <a:ext cx="1911096" cy="2148840"/>
-          </a:xfrm>
-          <a:prstGeom prst="roundRect">
-            <a:avLst>
-              <a:gd name="adj" fmla="val 2871"/>
-            </a:avLst>
-          </a:prstGeom>
-          <a:solidFill>
-            <a:srgbClr val="F3F4F6"/>
-          </a:solidFill>
-          <a:ln w="10160">
-            <a:solidFill>
-              <a:srgbClr val="D1D5DB"/>
-            </a:solidFill>
-            <a:prstDash val="solid"/>
-          </a:ln>
-        </p:spPr>
-      </p:sp>
-      <p:sp>
-        <p:nvSpPr>
-          <p:cNvPr id="12" name="Shape 10"/>
-          <p:cNvSpPr/>
-          <p:nvPr/>
-        </p:nvSpPr>
-        <p:spPr>
-          <a:xfrm>
-            <a:off x="2642616" y="1335024"/>
-            <a:ext cx="320040" cy="320040"/>
-          </a:xfrm>
-          <a:prstGeom prst="ellipse">
-            <a:avLst/>
-          </a:prstGeom>
-          <a:solidFill>
-            <a:srgbClr val="1E2761"/>
-          </a:solidFill>
-          <a:ln/>
-        </p:spPr>
-      </p:sp>
-      <p:sp>
-        <p:nvSpPr>
-          <p:cNvPr id="13" name="Text 11"/>
-          <p:cNvSpPr/>
-          <p:nvPr/>
-        </p:nvSpPr>
-        <p:spPr>
-          <a:xfrm>
-            <a:off x="2642616" y="1385316"/>
-            <a:ext cx="320040" cy="146304"/>
-          </a:xfrm>
-          <a:prstGeom prst="rect">
-            <a:avLst/>
-          </a:prstGeom>
-          <a:noFill/>
-          <a:ln/>
-        </p:spPr>
-        <p:txBody>
-          <a:bodyPr wrap="square" lIns="0" tIns="0" rIns="0" bIns="0" rtlCol="0" anchor="ctr"/>
-          <a:lstStyle/>
-          <a:p>
-            <a:pPr algn="ctr" indent="0" marL="0">
-              <a:buNone/>
-            </a:pPr>
-            <a:r>
-              <a:rPr lang="en-US" sz="900" b="1" dirty="0">
-                <a:solidFill>
-                  <a:srgbClr val="FFFFFF"/>
-                </a:solidFill>
-                <a:latin typeface="Calibri" pitchFamily="34" charset="0"/>
-                <a:ea typeface="Calibri" pitchFamily="34" charset="-122"/>
-                <a:cs typeface="Calibri" pitchFamily="34" charset="-120"/>
-              </a:rPr>
-              <a:t>2</a:t>
-            </a:r>
-            <a:endParaRPr lang="en-US" sz="900" dirty="0"/>
-          </a:p>
-        </p:txBody>
-      </p:sp>
-      <p:sp>
-        <p:nvSpPr>
-          <p:cNvPr id="14" name="Text 12"/>
-          <p:cNvSpPr/>
-          <p:nvPr/>
-        </p:nvSpPr>
-        <p:spPr>
-          <a:xfrm>
-            <a:off x="3063240" y="1335024"/>
-            <a:ext cx="1252728" cy="310896"/>
-          </a:xfrm>
-          <a:prstGeom prst="rect">
-            <a:avLst/>
-          </a:prstGeom>
-          <a:noFill/>
-          <a:ln/>
-        </p:spPr>
-        <p:txBody>
-          <a:bodyPr wrap="square" lIns="0" tIns="0" rIns="0" bIns="0" rtlCol="0" anchor="ctr">
-            <a:normAutofit/>
-          </a:bodyPr>
-          <a:lstStyle/>
-          <a:p>
-            <a:pPr indent="0" marL="0">
-              <a:buNone/>
-            </a:pPr>
-            <a:r>
-              <a:rPr lang="en-US" sz="1500" b="1" dirty="0">
-                <a:solidFill>
-                  <a:srgbClr val="1E2761"/>
-                </a:solidFill>
-                <a:latin typeface="Calibri" pitchFamily="34" charset="0"/>
-                <a:ea typeface="Calibri" pitchFamily="34" charset="-122"/>
-                <a:cs typeface="Calibri" pitchFamily="34" charset="-120"/>
-              </a:rPr>
-              <a:t>Observe</a:t>
-            </a:r>
-            <a:endParaRPr lang="en-US" sz="1500" dirty="0"/>
-          </a:p>
-        </p:txBody>
-      </p:sp>
-      <p:sp>
-        <p:nvSpPr>
-          <p:cNvPr id="15" name="Text 13"/>
-          <p:cNvSpPr/>
-          <p:nvPr/>
-        </p:nvSpPr>
-        <p:spPr>
-          <a:xfrm>
-            <a:off x="2679192" y="1719072"/>
-            <a:ext cx="1618488" cy="1527048"/>
-          </a:xfrm>
-          <a:prstGeom prst="rect">
-            <a:avLst/>
-          </a:prstGeom>
-          <a:noFill/>
-          <a:ln/>
-        </p:spPr>
-        <p:txBody>
-          <a:bodyPr wrap="square" lIns="0" tIns="0" rIns="0" bIns="0" rtlCol="0" anchor="t">
-            <a:normAutofit/>
-          </a:bodyPr>
-          <a:lstStyle/>
-          <a:p>
-            <a:pPr indent="0" marL="0">
-              <a:buNone/>
-            </a:pPr>
-            <a:r>
-              <a:rPr lang="en-US" sz="1150" dirty="0">
-                <a:solidFill>
-                  <a:srgbClr val="212121"/>
-                </a:solidFill>
-                <a:latin typeface="Calibri" pitchFamily="34" charset="0"/>
-                <a:ea typeface="Calibri" pitchFamily="34" charset="-122"/>
-                <a:cs typeface="Calibri" pitchFamily="34" charset="-120"/>
-              </a:rPr>
-              <a:t>Compare tool selection and arguments across runs</a:t>
-            </a:r>
-            <a:endParaRPr lang="en-US" sz="1150" dirty="0"/>
-          </a:p>
-        </p:txBody>
-      </p:sp>
-      <p:sp>
-        <p:nvSpPr>
-          <p:cNvPr id="16" name="Shape 14"/>
-          <p:cNvSpPr/>
-          <p:nvPr/>
-        </p:nvSpPr>
-        <p:spPr>
-          <a:xfrm>
-            <a:off x="4480560" y="2180844"/>
-            <a:ext cx="164592" cy="219456"/>
-          </a:xfrm>
-          <a:prstGeom prst="chevron">
-            <a:avLst/>
-          </a:prstGeom>
-          <a:solidFill>
-            <a:srgbClr val="E8A87C"/>
-          </a:solidFill>
-          <a:ln/>
-        </p:spPr>
-      </p:sp>
-      <p:sp>
-        <p:nvSpPr>
-          <p:cNvPr id="17" name="Shape 15"/>
-          <p:cNvSpPr/>
-          <p:nvPr/>
-        </p:nvSpPr>
-        <p:spPr>
-          <a:xfrm>
-            <a:off x="4700016" y="1216152"/>
-            <a:ext cx="1911096" cy="2148840"/>
-          </a:xfrm>
-          <a:prstGeom prst="roundRect">
-            <a:avLst>
-              <a:gd name="adj" fmla="val 2871"/>
-            </a:avLst>
-          </a:prstGeom>
-          <a:solidFill>
-            <a:srgbClr val="F3F4F6"/>
-          </a:solidFill>
-          <a:ln w="10160">
-            <a:solidFill>
-              <a:srgbClr val="D1D5DB"/>
-            </a:solidFill>
-            <a:prstDash val="solid"/>
-          </a:ln>
-        </p:spPr>
-      </p:sp>
-      <p:sp>
-        <p:nvSpPr>
-          <p:cNvPr id="18" name="Shape 16"/>
-          <p:cNvSpPr/>
-          <p:nvPr/>
-        </p:nvSpPr>
-        <p:spPr>
-          <a:xfrm>
-            <a:off x="4809744" y="1335024"/>
-            <a:ext cx="320040" cy="320040"/>
-          </a:xfrm>
-          <a:prstGeom prst="ellipse">
-            <a:avLst/>
-          </a:prstGeom>
-          <a:solidFill>
-            <a:srgbClr val="1E2761"/>
-          </a:solidFill>
-          <a:ln/>
-        </p:spPr>
-      </p:sp>
-      <p:sp>
-        <p:nvSpPr>
-          <p:cNvPr id="19" name="Text 17"/>
-          <p:cNvSpPr/>
-          <p:nvPr/>
-        </p:nvSpPr>
-        <p:spPr>
-          <a:xfrm>
-            <a:off x="4809744" y="1385316"/>
-            <a:ext cx="320040" cy="146304"/>
-          </a:xfrm>
-          <a:prstGeom prst="rect">
-            <a:avLst/>
-          </a:prstGeom>
-          <a:noFill/>
-          <a:ln/>
-        </p:spPr>
-        <p:txBody>
-          <a:bodyPr wrap="square" lIns="0" tIns="0" rIns="0" bIns="0" rtlCol="0" anchor="ctr"/>
-          <a:lstStyle/>
-          <a:p>
-            <a:pPr algn="ctr" indent="0" marL="0">
-              <a:buNone/>
-            </a:pPr>
-            <a:r>
-              <a:rPr lang="en-US" sz="900" b="1" dirty="0">
-                <a:solidFill>
-                  <a:srgbClr val="FFFFFF"/>
-                </a:solidFill>
-                <a:latin typeface="Calibri" pitchFamily="34" charset="0"/>
-                <a:ea typeface="Calibri" pitchFamily="34" charset="-122"/>
-                <a:cs typeface="Calibri" pitchFamily="34" charset="-120"/>
-              </a:rPr>
-              <a:t>3</a:t>
-            </a:r>
-            <a:endParaRPr lang="en-US" sz="900" dirty="0"/>
-          </a:p>
-        </p:txBody>
-      </p:sp>
-      <p:sp>
-        <p:nvSpPr>
-          <p:cNvPr id="20" name="Text 18"/>
-          <p:cNvSpPr/>
-          <p:nvPr/>
-        </p:nvSpPr>
-        <p:spPr>
-          <a:xfrm>
-            <a:off x="5230368" y="1335024"/>
-            <a:ext cx="1252728" cy="310896"/>
-          </a:xfrm>
-          <a:prstGeom prst="rect">
-            <a:avLst/>
-          </a:prstGeom>
-          <a:noFill/>
-          <a:ln/>
-        </p:spPr>
-        <p:txBody>
-          <a:bodyPr wrap="square" lIns="0" tIns="0" rIns="0" bIns="0" rtlCol="0" anchor="ctr">
-            <a:normAutofit/>
-          </a:bodyPr>
-          <a:lstStyle/>
-          <a:p>
-            <a:pPr indent="0" marL="0">
-              <a:buNone/>
-            </a:pPr>
-            <a:r>
-              <a:rPr lang="en-US" sz="1500" b="1" dirty="0">
-                <a:solidFill>
-                  <a:srgbClr val="1E2761"/>
-                </a:solidFill>
-                <a:latin typeface="Calibri" pitchFamily="34" charset="0"/>
-                <a:ea typeface="Calibri" pitchFamily="34" charset="-122"/>
-                <a:cs typeface="Calibri" pitchFamily="34" charset="-120"/>
-              </a:rPr>
-              <a:t>Diagnose</a:t>
-            </a:r>
-            <a:endParaRPr lang="en-US" sz="1500" dirty="0"/>
-          </a:p>
-        </p:txBody>
-      </p:sp>
-      <p:sp>
-        <p:nvSpPr>
-          <p:cNvPr id="21" name="Text 19"/>
-          <p:cNvSpPr/>
-          <p:nvPr/>
-        </p:nvSpPr>
-        <p:spPr>
-          <a:xfrm>
-            <a:off x="4846320" y="1719072"/>
-            <a:ext cx="1618488" cy="1527048"/>
-          </a:xfrm>
-          <a:prstGeom prst="rect">
-            <a:avLst/>
-          </a:prstGeom>
-          <a:noFill/>
-          <a:ln/>
-        </p:spPr>
-        <p:txBody>
-          <a:bodyPr wrap="square" lIns="0" tIns="0" rIns="0" bIns="0" rtlCol="0" anchor="t">
-            <a:normAutofit/>
-          </a:bodyPr>
-          <a:lstStyle/>
-          <a:p>
-            <a:pPr indent="0" marL="0">
-              <a:buNone/>
-            </a:pPr>
-            <a:r>
-              <a:rPr lang="en-US" sz="1150" dirty="0">
-                <a:solidFill>
-                  <a:srgbClr val="212121"/>
-                </a:solidFill>
-                <a:latin typeface="Calibri" pitchFamily="34" charset="0"/>
-                <a:ea typeface="Calibri" pitchFamily="34" charset="-122"/>
-                <a:cs typeface="Calibri" pitchFamily="34" charset="-120"/>
-              </a:rPr>
-              <a:t>Inspect descriptions, instructions, and context</a:t>
-            </a:r>
-            <a:endParaRPr lang="en-US" sz="1150" dirty="0"/>
-          </a:p>
-        </p:txBody>
-      </p:sp>
-      <p:sp>
-        <p:nvSpPr>
-          <p:cNvPr id="22" name="Shape 20"/>
-          <p:cNvSpPr/>
-          <p:nvPr/>
-        </p:nvSpPr>
-        <p:spPr>
-          <a:xfrm>
-            <a:off x="6647688" y="2180844"/>
-            <a:ext cx="164592" cy="219456"/>
-          </a:xfrm>
-          <a:prstGeom prst="chevron">
-            <a:avLst/>
-          </a:prstGeom>
-          <a:solidFill>
-            <a:srgbClr val="E8A87C"/>
-          </a:solidFill>
-          <a:ln/>
-        </p:spPr>
-      </p:sp>
-      <p:sp>
-        <p:nvSpPr>
-          <p:cNvPr id="23" name="Shape 21"/>
-          <p:cNvSpPr/>
-          <p:nvPr/>
-        </p:nvSpPr>
-        <p:spPr>
-          <a:xfrm>
-            <a:off x="6867144" y="1216152"/>
-            <a:ext cx="1911096" cy="2148840"/>
-          </a:xfrm>
-          <a:prstGeom prst="roundRect">
-            <a:avLst>
-              <a:gd name="adj" fmla="val 2871"/>
-            </a:avLst>
-          </a:prstGeom>
-          <a:solidFill>
-            <a:srgbClr val="CADCFC"/>
-          </a:solidFill>
-          <a:ln w="10160">
-            <a:solidFill>
-              <a:srgbClr val="1E2761"/>
-            </a:solidFill>
-            <a:prstDash val="solid"/>
-          </a:ln>
-        </p:spPr>
-      </p:sp>
-      <p:sp>
-        <p:nvSpPr>
-          <p:cNvPr id="24" name="Shape 22"/>
-          <p:cNvSpPr/>
-          <p:nvPr/>
-        </p:nvSpPr>
-        <p:spPr>
-          <a:xfrm>
-            <a:off x="6976872" y="1335024"/>
-            <a:ext cx="320040" cy="320040"/>
-          </a:xfrm>
-          <a:prstGeom prst="ellipse">
-            <a:avLst/>
-          </a:prstGeom>
-          <a:solidFill>
-            <a:srgbClr val="1E2761"/>
-          </a:solidFill>
-          <a:ln/>
-        </p:spPr>
-      </p:sp>
-      <p:sp>
-        <p:nvSpPr>
-          <p:cNvPr id="25" name="Text 23"/>
-          <p:cNvSpPr/>
-          <p:nvPr/>
-        </p:nvSpPr>
-        <p:spPr>
-          <a:xfrm>
-            <a:off x="6976872" y="1385316"/>
-            <a:ext cx="320040" cy="146304"/>
-          </a:xfrm>
-          <a:prstGeom prst="rect">
-            <a:avLst/>
-          </a:prstGeom>
-          <a:noFill/>
-          <a:ln/>
-        </p:spPr>
-        <p:txBody>
-          <a:bodyPr wrap="square" lIns="0" tIns="0" rIns="0" bIns="0" rtlCol="0" anchor="ctr"/>
-          <a:lstStyle/>
-          <a:p>
-            <a:pPr algn="ctr" indent="0" marL="0">
-              <a:buNone/>
-            </a:pPr>
-            <a:r>
-              <a:rPr lang="en-US" sz="900" b="1" dirty="0">
-                <a:solidFill>
-                  <a:srgbClr val="FFFFFF"/>
-                </a:solidFill>
-                <a:latin typeface="Calibri" pitchFamily="34" charset="0"/>
-                <a:ea typeface="Calibri" pitchFamily="34" charset="-122"/>
-                <a:cs typeface="Calibri" pitchFamily="34" charset="-120"/>
-              </a:rPr>
-              <a:t>4</a:t>
-            </a:r>
-            <a:endParaRPr lang="en-US" sz="900" dirty="0"/>
-          </a:p>
-        </p:txBody>
-      </p:sp>
-      <p:sp>
-        <p:nvSpPr>
-          <p:cNvPr id="26" name="Text 24"/>
-          <p:cNvSpPr/>
-          <p:nvPr/>
-        </p:nvSpPr>
-        <p:spPr>
-          <a:xfrm>
-            <a:off x="7397496" y="1335024"/>
-            <a:ext cx="1252728" cy="310896"/>
-          </a:xfrm>
-          <a:prstGeom prst="rect">
-            <a:avLst/>
-          </a:prstGeom>
-          <a:noFill/>
-          <a:ln/>
-        </p:spPr>
-        <p:txBody>
-          <a:bodyPr wrap="square" lIns="0" tIns="0" rIns="0" bIns="0" rtlCol="0" anchor="ctr">
-            <a:normAutofit/>
-          </a:bodyPr>
-          <a:lstStyle/>
-          <a:p>
-            <a:pPr indent="0" marL="0">
-              <a:buNone/>
-            </a:pPr>
-            <a:r>
-              <a:rPr lang="en-US" sz="1500" b="1" dirty="0">
-                <a:solidFill>
-                  <a:srgbClr val="1E2761"/>
-                </a:solidFill>
-                <a:latin typeface="Calibri" pitchFamily="34" charset="0"/>
-                <a:ea typeface="Calibri" pitchFamily="34" charset="-122"/>
-                <a:cs typeface="Calibri" pitchFamily="34" charset="-120"/>
-              </a:rPr>
-              <a:t>Set criteria</a:t>
-            </a:r>
-            <a:endParaRPr lang="en-US" sz="1500" dirty="0"/>
-          </a:p>
-        </p:txBody>
-      </p:sp>
-      <p:sp>
-        <p:nvSpPr>
-          <p:cNvPr id="27" name="Text 25"/>
-          <p:cNvSpPr/>
-          <p:nvPr/>
-        </p:nvSpPr>
-        <p:spPr>
-          <a:xfrm>
-            <a:off x="7013448" y="1719072"/>
-            <a:ext cx="1618488" cy="1527048"/>
-          </a:xfrm>
-          <a:prstGeom prst="rect">
-            <a:avLst/>
-          </a:prstGeom>
-          <a:noFill/>
-          <a:ln/>
-        </p:spPr>
-        <p:txBody>
-          <a:bodyPr wrap="square" lIns="0" tIns="0" rIns="0" bIns="0" rtlCol="0" anchor="t">
-            <a:normAutofit/>
-          </a:bodyPr>
-          <a:lstStyle/>
-          <a:p>
-            <a:pPr indent="0" marL="0">
-              <a:buNone/>
-            </a:pPr>
-            <a:r>
-              <a:rPr lang="en-US" sz="1150" dirty="0">
-                <a:solidFill>
-                  <a:srgbClr val="212121"/>
-                </a:solidFill>
-                <a:latin typeface="Calibri" pitchFamily="34" charset="0"/>
-                <a:ea typeface="Calibri" pitchFamily="34" charset="-122"/>
-                <a:cs typeface="Calibri" pitchFamily="34" charset="-120"/>
-              </a:rPr>
-              <a:t>Based on your scenario and risk, not an arbitrary universal threshold</a:t>
-            </a:r>
-            <a:endParaRPr lang="en-US" sz="1150" dirty="0"/>
-          </a:p>
-        </p:txBody>
-      </p:sp>
-      <p:sp>
-        <p:nvSpPr>
-          <p:cNvPr id="28" name="Shape 26"/>
+              <a:rPr lang="en-US" sz="1100" i="1" dirty="0">
+                <a:solidFill>
+                  <a:srgbClr val="6B7280"/>
+                </a:solidFill>
+                <a:latin typeface="Calibri" pitchFamily="34" charset="0"/>
+                <a:ea typeface="Calibri" pitchFamily="34" charset="-122"/>
+                <a:cs typeface="Calibri" pitchFamily="34" charset="-120"/>
+              </a:rPr>
+              <a:t>Runbook: demos/day3/module-7-demo-1-eval-catches-wrong-tool.md</a:t>
+            </a:r>
+            <a:endParaRPr lang="en-US" sz="1100" dirty="0"/>
+          </a:p>
+        </p:txBody>
+      </p:sp>
+      <p:sp>
+        <p:nvSpPr>
+          <p:cNvPr id="9" name="Shape 7"/>
           <p:cNvSpPr/>
           <p:nvPr/>
         </p:nvSpPr>
@@ -8797,7 +8832,7 @@
       </p:sp>
       <p:sp>
         <p:nvSpPr>
-          <p:cNvPr id="29" name="Text 27"/>
+          <p:cNvPr id="10" name="Text 8"/>
           <p:cNvSpPr/>
           <p:nvPr/>
         </p:nvSpPr>
@@ -8830,7 +8865,7 @@
                 <a:ea typeface="Calibri" pitchFamily="34" charset="-122"/>
                 <a:cs typeface="Calibri" pitchFamily="34" charset="-120"/>
               </a:rPr>
-              <a:t>Source: https://learn.microsoft.com/en-us/agent-framework/agents/evaluation?tabs=python</a:t>
+              <a:t>Source: https://github.com/microsoft/agent-framework/blob/main/python/samples/02-agents/evaluation/evaluate_with_expected.py</a:t>
             </a:r>
             <a:endParaRPr lang="en-US" sz="820" dirty="0"/>
           </a:p>
@@ -8956,7 +8991,7 @@
               <a:buNone/>
             </a:pPr>
             <a:r>
-              <a:rPr lang="en-US" sz="2300" b="1" dirty="0">
+              <a:rPr lang="en-US" sz="2800" b="1" dirty="0">
                 <a:solidFill>
                   <a:srgbClr val="1E2761"/>
                 </a:solidFill>
@@ -8964,9 +8999,9 @@
                 <a:ea typeface="Calibri" pitchFamily="34" charset="-122"/>
                 <a:cs typeface="Calibri" pitchFamily="34" charset="-120"/>
               </a:rPr>
-              <a:t>Local checks and Foundry evaluators complement each other</a:t>
-            </a:r>
-            <a:endParaRPr lang="en-US" sz="2300" dirty="0"/>
+              <a:t>Repetitions reveal nondeterminism</a:t>
+            </a:r>
+            <a:endParaRPr lang="en-US" sz="2800" dirty="0"/>
           </a:p>
         </p:txBody>
       </p:sp>
@@ -8978,16 +9013,206 @@
         </p:nvSpPr>
         <p:spPr>
           <a:xfrm>
-            <a:off x="365760" y="1078992"/>
-            <a:ext cx="4114800" cy="3493008"/>
+            <a:off x="365760" y="1216152"/>
+            <a:ext cx="1911096" cy="2148840"/>
           </a:xfrm>
           <a:prstGeom prst="roundRect">
-            <a:avLst/>
+            <a:avLst>
+              <a:gd name="adj" fmla="val 2871"/>
+            </a:avLst>
+          </a:prstGeom>
+          <a:solidFill>
+            <a:srgbClr val="CADCFC"/>
+          </a:solidFill>
+          <a:ln w="10160">
+            <a:solidFill>
+              <a:srgbClr val="1E2761"/>
+            </a:solidFill>
+            <a:prstDash val="solid"/>
+          </a:ln>
+        </p:spPr>
+      </p:sp>
+      <p:sp>
+        <p:nvSpPr>
+          <p:cNvPr id="6" name="Shape 4"/>
+          <p:cNvSpPr/>
+          <p:nvPr/>
+        </p:nvSpPr>
+        <p:spPr>
+          <a:xfrm>
+            <a:off x="475488" y="1335024"/>
+            <a:ext cx="320040" cy="320040"/>
+          </a:xfrm>
+          <a:prstGeom prst="ellipse">
+            <a:avLst/>
+          </a:prstGeom>
+          <a:solidFill>
+            <a:srgbClr val="1E2761"/>
+          </a:solidFill>
+          <a:ln/>
+        </p:spPr>
+      </p:sp>
+      <p:sp>
+        <p:nvSpPr>
+          <p:cNvPr id="7" name="Text 5"/>
+          <p:cNvSpPr/>
+          <p:nvPr/>
+        </p:nvSpPr>
+        <p:spPr>
+          <a:xfrm>
+            <a:off x="475488" y="1385316"/>
+            <a:ext cx="320040" cy="146304"/>
+          </a:xfrm>
+          <a:prstGeom prst="rect">
+            <a:avLst/>
+          </a:prstGeom>
+          <a:noFill/>
+          <a:ln/>
+        </p:spPr>
+        <p:txBody>
+          <a:bodyPr wrap="square" lIns="0" tIns="0" rIns="0" bIns="0" rtlCol="0" anchor="ctr"/>
+          <a:lstStyle/>
+          <a:p>
+            <a:pPr algn="ctr" indent="0" marL="0">
+              <a:buNone/>
+            </a:pPr>
+            <a:r>
+              <a:rPr lang="en-US" sz="900" b="1" dirty="0">
+                <a:solidFill>
+                  <a:srgbClr val="FFFFFF"/>
+                </a:solidFill>
+                <a:latin typeface="Calibri" pitchFamily="34" charset="0"/>
+                <a:ea typeface="Calibri" pitchFamily="34" charset="-122"/>
+                <a:cs typeface="Calibri" pitchFamily="34" charset="-120"/>
+              </a:rPr>
+              <a:t>1</a:t>
+            </a:r>
+            <a:endParaRPr lang="en-US" sz="900" dirty="0"/>
+          </a:p>
+        </p:txBody>
+      </p:sp>
+      <p:sp>
+        <p:nvSpPr>
+          <p:cNvPr id="8" name="Text 6"/>
+          <p:cNvSpPr/>
+          <p:nvPr/>
+        </p:nvSpPr>
+        <p:spPr>
+          <a:xfrm>
+            <a:off x="896112" y="1335024"/>
+            <a:ext cx="1252728" cy="310896"/>
+          </a:xfrm>
+          <a:prstGeom prst="rect">
+            <a:avLst/>
+          </a:prstGeom>
+          <a:noFill/>
+          <a:ln/>
+        </p:spPr>
+        <p:txBody>
+          <a:bodyPr wrap="square" lIns="0" tIns="0" rIns="0" bIns="0" rtlCol="0" anchor="ctr">
+            <a:normAutofit/>
+          </a:bodyPr>
+          <a:lstStyle/>
+          <a:p>
+            <a:pPr indent="0" marL="0">
+              <a:buNone/>
+            </a:pPr>
+            <a:r>
+              <a:rPr lang="en-US" sz="1500" b="1" dirty="0">
+                <a:solidFill>
+                  <a:srgbClr val="1E2761"/>
+                </a:solidFill>
+                <a:latin typeface="Calibri" pitchFamily="34" charset="0"/>
+                <a:ea typeface="Calibri" pitchFamily="34" charset="-122"/>
+                <a:cs typeface="Calibri" pitchFamily="34" charset="-120"/>
+              </a:rPr>
+              <a:t>Run</a:t>
+            </a:r>
+            <a:endParaRPr lang="en-US" sz="1500" dirty="0"/>
+          </a:p>
+        </p:txBody>
+      </p:sp>
+      <p:sp>
+        <p:nvSpPr>
+          <p:cNvPr id="9" name="Text 7"/>
+          <p:cNvSpPr/>
+          <p:nvPr/>
+        </p:nvSpPr>
+        <p:spPr>
+          <a:xfrm>
+            <a:off x="512064" y="1719072"/>
+            <a:ext cx="1618488" cy="1527048"/>
+          </a:xfrm>
+          <a:prstGeom prst="rect">
+            <a:avLst/>
+          </a:prstGeom>
+          <a:noFill/>
+          <a:ln/>
+        </p:spPr>
+        <p:txBody>
+          <a:bodyPr wrap="square" lIns="0" tIns="0" rIns="0" bIns="0" rtlCol="0" anchor="t">
+            <a:normAutofit/>
+          </a:bodyPr>
+          <a:lstStyle/>
+          <a:p>
+            <a:pPr indent="0" marL="0">
+              <a:buNone/>
+            </a:pPr>
+            <a:r>
+              <a:rPr lang="en-US" sz="1150" dirty="0">
+                <a:solidFill>
+                  <a:srgbClr val="212121"/>
+                </a:solidFill>
+                <a:latin typeface="Calibri" pitchFamily="34" charset="0"/>
+                <a:ea typeface="Calibri" pitchFamily="34" charset="-122"/>
+                <a:cs typeface="Calibri" pitchFamily="34" charset="-120"/>
+              </a:rPr>
+              <a:t>Set num_repetitions for each query</a:t>
+            </a:r>
+            <a:endParaRPr lang="en-US" sz="1150" dirty="0"/>
+          </a:p>
+        </p:txBody>
+      </p:sp>
+      <p:sp>
+        <p:nvSpPr>
+          <p:cNvPr id="10" name="Shape 8"/>
+          <p:cNvSpPr/>
+          <p:nvPr/>
+        </p:nvSpPr>
+        <p:spPr>
+          <a:xfrm>
+            <a:off x="2313432" y="2180844"/>
+            <a:ext cx="164592" cy="219456"/>
+          </a:xfrm>
+          <a:prstGeom prst="chevron">
+            <a:avLst/>
+          </a:prstGeom>
+          <a:solidFill>
+            <a:srgbClr val="E8A87C"/>
+          </a:solidFill>
+          <a:ln/>
+        </p:spPr>
+      </p:sp>
+      <p:sp>
+        <p:nvSpPr>
+          <p:cNvPr id="11" name="Shape 9"/>
+          <p:cNvSpPr/>
+          <p:nvPr/>
+        </p:nvSpPr>
+        <p:spPr>
+          <a:xfrm>
+            <a:off x="2532888" y="1216152"/>
+            <a:ext cx="1911096" cy="2148840"/>
+          </a:xfrm>
+          <a:prstGeom prst="roundRect">
+            <a:avLst>
+              <a:gd name="adj" fmla="val 2871"/>
+            </a:avLst>
           </a:prstGeom>
           <a:solidFill>
             <a:srgbClr val="F3F4F6"/>
           </a:solidFill>
-          <a:ln w="11430">
+          <a:ln w="10160">
             <a:solidFill>
               <a:srgbClr val="D1D5DB"/>
             </a:solidFill>
@@ -8997,14 +9222,73 @@
       </p:sp>
       <p:sp>
         <p:nvSpPr>
-          <p:cNvPr id="6" name="Text 4"/>
-          <p:cNvSpPr/>
-          <p:nvPr/>
-        </p:nvSpPr>
-        <p:spPr>
-          <a:xfrm>
-            <a:off x="566928" y="1298448"/>
-            <a:ext cx="3712464" cy="411480"/>
+          <p:cNvPr id="12" name="Shape 10"/>
+          <p:cNvSpPr/>
+          <p:nvPr/>
+        </p:nvSpPr>
+        <p:spPr>
+          <a:xfrm>
+            <a:off x="2642616" y="1335024"/>
+            <a:ext cx="320040" cy="320040"/>
+          </a:xfrm>
+          <a:prstGeom prst="ellipse">
+            <a:avLst/>
+          </a:prstGeom>
+          <a:solidFill>
+            <a:srgbClr val="1E2761"/>
+          </a:solidFill>
+          <a:ln/>
+        </p:spPr>
+      </p:sp>
+      <p:sp>
+        <p:nvSpPr>
+          <p:cNvPr id="13" name="Text 11"/>
+          <p:cNvSpPr/>
+          <p:nvPr/>
+        </p:nvSpPr>
+        <p:spPr>
+          <a:xfrm>
+            <a:off x="2642616" y="1385316"/>
+            <a:ext cx="320040" cy="146304"/>
+          </a:xfrm>
+          <a:prstGeom prst="rect">
+            <a:avLst/>
+          </a:prstGeom>
+          <a:noFill/>
+          <a:ln/>
+        </p:spPr>
+        <p:txBody>
+          <a:bodyPr wrap="square" lIns="0" tIns="0" rIns="0" bIns="0" rtlCol="0" anchor="ctr"/>
+          <a:lstStyle/>
+          <a:p>
+            <a:pPr algn="ctr" indent="0" marL="0">
+              <a:buNone/>
+            </a:pPr>
+            <a:r>
+              <a:rPr lang="en-US" sz="900" b="1" dirty="0">
+                <a:solidFill>
+                  <a:srgbClr val="FFFFFF"/>
+                </a:solidFill>
+                <a:latin typeface="Calibri" pitchFamily="34" charset="0"/>
+                <a:ea typeface="Calibri" pitchFamily="34" charset="-122"/>
+                <a:cs typeface="Calibri" pitchFamily="34" charset="-120"/>
+              </a:rPr>
+              <a:t>2</a:t>
+            </a:r>
+            <a:endParaRPr lang="en-US" sz="900" dirty="0"/>
+          </a:p>
+        </p:txBody>
+      </p:sp>
+      <p:sp>
+        <p:nvSpPr>
+          <p:cNvPr id="14" name="Text 12"/>
+          <p:cNvSpPr/>
+          <p:nvPr/>
+        </p:nvSpPr>
+        <p:spPr>
+          <a:xfrm>
+            <a:off x="3063240" y="1335024"/>
+            <a:ext cx="1252728" cy="310896"/>
           </a:xfrm>
           <a:prstGeom prst="rect">
             <a:avLst/>
@@ -9022,7 +9306,7 @@
               <a:buNone/>
             </a:pPr>
             <a:r>
-              <a:rPr lang="en-US" sz="2000" b="1" dirty="0">
+              <a:rPr lang="en-US" sz="1500" b="1" dirty="0">
                 <a:solidFill>
                   <a:srgbClr val="1E2761"/>
                 </a:solidFill>
@@ -9030,41 +9314,40 @@
                 <a:ea typeface="Calibri" pitchFamily="34" charset="-122"/>
                 <a:cs typeface="Calibri" pitchFamily="34" charset="-120"/>
               </a:rPr>
-              <a:t>LocalEvaluator</a:t>
-            </a:r>
-            <a:endParaRPr lang="en-US" sz="2000" dirty="0"/>
-          </a:p>
-        </p:txBody>
-      </p:sp>
-      <p:sp>
-        <p:nvSpPr>
-          <p:cNvPr id="7" name="Text 5"/>
-          <p:cNvSpPr/>
-          <p:nvPr/>
-        </p:nvSpPr>
-        <p:spPr>
-          <a:xfrm>
-            <a:off x="594360" y="1828800"/>
-            <a:ext cx="3639312" cy="2395728"/>
-          </a:xfrm>
-          <a:prstGeom prst="rect">
-            <a:avLst/>
-          </a:prstGeom>
-          <a:noFill/>
-          <a:ln/>
-        </p:spPr>
-        <p:txBody>
-          <a:bodyPr wrap="square" lIns="381" tIns="381" rIns="381" bIns="381" rtlCol="0" anchor="ctr">
+              <a:t>Observe</a:t>
+            </a:r>
+            <a:endParaRPr lang="en-US" sz="1500" dirty="0"/>
+          </a:p>
+        </p:txBody>
+      </p:sp>
+      <p:sp>
+        <p:nvSpPr>
+          <p:cNvPr id="15" name="Text 13"/>
+          <p:cNvSpPr/>
+          <p:nvPr/>
+        </p:nvSpPr>
+        <p:spPr>
+          <a:xfrm>
+            <a:off x="2679192" y="1719072"/>
+            <a:ext cx="1618488" cy="1527048"/>
+          </a:xfrm>
+          <a:prstGeom prst="rect">
+            <a:avLst/>
+          </a:prstGeom>
+          <a:noFill/>
+          <a:ln/>
+        </p:spPr>
+        <p:txBody>
+          <a:bodyPr wrap="square" lIns="0" tIns="0" rIns="0" bIns="0" rtlCol="0" anchor="t">
             <a:normAutofit/>
           </a:bodyPr>
           <a:lstStyle/>
           <a:p>
-            <a:pPr marL="342900" indent="-342900">
-              <a:buSzPct val="100000"/>
-              <a:buChar char="•"/>
-            </a:pPr>
-            <a:r>
-              <a:rPr lang="en-US" sz="1300" dirty="0">
+            <a:pPr indent="0" marL="0">
+              <a:buNone/>
+            </a:pPr>
+            <a:r>
+              <a:rPr lang="en-US" sz="1150" dirty="0">
                 <a:solidFill>
                   <a:srgbClr val="212121"/>
                 </a:solidFill>
@@ -9072,17 +9355,187 @@
                 <a:ea typeface="Calibri" pitchFamily="34" charset="-122"/>
                 <a:cs typeface="Calibri" pitchFamily="34" charset="-120"/>
               </a:rPr>
-              <a:t>No evaluator API call</a:t>
-            </a:r>
-            <a:endParaRPr lang="en-US" sz="1300" dirty="0"/>
-          </a:p>
-          <a:p>
-            <a:pPr marL="342900" indent="-342900">
-              <a:buSzPct val="100000"/>
-              <a:buChar char="•"/>
-            </a:pPr>
-            <a:r>
-              <a:rPr lang="en-US" sz="1300" dirty="0">
+              <a:t>Compare tool selection and arguments across runs</a:t>
+            </a:r>
+            <a:endParaRPr lang="en-US" sz="1150" dirty="0"/>
+          </a:p>
+        </p:txBody>
+      </p:sp>
+      <p:sp>
+        <p:nvSpPr>
+          <p:cNvPr id="16" name="Shape 14"/>
+          <p:cNvSpPr/>
+          <p:nvPr/>
+        </p:nvSpPr>
+        <p:spPr>
+          <a:xfrm>
+            <a:off x="4480560" y="2180844"/>
+            <a:ext cx="164592" cy="219456"/>
+          </a:xfrm>
+          <a:prstGeom prst="chevron">
+            <a:avLst/>
+          </a:prstGeom>
+          <a:solidFill>
+            <a:srgbClr val="E8A87C"/>
+          </a:solidFill>
+          <a:ln/>
+        </p:spPr>
+      </p:sp>
+      <p:sp>
+        <p:nvSpPr>
+          <p:cNvPr id="17" name="Shape 15"/>
+          <p:cNvSpPr/>
+          <p:nvPr/>
+        </p:nvSpPr>
+        <p:spPr>
+          <a:xfrm>
+            <a:off x="4700016" y="1216152"/>
+            <a:ext cx="1911096" cy="2148840"/>
+          </a:xfrm>
+          <a:prstGeom prst="roundRect">
+            <a:avLst>
+              <a:gd name="adj" fmla="val 2871"/>
+            </a:avLst>
+          </a:prstGeom>
+          <a:solidFill>
+            <a:srgbClr val="F3F4F6"/>
+          </a:solidFill>
+          <a:ln w="10160">
+            <a:solidFill>
+              <a:srgbClr val="D1D5DB"/>
+            </a:solidFill>
+            <a:prstDash val="solid"/>
+          </a:ln>
+        </p:spPr>
+      </p:sp>
+      <p:sp>
+        <p:nvSpPr>
+          <p:cNvPr id="18" name="Shape 16"/>
+          <p:cNvSpPr/>
+          <p:nvPr/>
+        </p:nvSpPr>
+        <p:spPr>
+          <a:xfrm>
+            <a:off x="4809744" y="1335024"/>
+            <a:ext cx="320040" cy="320040"/>
+          </a:xfrm>
+          <a:prstGeom prst="ellipse">
+            <a:avLst/>
+          </a:prstGeom>
+          <a:solidFill>
+            <a:srgbClr val="1E2761"/>
+          </a:solidFill>
+          <a:ln/>
+        </p:spPr>
+      </p:sp>
+      <p:sp>
+        <p:nvSpPr>
+          <p:cNvPr id="19" name="Text 17"/>
+          <p:cNvSpPr/>
+          <p:nvPr/>
+        </p:nvSpPr>
+        <p:spPr>
+          <a:xfrm>
+            <a:off x="4809744" y="1385316"/>
+            <a:ext cx="320040" cy="146304"/>
+          </a:xfrm>
+          <a:prstGeom prst="rect">
+            <a:avLst/>
+          </a:prstGeom>
+          <a:noFill/>
+          <a:ln/>
+        </p:spPr>
+        <p:txBody>
+          <a:bodyPr wrap="square" lIns="0" tIns="0" rIns="0" bIns="0" rtlCol="0" anchor="ctr"/>
+          <a:lstStyle/>
+          <a:p>
+            <a:pPr algn="ctr" indent="0" marL="0">
+              <a:buNone/>
+            </a:pPr>
+            <a:r>
+              <a:rPr lang="en-US" sz="900" b="1" dirty="0">
+                <a:solidFill>
+                  <a:srgbClr val="FFFFFF"/>
+                </a:solidFill>
+                <a:latin typeface="Calibri" pitchFamily="34" charset="0"/>
+                <a:ea typeface="Calibri" pitchFamily="34" charset="-122"/>
+                <a:cs typeface="Calibri" pitchFamily="34" charset="-120"/>
+              </a:rPr>
+              <a:t>3</a:t>
+            </a:r>
+            <a:endParaRPr lang="en-US" sz="900" dirty="0"/>
+          </a:p>
+        </p:txBody>
+      </p:sp>
+      <p:sp>
+        <p:nvSpPr>
+          <p:cNvPr id="20" name="Text 18"/>
+          <p:cNvSpPr/>
+          <p:nvPr/>
+        </p:nvSpPr>
+        <p:spPr>
+          <a:xfrm>
+            <a:off x="5230368" y="1335024"/>
+            <a:ext cx="1252728" cy="310896"/>
+          </a:xfrm>
+          <a:prstGeom prst="rect">
+            <a:avLst/>
+          </a:prstGeom>
+          <a:noFill/>
+          <a:ln/>
+        </p:spPr>
+        <p:txBody>
+          <a:bodyPr wrap="square" lIns="0" tIns="0" rIns="0" bIns="0" rtlCol="0" anchor="ctr">
+            <a:normAutofit/>
+          </a:bodyPr>
+          <a:lstStyle/>
+          <a:p>
+            <a:pPr indent="0" marL="0">
+              <a:buNone/>
+            </a:pPr>
+            <a:r>
+              <a:rPr lang="en-US" sz="1500" b="1" dirty="0">
+                <a:solidFill>
+                  <a:srgbClr val="1E2761"/>
+                </a:solidFill>
+                <a:latin typeface="Calibri" pitchFamily="34" charset="0"/>
+                <a:ea typeface="Calibri" pitchFamily="34" charset="-122"/>
+                <a:cs typeface="Calibri" pitchFamily="34" charset="-120"/>
+              </a:rPr>
+              <a:t>Diagnose</a:t>
+            </a:r>
+            <a:endParaRPr lang="en-US" sz="1500" dirty="0"/>
+          </a:p>
+        </p:txBody>
+      </p:sp>
+      <p:sp>
+        <p:nvSpPr>
+          <p:cNvPr id="21" name="Text 19"/>
+          <p:cNvSpPr/>
+          <p:nvPr/>
+        </p:nvSpPr>
+        <p:spPr>
+          <a:xfrm>
+            <a:off x="4846320" y="1719072"/>
+            <a:ext cx="1618488" cy="1527048"/>
+          </a:xfrm>
+          <a:prstGeom prst="rect">
+            <a:avLst/>
+          </a:prstGeom>
+          <a:noFill/>
+          <a:ln/>
+        </p:spPr>
+        <p:txBody>
+          <a:bodyPr wrap="square" lIns="0" tIns="0" rIns="0" bIns="0" rtlCol="0" anchor="t">
+            <a:normAutofit/>
+          </a:bodyPr>
+          <a:lstStyle/>
+          <a:p>
+            <a:pPr indent="0" marL="0">
+              <a:buNone/>
+            </a:pPr>
+            <a:r>
+              <a:rPr lang="en-US" sz="1150" dirty="0">
                 <a:solidFill>
                   <a:srgbClr val="212121"/>
                 </a:solidFill>
@@ -9090,48 +9543,52 @@
                 <a:ea typeface="Calibri" pitchFamily="34" charset="-122"/>
                 <a:cs typeface="Calibri" pitchFamily="34" charset="-120"/>
               </a:rPr>
-              <a:t>Exact tool names and argument subsets</a:t>
-            </a:r>
-            <a:endParaRPr lang="en-US" sz="1300" dirty="0"/>
-          </a:p>
-          <a:p>
-            <a:pPr marL="342900" indent="-342900">
-              <a:buSzPct val="100000"/>
-              <a:buChar char="•"/>
-            </a:pPr>
-            <a:r>
-              <a:rPr lang="en-US" sz="1300" dirty="0">
-                <a:solidFill>
-                  <a:srgbClr val="212121"/>
-                </a:solidFill>
-                <a:latin typeface="Calibri" pitchFamily="34" charset="0"/>
-                <a:ea typeface="Calibri" pitchFamily="34" charset="-122"/>
-                <a:cs typeface="Calibri" pitchFamily="34" charset="-120"/>
-              </a:rPr>
-              <a:t>Fast inner loop and CI smoke tests</a:t>
-            </a:r>
-            <a:endParaRPr lang="en-US" sz="1300" dirty="0"/>
-          </a:p>
-        </p:txBody>
-      </p:sp>
-      <p:sp>
-        <p:nvSpPr>
-          <p:cNvPr id="8" name="Shape 6"/>
-          <p:cNvSpPr/>
-          <p:nvPr/>
-        </p:nvSpPr>
-        <p:spPr>
-          <a:xfrm>
-            <a:off x="4663440" y="1078992"/>
-            <a:ext cx="4114800" cy="3493008"/>
+              <a:t>Inspect descriptions, instructions, and context</a:t>
+            </a:r>
+            <a:endParaRPr lang="en-US" sz="1150" dirty="0"/>
+          </a:p>
+        </p:txBody>
+      </p:sp>
+      <p:sp>
+        <p:nvSpPr>
+          <p:cNvPr id="22" name="Shape 20"/>
+          <p:cNvSpPr/>
+          <p:nvPr/>
+        </p:nvSpPr>
+        <p:spPr>
+          <a:xfrm>
+            <a:off x="6647688" y="2180844"/>
+            <a:ext cx="164592" cy="219456"/>
+          </a:xfrm>
+          <a:prstGeom prst="chevron">
+            <a:avLst/>
+          </a:prstGeom>
+          <a:solidFill>
+            <a:srgbClr val="E8A87C"/>
+          </a:solidFill>
+          <a:ln/>
+        </p:spPr>
+      </p:sp>
+      <p:sp>
+        <p:nvSpPr>
+          <p:cNvPr id="23" name="Shape 21"/>
+          <p:cNvSpPr/>
+          <p:nvPr/>
+        </p:nvSpPr>
+        <p:spPr>
+          <a:xfrm>
+            <a:off x="6867144" y="1216152"/>
+            <a:ext cx="1911096" cy="2148840"/>
           </a:xfrm>
           <a:prstGeom prst="roundRect">
-            <a:avLst/>
+            <a:avLst>
+              <a:gd name="adj" fmla="val 2871"/>
+            </a:avLst>
           </a:prstGeom>
           <a:solidFill>
             <a:srgbClr val="CADCFC"/>
           </a:solidFill>
-          <a:ln w="11430">
+          <a:ln w="10160">
             <a:solidFill>
               <a:srgbClr val="1E2761"/>
             </a:solidFill>
@@ -9141,14 +9598,73 @@
       </p:sp>
       <p:sp>
         <p:nvSpPr>
-          <p:cNvPr id="9" name="Text 7"/>
-          <p:cNvSpPr/>
-          <p:nvPr/>
-        </p:nvSpPr>
-        <p:spPr>
-          <a:xfrm>
-            <a:off x="4864608" y="1298448"/>
-            <a:ext cx="3712464" cy="411480"/>
+          <p:cNvPr id="24" name="Shape 22"/>
+          <p:cNvSpPr/>
+          <p:nvPr/>
+        </p:nvSpPr>
+        <p:spPr>
+          <a:xfrm>
+            <a:off x="6976872" y="1335024"/>
+            <a:ext cx="320040" cy="320040"/>
+          </a:xfrm>
+          <a:prstGeom prst="ellipse">
+            <a:avLst/>
+          </a:prstGeom>
+          <a:solidFill>
+            <a:srgbClr val="1E2761"/>
+          </a:solidFill>
+          <a:ln/>
+        </p:spPr>
+      </p:sp>
+      <p:sp>
+        <p:nvSpPr>
+          <p:cNvPr id="25" name="Text 23"/>
+          <p:cNvSpPr/>
+          <p:nvPr/>
+        </p:nvSpPr>
+        <p:spPr>
+          <a:xfrm>
+            <a:off x="6976872" y="1385316"/>
+            <a:ext cx="320040" cy="146304"/>
+          </a:xfrm>
+          <a:prstGeom prst="rect">
+            <a:avLst/>
+          </a:prstGeom>
+          <a:noFill/>
+          <a:ln/>
+        </p:spPr>
+        <p:txBody>
+          <a:bodyPr wrap="square" lIns="0" tIns="0" rIns="0" bIns="0" rtlCol="0" anchor="ctr"/>
+          <a:lstStyle/>
+          <a:p>
+            <a:pPr algn="ctr" indent="0" marL="0">
+              <a:buNone/>
+            </a:pPr>
+            <a:r>
+              <a:rPr lang="en-US" sz="900" b="1" dirty="0">
+                <a:solidFill>
+                  <a:srgbClr val="FFFFFF"/>
+                </a:solidFill>
+                <a:latin typeface="Calibri" pitchFamily="34" charset="0"/>
+                <a:ea typeface="Calibri" pitchFamily="34" charset="-122"/>
+                <a:cs typeface="Calibri" pitchFamily="34" charset="-120"/>
+              </a:rPr>
+              <a:t>4</a:t>
+            </a:r>
+            <a:endParaRPr lang="en-US" sz="900" dirty="0"/>
+          </a:p>
+        </p:txBody>
+      </p:sp>
+      <p:sp>
+        <p:nvSpPr>
+          <p:cNvPr id="26" name="Text 24"/>
+          <p:cNvSpPr/>
+          <p:nvPr/>
+        </p:nvSpPr>
+        <p:spPr>
+          <a:xfrm>
+            <a:off x="7397496" y="1335024"/>
+            <a:ext cx="1252728" cy="310896"/>
           </a:xfrm>
           <a:prstGeom prst="rect">
             <a:avLst/>
@@ -9166,7 +9682,7 @@
               <a:buNone/>
             </a:pPr>
             <a:r>
-              <a:rPr lang="en-US" sz="2000" b="1" dirty="0">
+              <a:rPr lang="en-US" sz="1500" b="1" dirty="0">
                 <a:solidFill>
                   <a:srgbClr val="1E2761"/>
                 </a:solidFill>
@@ -9174,41 +9690,40 @@
                 <a:ea typeface="Calibri" pitchFamily="34" charset="-122"/>
                 <a:cs typeface="Calibri" pitchFamily="34" charset="-120"/>
               </a:rPr>
-              <a:t>FoundryEvals</a:t>
-            </a:r>
-            <a:endParaRPr lang="en-US" sz="2000" dirty="0"/>
-          </a:p>
-        </p:txBody>
-      </p:sp>
-      <p:sp>
-        <p:nvSpPr>
-          <p:cNvPr id="10" name="Text 8"/>
-          <p:cNvSpPr/>
-          <p:nvPr/>
-        </p:nvSpPr>
-        <p:spPr>
-          <a:xfrm>
-            <a:off x="4892040" y="1828800"/>
-            <a:ext cx="3639312" cy="2395728"/>
-          </a:xfrm>
-          <a:prstGeom prst="rect">
-            <a:avLst/>
-          </a:prstGeom>
-          <a:noFill/>
-          <a:ln/>
-        </p:spPr>
-        <p:txBody>
-          <a:bodyPr wrap="square" lIns="381" tIns="381" rIns="381" bIns="381" rtlCol="0" anchor="ctr">
+              <a:t>Set criteria</a:t>
+            </a:r>
+            <a:endParaRPr lang="en-US" sz="1500" dirty="0"/>
+          </a:p>
+        </p:txBody>
+      </p:sp>
+      <p:sp>
+        <p:nvSpPr>
+          <p:cNvPr id="27" name="Text 25"/>
+          <p:cNvSpPr/>
+          <p:nvPr/>
+        </p:nvSpPr>
+        <p:spPr>
+          <a:xfrm>
+            <a:off x="7013448" y="1719072"/>
+            <a:ext cx="1618488" cy="1527048"/>
+          </a:xfrm>
+          <a:prstGeom prst="rect">
+            <a:avLst/>
+          </a:prstGeom>
+          <a:noFill/>
+          <a:ln/>
+        </p:spPr>
+        <p:txBody>
+          <a:bodyPr wrap="square" lIns="0" tIns="0" rIns="0" bIns="0" rtlCol="0" anchor="t">
             <a:normAutofit/>
           </a:bodyPr>
           <a:lstStyle/>
           <a:p>
-            <a:pPr marL="342900" indent="-342900">
-              <a:buSzPct val="100000"/>
-              <a:buChar char="•"/>
-            </a:pPr>
-            <a:r>
-              <a:rPr lang="en-US" sz="1300" dirty="0">
+            <a:pPr indent="0" marL="0">
+              <a:buNone/>
+            </a:pPr>
+            <a:r>
+              <a:rPr lang="en-US" sz="1150" dirty="0">
                 <a:solidFill>
                   <a:srgbClr val="212121"/>
                 </a:solidFill>
@@ -9216,51 +9731,15 @@
                 <a:ea typeface="Calibri" pitchFamily="34" charset="-122"/>
                 <a:cs typeface="Calibri" pitchFamily="34" charset="-120"/>
               </a:rPr>
-              <a:t>Cloud-based evaluation service</a:t>
-            </a:r>
-            <a:endParaRPr lang="en-US" sz="1300" dirty="0"/>
-          </a:p>
-          <a:p>
-            <a:pPr marL="342900" indent="-342900">
-              <a:buSzPct val="100000"/>
-              <a:buChar char="•"/>
-            </a:pPr>
-            <a:r>
-              <a:rPr lang="en-US" sz="1300" dirty="0">
-                <a:solidFill>
-                  <a:srgbClr val="212121"/>
-                </a:solidFill>
-                <a:latin typeface="Calibri" pitchFamily="34" charset="0"/>
-                <a:ea typeface="Calibri" pitchFamily="34" charset="-122"/>
-                <a:cs typeface="Calibri" pitchFamily="34" charset="-120"/>
-              </a:rPr>
-              <a:t>LLM-as-judge quality and agent behavior</a:t>
-            </a:r>
-            <a:endParaRPr lang="en-US" sz="1300" dirty="0"/>
-          </a:p>
-          <a:p>
-            <a:pPr marL="342900" indent="-342900">
-              <a:buSzPct val="100000"/>
-              <a:buChar char="•"/>
-            </a:pPr>
-            <a:r>
-              <a:rPr lang="en-US" sz="1300" dirty="0">
-                <a:solidFill>
-                  <a:srgbClr val="212121"/>
-                </a:solidFill>
-                <a:latin typeface="Calibri" pitchFamily="34" charset="0"/>
-                <a:ea typeface="Calibri" pitchFamily="34" charset="-122"/>
-                <a:cs typeface="Calibri" pitchFamily="34" charset="-120"/>
-              </a:rPr>
-              <a:t>Portal dashboards and comparisons</a:t>
-            </a:r>
-            <a:endParaRPr lang="en-US" sz="1300" dirty="0"/>
-          </a:p>
-        </p:txBody>
-      </p:sp>
-      <p:sp>
-        <p:nvSpPr>
-          <p:cNvPr id="11" name="Shape 9"/>
+              <a:t>Based on your scenario and risk, not an arbitrary universal threshold</a:t>
+            </a:r>
+            <a:endParaRPr lang="en-US" sz="1150" dirty="0"/>
+          </a:p>
+        </p:txBody>
+      </p:sp>
+      <p:sp>
+        <p:nvSpPr>
+          <p:cNvPr id="28" name="Shape 26"/>
           <p:cNvSpPr/>
           <p:nvPr/>
         </p:nvSpPr>
@@ -9283,7 +9762,7 @@
       </p:sp>
       <p:sp>
         <p:nvSpPr>
-          <p:cNvPr id="12" name="Text 10"/>
+          <p:cNvPr id="29" name="Text 27"/>
           <p:cNvSpPr/>
           <p:nvPr/>
         </p:nvSpPr>
@@ -9316,7 +9795,7 @@
                 <a:ea typeface="Calibri" pitchFamily="34" charset="-122"/>
                 <a:cs typeface="Calibri" pitchFamily="34" charset="-120"/>
               </a:rPr>
-              <a:t>Source: https://learn.microsoft.com/en-us/agent-framework/agents/evaluation?tabs=python  ·  +1 in notes</a:t>
+              <a:t>Source: https://learn.microsoft.com/en-us/agent-framework/agents/evaluation?tabs=python</a:t>
             </a:r>
             <a:endParaRPr lang="en-US" sz="820" dirty="0"/>
           </a:p>
@@ -9442,7 +9921,7 @@
               <a:buNone/>
             </a:pPr>
             <a:r>
-              <a:rPr lang="en-US" sz="2500" b="1" dirty="0">
+              <a:rPr lang="en-US" sz="2300" b="1" dirty="0">
                 <a:solidFill>
                   <a:srgbClr val="1E2761"/>
                 </a:solidFill>
@@ -9450,9 +9929,9 @@
                 <a:ea typeface="Calibri" pitchFamily="34" charset="-122"/>
                 <a:cs typeface="Calibri" pitchFamily="34" charset="-120"/>
               </a:rPr>
-              <a:t>Choose Foundry evaluators for tool behavior</a:t>
-            </a:r>
-            <a:endParaRPr lang="en-US" sz="2500" dirty="0"/>
+              <a:t>Local checks and Foundry evaluators complement each other</a:t>
+            </a:r>
+            <a:endParaRPr lang="en-US" sz="2300" dirty="0"/>
           </a:p>
         </p:txBody>
       </p:sp>
@@ -9465,17 +9944,159 @@
         <p:spPr>
           <a:xfrm>
             <a:off x="365760" y="1078992"/>
-            <a:ext cx="2670048" cy="1655064"/>
+            <a:ext cx="4114800" cy="3493008"/>
           </a:xfrm>
           <a:prstGeom prst="roundRect">
-            <a:avLst>
-              <a:gd name="adj" fmla="val 3315"/>
-            </a:avLst>
+            <a:avLst/>
+          </a:prstGeom>
+          <a:solidFill>
+            <a:srgbClr val="F3F4F6"/>
+          </a:solidFill>
+          <a:ln w="11430">
+            <a:solidFill>
+              <a:srgbClr val="D1D5DB"/>
+            </a:solidFill>
+            <a:prstDash val="solid"/>
+          </a:ln>
+        </p:spPr>
+      </p:sp>
+      <p:sp>
+        <p:nvSpPr>
+          <p:cNvPr id="6" name="Text 4"/>
+          <p:cNvSpPr/>
+          <p:nvPr/>
+        </p:nvSpPr>
+        <p:spPr>
+          <a:xfrm>
+            <a:off x="566928" y="1298448"/>
+            <a:ext cx="3712464" cy="411480"/>
+          </a:xfrm>
+          <a:prstGeom prst="rect">
+            <a:avLst/>
+          </a:prstGeom>
+          <a:noFill/>
+          <a:ln/>
+        </p:spPr>
+        <p:txBody>
+          <a:bodyPr wrap="square" lIns="0" tIns="0" rIns="0" bIns="0" rtlCol="0" anchor="ctr">
+            <a:normAutofit/>
+          </a:bodyPr>
+          <a:lstStyle/>
+          <a:p>
+            <a:pPr indent="0" marL="0">
+              <a:buNone/>
+            </a:pPr>
+            <a:r>
+              <a:rPr lang="en-US" sz="2000" b="1" dirty="0">
+                <a:solidFill>
+                  <a:srgbClr val="1E2761"/>
+                </a:solidFill>
+                <a:latin typeface="Calibri" pitchFamily="34" charset="0"/>
+                <a:ea typeface="Calibri" pitchFamily="34" charset="-122"/>
+                <a:cs typeface="Calibri" pitchFamily="34" charset="-120"/>
+              </a:rPr>
+              <a:t>LocalEvaluator</a:t>
+            </a:r>
+            <a:endParaRPr lang="en-US" sz="2000" dirty="0"/>
+          </a:p>
+        </p:txBody>
+      </p:sp>
+      <p:sp>
+        <p:nvSpPr>
+          <p:cNvPr id="7" name="Text 5"/>
+          <p:cNvSpPr/>
+          <p:nvPr/>
+        </p:nvSpPr>
+        <p:spPr>
+          <a:xfrm>
+            <a:off x="594360" y="1828800"/>
+            <a:ext cx="3639312" cy="2395728"/>
+          </a:xfrm>
+          <a:prstGeom prst="rect">
+            <a:avLst/>
+          </a:prstGeom>
+          <a:noFill/>
+          <a:ln/>
+        </p:spPr>
+        <p:txBody>
+          <a:bodyPr wrap="square" lIns="381" tIns="381" rIns="381" bIns="381" rtlCol="0" anchor="ctr">
+            <a:normAutofit/>
+          </a:bodyPr>
+          <a:lstStyle/>
+          <a:p>
+            <a:pPr marL="342900" indent="-342900">
+              <a:buSzPct val="100000"/>
+              <a:buChar char="•"/>
+            </a:pPr>
+            <a:r>
+              <a:rPr lang="en-US" sz="1300" dirty="0">
+                <a:solidFill>
+                  <a:srgbClr val="212121"/>
+                </a:solidFill>
+                <a:latin typeface="Calibri" pitchFamily="34" charset="0"/>
+                <a:ea typeface="Calibri" pitchFamily="34" charset="-122"/>
+                <a:cs typeface="Calibri" pitchFamily="34" charset="-120"/>
+              </a:rPr>
+              <a:t>No evaluator API call</a:t>
+            </a:r>
+            <a:endParaRPr lang="en-US" sz="1300" dirty="0"/>
+          </a:p>
+          <a:p>
+            <a:pPr marL="342900" indent="-342900">
+              <a:buSzPct val="100000"/>
+              <a:buChar char="•"/>
+            </a:pPr>
+            <a:r>
+              <a:rPr lang="en-US" sz="1300" dirty="0">
+                <a:solidFill>
+                  <a:srgbClr val="212121"/>
+                </a:solidFill>
+                <a:latin typeface="Calibri" pitchFamily="34" charset="0"/>
+                <a:ea typeface="Calibri" pitchFamily="34" charset="-122"/>
+                <a:cs typeface="Calibri" pitchFamily="34" charset="-120"/>
+              </a:rPr>
+              <a:t>Exact tool names and argument subsets</a:t>
+            </a:r>
+            <a:endParaRPr lang="en-US" sz="1300" dirty="0"/>
+          </a:p>
+          <a:p>
+            <a:pPr marL="342900" indent="-342900">
+              <a:buSzPct val="100000"/>
+              <a:buChar char="•"/>
+            </a:pPr>
+            <a:r>
+              <a:rPr lang="en-US" sz="1300" dirty="0">
+                <a:solidFill>
+                  <a:srgbClr val="212121"/>
+                </a:solidFill>
+                <a:latin typeface="Calibri" pitchFamily="34" charset="0"/>
+                <a:ea typeface="Calibri" pitchFamily="34" charset="-122"/>
+                <a:cs typeface="Calibri" pitchFamily="34" charset="-120"/>
+              </a:rPr>
+              <a:t>Fast inner loop and CI smoke tests</a:t>
+            </a:r>
+            <a:endParaRPr lang="en-US" sz="1300" dirty="0"/>
+          </a:p>
+        </p:txBody>
+      </p:sp>
+      <p:sp>
+        <p:nvSpPr>
+          <p:cNvPr id="8" name="Shape 6"/>
+          <p:cNvSpPr/>
+          <p:nvPr/>
+        </p:nvSpPr>
+        <p:spPr>
+          <a:xfrm>
+            <a:off x="4663440" y="1078992"/>
+            <a:ext cx="4114800" cy="3493008"/>
+          </a:xfrm>
+          <a:prstGeom prst="roundRect">
+            <a:avLst/>
           </a:prstGeom>
           <a:solidFill>
             <a:srgbClr val="CADCFC"/>
           </a:solidFill>
-          <a:ln w="10160">
+          <a:ln w="11430">
             <a:solidFill>
               <a:srgbClr val="1E2761"/>
             </a:solidFill>
@@ -9485,14 +10106,14 @@
       </p:sp>
       <p:sp>
         <p:nvSpPr>
-          <p:cNvPr id="6" name="Text 4"/>
-          <p:cNvSpPr/>
-          <p:nvPr/>
-        </p:nvSpPr>
-        <p:spPr>
-          <a:xfrm>
-            <a:off x="512064" y="1197864"/>
-            <a:ext cx="2377440" cy="310896"/>
+          <p:cNvPr id="9" name="Text 7"/>
+          <p:cNvSpPr/>
+          <p:nvPr/>
+        </p:nvSpPr>
+        <p:spPr>
+          <a:xfrm>
+            <a:off x="4864608" y="1298448"/>
+            <a:ext cx="3712464" cy="411480"/>
           </a:xfrm>
           <a:prstGeom prst="rect">
             <a:avLst/>
@@ -9510,7 +10131,7 @@
               <a:buNone/>
             </a:pPr>
             <a:r>
-              <a:rPr lang="en-US" sz="1500" b="1" dirty="0">
+              <a:rPr lang="en-US" sz="2000" b="1" dirty="0">
                 <a:solidFill>
                   <a:srgbClr val="1E2761"/>
                 </a:solidFill>
@@ -9518,40 +10139,41 @@
                 <a:ea typeface="Calibri" pitchFamily="34" charset="-122"/>
                 <a:cs typeface="Calibri" pitchFamily="34" charset="-120"/>
               </a:rPr>
-              <a:t>tool_call_accuracy</a:t>
-            </a:r>
-            <a:endParaRPr lang="en-US" sz="1500" dirty="0"/>
-          </a:p>
-        </p:txBody>
-      </p:sp>
-      <p:sp>
-        <p:nvSpPr>
-          <p:cNvPr id="7" name="Text 5"/>
-          <p:cNvSpPr/>
-          <p:nvPr/>
-        </p:nvSpPr>
-        <p:spPr>
-          <a:xfrm>
-            <a:off x="512064" y="1581912"/>
-            <a:ext cx="2377440" cy="1033272"/>
-          </a:xfrm>
-          <a:prstGeom prst="rect">
-            <a:avLst/>
-          </a:prstGeom>
-          <a:noFill/>
-          <a:ln/>
-        </p:spPr>
-        <p:txBody>
-          <a:bodyPr wrap="square" lIns="0" tIns="0" rIns="0" bIns="0" rtlCol="0" anchor="t">
+              <a:t>FoundryEvals</a:t>
+            </a:r>
+            <a:endParaRPr lang="en-US" sz="2000" dirty="0"/>
+          </a:p>
+        </p:txBody>
+      </p:sp>
+      <p:sp>
+        <p:nvSpPr>
+          <p:cNvPr id="10" name="Text 8"/>
+          <p:cNvSpPr/>
+          <p:nvPr/>
+        </p:nvSpPr>
+        <p:spPr>
+          <a:xfrm>
+            <a:off x="4892040" y="1828800"/>
+            <a:ext cx="3639312" cy="2395728"/>
+          </a:xfrm>
+          <a:prstGeom prst="rect">
+            <a:avLst/>
+          </a:prstGeom>
+          <a:noFill/>
+          <a:ln/>
+        </p:spPr>
+        <p:txBody>
+          <a:bodyPr wrap="square" lIns="381" tIns="381" rIns="381" bIns="381" rtlCol="0" anchor="ctr">
             <a:normAutofit/>
           </a:bodyPr>
           <a:lstStyle/>
           <a:p>
-            <a:pPr indent="0" marL="0">
-              <a:buNone/>
-            </a:pPr>
-            <a:r>
-              <a:rPr lang="en-US" sz="1150" dirty="0">
+            <a:pPr marL="342900" indent="-342900">
+              <a:buSzPct val="100000"/>
+              <a:buChar char="•"/>
+            </a:pPr>
+            <a:r>
+              <a:rPr lang="en-US" sz="1300" dirty="0">
                 <a:solidFill>
                   <a:srgbClr val="212121"/>
                 </a:solidFill>
@@ -9559,108 +10181,17 @@
                 <a:ea typeface="Calibri" pitchFamily="34" charset="-122"/>
                 <a:cs typeface="Calibri" pitchFamily="34" charset="-120"/>
               </a:rPr>
-              <a:t>Overall correctness of tool calls</a:t>
-            </a:r>
-            <a:endParaRPr lang="en-US" sz="1150" dirty="0"/>
-          </a:p>
-        </p:txBody>
-      </p:sp>
-      <p:sp>
-        <p:nvSpPr>
-          <p:cNvPr id="8" name="Shape 6"/>
-          <p:cNvSpPr/>
-          <p:nvPr/>
-        </p:nvSpPr>
-        <p:spPr>
-          <a:xfrm>
-            <a:off x="3236976" y="1078992"/>
-            <a:ext cx="2670048" cy="1655064"/>
-          </a:xfrm>
-          <a:prstGeom prst="roundRect">
-            <a:avLst>
-              <a:gd name="adj" fmla="val 3315"/>
-            </a:avLst>
-          </a:prstGeom>
-          <a:solidFill>
-            <a:srgbClr val="F3F4F6"/>
-          </a:solidFill>
-          <a:ln w="10160">
-            <a:solidFill>
-              <a:srgbClr val="D1D5DB"/>
-            </a:solidFill>
-            <a:prstDash val="solid"/>
-          </a:ln>
-        </p:spPr>
-      </p:sp>
-      <p:sp>
-        <p:nvSpPr>
-          <p:cNvPr id="9" name="Text 7"/>
-          <p:cNvSpPr/>
-          <p:nvPr/>
-        </p:nvSpPr>
-        <p:spPr>
-          <a:xfrm>
-            <a:off x="3383280" y="1197864"/>
-            <a:ext cx="2377440" cy="310896"/>
-          </a:xfrm>
-          <a:prstGeom prst="rect">
-            <a:avLst/>
-          </a:prstGeom>
-          <a:noFill/>
-          <a:ln/>
-        </p:spPr>
-        <p:txBody>
-          <a:bodyPr wrap="square" lIns="0" tIns="0" rIns="0" bIns="0" rtlCol="0" anchor="ctr">
-            <a:normAutofit/>
-          </a:bodyPr>
-          <a:lstStyle/>
-          <a:p>
-            <a:pPr indent="0" marL="0">
-              <a:buNone/>
-            </a:pPr>
-            <a:r>
-              <a:rPr lang="en-US" sz="1500" b="1" dirty="0">
-                <a:solidFill>
-                  <a:srgbClr val="1E2761"/>
-                </a:solidFill>
-                <a:latin typeface="Calibri" pitchFamily="34" charset="0"/>
-                <a:ea typeface="Calibri" pitchFamily="34" charset="-122"/>
-                <a:cs typeface="Calibri" pitchFamily="34" charset="-120"/>
-              </a:rPr>
-              <a:t>tool_selection</a:t>
-            </a:r>
-            <a:endParaRPr lang="en-US" sz="1500" dirty="0"/>
-          </a:p>
-        </p:txBody>
-      </p:sp>
-      <p:sp>
-        <p:nvSpPr>
-          <p:cNvPr id="10" name="Text 8"/>
-          <p:cNvSpPr/>
-          <p:nvPr/>
-        </p:nvSpPr>
-        <p:spPr>
-          <a:xfrm>
-            <a:off x="3383280" y="1581912"/>
-            <a:ext cx="2377440" cy="1033272"/>
-          </a:xfrm>
-          <a:prstGeom prst="rect">
-            <a:avLst/>
-          </a:prstGeom>
-          <a:noFill/>
-          <a:ln/>
-        </p:spPr>
-        <p:txBody>
-          <a:bodyPr wrap="square" lIns="0" tIns="0" rIns="0" bIns="0" rtlCol="0" anchor="t">
-            <a:normAutofit/>
-          </a:bodyPr>
-          <a:lstStyle/>
-          <a:p>
-            <a:pPr indent="0" marL="0">
-              <a:buNone/>
-            </a:pPr>
-            <a:r>
-              <a:rPr lang="en-US" sz="1150" dirty="0">
+              <a:t>Cloud-based evaluation service</a:t>
+            </a:r>
+            <a:endParaRPr lang="en-US" sz="1300" dirty="0"/>
+          </a:p>
+          <a:p>
+            <a:pPr marL="342900" indent="-342900">
+              <a:buSzPct val="100000"/>
+              <a:buChar char="•"/>
+            </a:pPr>
+            <a:r>
+              <a:rPr lang="en-US" sz="1300" dirty="0">
                 <a:solidFill>
                   <a:srgbClr val="212121"/>
                 </a:solidFill>
@@ -9668,451 +10199,33 @@
                 <a:ea typeface="Calibri" pitchFamily="34" charset="-122"/>
                 <a:cs typeface="Calibri" pitchFamily="34" charset="-120"/>
               </a:rPr>
-              <a:t>Whether the right tool was chosen</a:t>
-            </a:r>
-            <a:endParaRPr lang="en-US" sz="1150" dirty="0"/>
+              <a:t>LLM-as-judge quality and agent behavior</a:t>
+            </a:r>
+            <a:endParaRPr lang="en-US" sz="1300" dirty="0"/>
+          </a:p>
+          <a:p>
+            <a:pPr marL="342900" indent="-342900">
+              <a:buSzPct val="100000"/>
+              <a:buChar char="•"/>
+            </a:pPr>
+            <a:r>
+              <a:rPr lang="en-US" sz="1300" dirty="0">
+                <a:solidFill>
+                  <a:srgbClr val="212121"/>
+                </a:solidFill>
+                <a:latin typeface="Calibri" pitchFamily="34" charset="0"/>
+                <a:ea typeface="Calibri" pitchFamily="34" charset="-122"/>
+                <a:cs typeface="Calibri" pitchFamily="34" charset="-120"/>
+              </a:rPr>
+              <a:t>Portal dashboards and comparisons</a:t>
+            </a:r>
+            <a:endParaRPr lang="en-US" sz="1300" dirty="0"/>
           </a:p>
         </p:txBody>
       </p:sp>
       <p:sp>
         <p:nvSpPr>
           <p:cNvPr id="11" name="Shape 9"/>
-          <p:cNvSpPr/>
-          <p:nvPr/>
-        </p:nvSpPr>
-        <p:spPr>
-          <a:xfrm>
-            <a:off x="6108192" y="1078992"/>
-            <a:ext cx="2670048" cy="1655064"/>
-          </a:xfrm>
-          <a:prstGeom prst="roundRect">
-            <a:avLst>
-              <a:gd name="adj" fmla="val 3315"/>
-            </a:avLst>
-          </a:prstGeom>
-          <a:solidFill>
-            <a:srgbClr val="F3F4F6"/>
-          </a:solidFill>
-          <a:ln w="10160">
-            <a:solidFill>
-              <a:srgbClr val="D1D5DB"/>
-            </a:solidFill>
-            <a:prstDash val="solid"/>
-          </a:ln>
-        </p:spPr>
-      </p:sp>
-      <p:sp>
-        <p:nvSpPr>
-          <p:cNvPr id="12" name="Text 10"/>
-          <p:cNvSpPr/>
-          <p:nvPr/>
-        </p:nvSpPr>
-        <p:spPr>
-          <a:xfrm>
-            <a:off x="6254496" y="1197864"/>
-            <a:ext cx="2377440" cy="310896"/>
-          </a:xfrm>
-          <a:prstGeom prst="rect">
-            <a:avLst/>
-          </a:prstGeom>
-          <a:noFill/>
-          <a:ln/>
-        </p:spPr>
-        <p:txBody>
-          <a:bodyPr wrap="square" lIns="0" tIns="0" rIns="0" bIns="0" rtlCol="0" anchor="ctr">
-            <a:normAutofit/>
-          </a:bodyPr>
-          <a:lstStyle/>
-          <a:p>
-            <a:pPr indent="0" marL="0">
-              <a:buNone/>
-            </a:pPr>
-            <a:r>
-              <a:rPr lang="en-US" sz="1500" b="1" dirty="0">
-                <a:solidFill>
-                  <a:srgbClr val="1E2761"/>
-                </a:solidFill>
-                <a:latin typeface="Calibri" pitchFamily="34" charset="0"/>
-                <a:ea typeface="Calibri" pitchFamily="34" charset="-122"/>
-                <a:cs typeface="Calibri" pitchFamily="34" charset="-120"/>
-              </a:rPr>
-              <a:t>tool_input_accuracy</a:t>
-            </a:r>
-            <a:endParaRPr lang="en-US" sz="1500" dirty="0"/>
-          </a:p>
-        </p:txBody>
-      </p:sp>
-      <p:sp>
-        <p:nvSpPr>
-          <p:cNvPr id="13" name="Text 11"/>
-          <p:cNvSpPr/>
-          <p:nvPr/>
-        </p:nvSpPr>
-        <p:spPr>
-          <a:xfrm>
-            <a:off x="6254496" y="1581912"/>
-            <a:ext cx="2377440" cy="1033272"/>
-          </a:xfrm>
-          <a:prstGeom prst="rect">
-            <a:avLst/>
-          </a:prstGeom>
-          <a:noFill/>
-          <a:ln/>
-        </p:spPr>
-        <p:txBody>
-          <a:bodyPr wrap="square" lIns="0" tIns="0" rIns="0" bIns="0" rtlCol="0" anchor="t">
-            <a:normAutofit/>
-          </a:bodyPr>
-          <a:lstStyle/>
-          <a:p>
-            <a:pPr indent="0" marL="0">
-              <a:buNone/>
-            </a:pPr>
-            <a:r>
-              <a:rPr lang="en-US" sz="1150" dirty="0">
-                <a:solidFill>
-                  <a:srgbClr val="212121"/>
-                </a:solidFill>
-                <a:latin typeface="Calibri" pitchFamily="34" charset="0"/>
-                <a:ea typeface="Calibri" pitchFamily="34" charset="-122"/>
-                <a:cs typeface="Calibri" pitchFamily="34" charset="-120"/>
-              </a:rPr>
-              <a:t>Whether arguments were appropriate</a:t>
-            </a:r>
-            <a:endParaRPr lang="en-US" sz="1150" dirty="0"/>
-          </a:p>
-        </p:txBody>
-      </p:sp>
-      <p:sp>
-        <p:nvSpPr>
-          <p:cNvPr id="14" name="Shape 12"/>
-          <p:cNvSpPr/>
-          <p:nvPr/>
-        </p:nvSpPr>
-        <p:spPr>
-          <a:xfrm>
-            <a:off x="365760" y="2935224"/>
-            <a:ext cx="2670048" cy="1655064"/>
-          </a:xfrm>
-          <a:prstGeom prst="roundRect">
-            <a:avLst>
-              <a:gd name="adj" fmla="val 3315"/>
-            </a:avLst>
-          </a:prstGeom>
-          <a:solidFill>
-            <a:srgbClr val="F3F4F6"/>
-          </a:solidFill>
-          <a:ln w="10160">
-            <a:solidFill>
-              <a:srgbClr val="D1D5DB"/>
-            </a:solidFill>
-            <a:prstDash val="solid"/>
-          </a:ln>
-        </p:spPr>
-      </p:sp>
-      <p:sp>
-        <p:nvSpPr>
-          <p:cNvPr id="15" name="Text 13"/>
-          <p:cNvSpPr/>
-          <p:nvPr/>
-        </p:nvSpPr>
-        <p:spPr>
-          <a:xfrm>
-            <a:off x="512064" y="3054096"/>
-            <a:ext cx="2377440" cy="310896"/>
-          </a:xfrm>
-          <a:prstGeom prst="rect">
-            <a:avLst/>
-          </a:prstGeom>
-          <a:noFill/>
-          <a:ln/>
-        </p:spPr>
-        <p:txBody>
-          <a:bodyPr wrap="square" lIns="0" tIns="0" rIns="0" bIns="0" rtlCol="0" anchor="ctr">
-            <a:normAutofit/>
-          </a:bodyPr>
-          <a:lstStyle/>
-          <a:p>
-            <a:pPr indent="0" marL="0">
-              <a:buNone/>
-            </a:pPr>
-            <a:r>
-              <a:rPr lang="en-US" sz="1500" b="1" dirty="0">
-                <a:solidFill>
-                  <a:srgbClr val="1E2761"/>
-                </a:solidFill>
-                <a:latin typeface="Calibri" pitchFamily="34" charset="0"/>
-                <a:ea typeface="Calibri" pitchFamily="34" charset="-122"/>
-                <a:cs typeface="Calibri" pitchFamily="34" charset="-120"/>
-              </a:rPr>
-              <a:t>tool_output_utilization</a:t>
-            </a:r>
-            <a:endParaRPr lang="en-US" sz="1500" dirty="0"/>
-          </a:p>
-        </p:txBody>
-      </p:sp>
-      <p:sp>
-        <p:nvSpPr>
-          <p:cNvPr id="16" name="Text 14"/>
-          <p:cNvSpPr/>
-          <p:nvPr/>
-        </p:nvSpPr>
-        <p:spPr>
-          <a:xfrm>
-            <a:off x="512064" y="3438144"/>
-            <a:ext cx="2377440" cy="1033272"/>
-          </a:xfrm>
-          <a:prstGeom prst="rect">
-            <a:avLst/>
-          </a:prstGeom>
-          <a:noFill/>
-          <a:ln/>
-        </p:spPr>
-        <p:txBody>
-          <a:bodyPr wrap="square" lIns="0" tIns="0" rIns="0" bIns="0" rtlCol="0" anchor="t">
-            <a:normAutofit/>
-          </a:bodyPr>
-          <a:lstStyle/>
-          <a:p>
-            <a:pPr indent="0" marL="0">
-              <a:buNone/>
-            </a:pPr>
-            <a:r>
-              <a:rPr lang="en-US" sz="1150" dirty="0">
-                <a:solidFill>
-                  <a:srgbClr val="212121"/>
-                </a:solidFill>
-                <a:latin typeface="Calibri" pitchFamily="34" charset="0"/>
-                <a:ea typeface="Calibri" pitchFamily="34" charset="-122"/>
-                <a:cs typeface="Calibri" pitchFamily="34" charset="-120"/>
-              </a:rPr>
-              <a:t>Whether the response used the result</a:t>
-            </a:r>
-            <a:endParaRPr lang="en-US" sz="1150" dirty="0"/>
-          </a:p>
-        </p:txBody>
-      </p:sp>
-      <p:sp>
-        <p:nvSpPr>
-          <p:cNvPr id="17" name="Shape 15"/>
-          <p:cNvSpPr/>
-          <p:nvPr/>
-        </p:nvSpPr>
-        <p:spPr>
-          <a:xfrm>
-            <a:off x="3236976" y="2935224"/>
-            <a:ext cx="2670048" cy="1655064"/>
-          </a:xfrm>
-          <a:prstGeom prst="roundRect">
-            <a:avLst>
-              <a:gd name="adj" fmla="val 3315"/>
-            </a:avLst>
-          </a:prstGeom>
-          <a:solidFill>
-            <a:srgbClr val="F3F4F6"/>
-          </a:solidFill>
-          <a:ln w="10160">
-            <a:solidFill>
-              <a:srgbClr val="D1D5DB"/>
-            </a:solidFill>
-            <a:prstDash val="solid"/>
-          </a:ln>
-        </p:spPr>
-      </p:sp>
-      <p:sp>
-        <p:nvSpPr>
-          <p:cNvPr id="18" name="Text 16"/>
-          <p:cNvSpPr/>
-          <p:nvPr/>
-        </p:nvSpPr>
-        <p:spPr>
-          <a:xfrm>
-            <a:off x="3383280" y="3054096"/>
-            <a:ext cx="2377440" cy="310896"/>
-          </a:xfrm>
-          <a:prstGeom prst="rect">
-            <a:avLst/>
-          </a:prstGeom>
-          <a:noFill/>
-          <a:ln/>
-        </p:spPr>
-        <p:txBody>
-          <a:bodyPr wrap="square" lIns="0" tIns="0" rIns="0" bIns="0" rtlCol="0" anchor="ctr">
-            <a:normAutofit/>
-          </a:bodyPr>
-          <a:lstStyle/>
-          <a:p>
-            <a:pPr indent="0" marL="0">
-              <a:buNone/>
-            </a:pPr>
-            <a:r>
-              <a:rPr lang="en-US" sz="1500" b="1" dirty="0">
-                <a:solidFill>
-                  <a:srgbClr val="1E2761"/>
-                </a:solidFill>
-                <a:latin typeface="Calibri" pitchFamily="34" charset="0"/>
-                <a:ea typeface="Calibri" pitchFamily="34" charset="-122"/>
-                <a:cs typeface="Calibri" pitchFamily="34" charset="-120"/>
-              </a:rPr>
-              <a:t>tool_call_success</a:t>
-            </a:r>
-            <a:endParaRPr lang="en-US" sz="1500" dirty="0"/>
-          </a:p>
-        </p:txBody>
-      </p:sp>
-      <p:sp>
-        <p:nvSpPr>
-          <p:cNvPr id="19" name="Text 17"/>
-          <p:cNvSpPr/>
-          <p:nvPr/>
-        </p:nvSpPr>
-        <p:spPr>
-          <a:xfrm>
-            <a:off x="3383280" y="3438144"/>
-            <a:ext cx="2377440" cy="1033272"/>
-          </a:xfrm>
-          <a:prstGeom prst="rect">
-            <a:avLst/>
-          </a:prstGeom>
-          <a:noFill/>
-          <a:ln/>
-        </p:spPr>
-        <p:txBody>
-          <a:bodyPr wrap="square" lIns="0" tIns="0" rIns="0" bIns="0" rtlCol="0" anchor="t">
-            <a:normAutofit/>
-          </a:bodyPr>
-          <a:lstStyle/>
-          <a:p>
-            <a:pPr indent="0" marL="0">
-              <a:buNone/>
-            </a:pPr>
-            <a:r>
-              <a:rPr lang="en-US" sz="1150" dirty="0">
-                <a:solidFill>
-                  <a:srgbClr val="212121"/>
-                </a:solidFill>
-                <a:latin typeface="Calibri" pitchFamily="34" charset="0"/>
-                <a:ea typeface="Calibri" pitchFamily="34" charset="-122"/>
-                <a:cs typeface="Calibri" pitchFamily="34" charset="-120"/>
-              </a:rPr>
-              <a:t>Whether the call completed successfully</a:t>
-            </a:r>
-            <a:endParaRPr lang="en-US" sz="1150" dirty="0"/>
-          </a:p>
-        </p:txBody>
-      </p:sp>
-      <p:sp>
-        <p:nvSpPr>
-          <p:cNvPr id="20" name="Shape 18"/>
-          <p:cNvSpPr/>
-          <p:nvPr/>
-        </p:nvSpPr>
-        <p:spPr>
-          <a:xfrm>
-            <a:off x="6108192" y="2935224"/>
-            <a:ext cx="2670048" cy="1655064"/>
-          </a:xfrm>
-          <a:prstGeom prst="roundRect">
-            <a:avLst>
-              <a:gd name="adj" fmla="val 3315"/>
-            </a:avLst>
-          </a:prstGeom>
-          <a:solidFill>
-            <a:srgbClr val="F3F4F6"/>
-          </a:solidFill>
-          <a:ln w="10160">
-            <a:solidFill>
-              <a:srgbClr val="D1D5DB"/>
-            </a:solidFill>
-            <a:prstDash val="solid"/>
-          </a:ln>
-        </p:spPr>
-      </p:sp>
-      <p:sp>
-        <p:nvSpPr>
-          <p:cNvPr id="21" name="Text 19"/>
-          <p:cNvSpPr/>
-          <p:nvPr/>
-        </p:nvSpPr>
-        <p:spPr>
-          <a:xfrm>
-            <a:off x="6254496" y="3054096"/>
-            <a:ext cx="2377440" cy="310896"/>
-          </a:xfrm>
-          <a:prstGeom prst="rect">
-            <a:avLst/>
-          </a:prstGeom>
-          <a:noFill/>
-          <a:ln/>
-        </p:spPr>
-        <p:txBody>
-          <a:bodyPr wrap="square" lIns="0" tIns="0" rIns="0" bIns="0" rtlCol="0" anchor="ctr">
-            <a:normAutofit/>
-          </a:bodyPr>
-          <a:lstStyle/>
-          <a:p>
-            <a:pPr indent="0" marL="0">
-              <a:buNone/>
-            </a:pPr>
-            <a:r>
-              <a:rPr lang="en-US" sz="1500" b="1" dirty="0">
-                <a:solidFill>
-                  <a:srgbClr val="1E2761"/>
-                </a:solidFill>
-                <a:latin typeface="Calibri" pitchFamily="34" charset="0"/>
-                <a:ea typeface="Calibri" pitchFamily="34" charset="-122"/>
-                <a:cs typeface="Calibri" pitchFamily="34" charset="-120"/>
-              </a:rPr>
-              <a:t>task_adherence</a:t>
-            </a:r>
-            <a:endParaRPr lang="en-US" sz="1500" dirty="0"/>
-          </a:p>
-        </p:txBody>
-      </p:sp>
-      <p:sp>
-        <p:nvSpPr>
-          <p:cNvPr id="22" name="Text 20"/>
-          <p:cNvSpPr/>
-          <p:nvPr/>
-        </p:nvSpPr>
-        <p:spPr>
-          <a:xfrm>
-            <a:off x="6254496" y="3438144"/>
-            <a:ext cx="2377440" cy="1033272"/>
-          </a:xfrm>
-          <a:prstGeom prst="rect">
-            <a:avLst/>
-          </a:prstGeom>
-          <a:noFill/>
-          <a:ln/>
-        </p:spPr>
-        <p:txBody>
-          <a:bodyPr wrap="square" lIns="0" tIns="0" rIns="0" bIns="0" rtlCol="0" anchor="t">
-            <a:normAutofit/>
-          </a:bodyPr>
-          <a:lstStyle/>
-          <a:p>
-            <a:pPr indent="0" marL="0">
-              <a:buNone/>
-            </a:pPr>
-            <a:r>
-              <a:rPr lang="en-US" sz="1150" dirty="0">
-                <a:solidFill>
-                  <a:srgbClr val="212121"/>
-                </a:solidFill>
-                <a:latin typeface="Calibri" pitchFamily="34" charset="0"/>
-                <a:ea typeface="Calibri" pitchFamily="34" charset="-122"/>
-                <a:cs typeface="Calibri" pitchFamily="34" charset="-120"/>
-              </a:rPr>
-              <a:t>Whether the agent followed the requested task</a:t>
-            </a:r>
-            <a:endParaRPr lang="en-US" sz="1150" dirty="0"/>
-          </a:p>
-        </p:txBody>
-      </p:sp>
-      <p:sp>
-        <p:nvSpPr>
-          <p:cNvPr id="23" name="Shape 21"/>
           <p:cNvSpPr/>
           <p:nvPr/>
         </p:nvSpPr>
@@ -10135,7 +10248,7 @@
       </p:sp>
       <p:sp>
         <p:nvSpPr>
-          <p:cNvPr id="24" name="Text 22"/>
+          <p:cNvPr id="12" name="Text 10"/>
           <p:cNvSpPr/>
           <p:nvPr/>
         </p:nvSpPr>
@@ -10168,7 +10281,7 @@
                 <a:ea typeface="Calibri" pitchFamily="34" charset="-122"/>
                 <a:cs typeface="Calibri" pitchFamily="34" charset="-120"/>
               </a:rPr>
-              <a:t>Source: https://learn.microsoft.com/en-us/agent-framework/agents/evaluation?tabs=python</a:t>
+              <a:t>Source: https://learn.microsoft.com/en-us/agent-framework/agents/evaluation?tabs=python  ·  +1 in notes</a:t>
             </a:r>
             <a:endParaRPr lang="en-US" sz="820" dirty="0"/>
           </a:p>
@@ -10294,7 +10407,7 @@
               <a:buNone/>
             </a:pPr>
             <a:r>
-              <a:rPr lang="en-US" sz="2800" b="1" dirty="0">
+              <a:rPr lang="en-US" sz="2500" b="1" dirty="0">
                 <a:solidFill>
                   <a:srgbClr val="1E2761"/>
                 </a:solidFill>
@@ -10302,9 +10415,9 @@
                 <a:ea typeface="Calibri" pitchFamily="34" charset="-122"/>
                 <a:cs typeface="Calibri" pitchFamily="34" charset="-120"/>
               </a:rPr>
-              <a:t>Future lab architecture</a:t>
-            </a:r>
-            <a:endParaRPr lang="en-US" sz="2800" dirty="0"/>
+              <a:t>Choose Foundry evaluators for tool behavior</a:t>
+            </a:r>
+            <a:endParaRPr lang="en-US" sz="2500" dirty="0"/>
           </a:p>
         </p:txBody>
       </p:sp>
@@ -10316,12 +10429,12 @@
         </p:nvSpPr>
         <p:spPr>
           <a:xfrm>
-            <a:off x="365760" y="1216152"/>
-            <a:ext cx="2633472" cy="1572768"/>
+            <a:off x="365760" y="1078992"/>
+            <a:ext cx="2670048" cy="1655064"/>
           </a:xfrm>
           <a:prstGeom prst="roundRect">
             <a:avLst>
-              <a:gd name="adj" fmla="val 3488"/>
+              <a:gd name="adj" fmla="val 3315"/>
             </a:avLst>
           </a:prstGeom>
           <a:solidFill>
@@ -10337,73 +10450,14 @@
       </p:sp>
       <p:sp>
         <p:nvSpPr>
-          <p:cNvPr id="6" name="Shape 4"/>
-          <p:cNvSpPr/>
-          <p:nvPr/>
-        </p:nvSpPr>
-        <p:spPr>
-          <a:xfrm>
-            <a:off x="475488" y="1335024"/>
-            <a:ext cx="320040" cy="320040"/>
-          </a:xfrm>
-          <a:prstGeom prst="ellipse">
-            <a:avLst/>
-          </a:prstGeom>
-          <a:solidFill>
-            <a:srgbClr val="1E2761"/>
-          </a:solidFill>
-          <a:ln/>
-        </p:spPr>
-      </p:sp>
-      <p:sp>
-        <p:nvSpPr>
-          <p:cNvPr id="7" name="Text 5"/>
-          <p:cNvSpPr/>
-          <p:nvPr/>
-        </p:nvSpPr>
-        <p:spPr>
-          <a:xfrm>
-            <a:off x="475488" y="1385316"/>
-            <a:ext cx="320040" cy="146304"/>
-          </a:xfrm>
-          <a:prstGeom prst="rect">
-            <a:avLst/>
-          </a:prstGeom>
-          <a:noFill/>
-          <a:ln/>
-        </p:spPr>
-        <p:txBody>
-          <a:bodyPr wrap="square" lIns="0" tIns="0" rIns="0" bIns="0" rtlCol="0" anchor="ctr"/>
-          <a:lstStyle/>
-          <a:p>
-            <a:pPr algn="ctr" indent="0" marL="0">
-              <a:buNone/>
-            </a:pPr>
-            <a:r>
-              <a:rPr lang="en-US" sz="900" b="1" dirty="0">
-                <a:solidFill>
-                  <a:srgbClr val="FFFFFF"/>
-                </a:solidFill>
-                <a:latin typeface="Calibri" pitchFamily="34" charset="0"/>
-                <a:ea typeface="Calibri" pitchFamily="34" charset="-122"/>
-                <a:cs typeface="Calibri" pitchFamily="34" charset="-120"/>
-              </a:rPr>
-              <a:t>1</a:t>
-            </a:r>
-            <a:endParaRPr lang="en-US" sz="900" dirty="0"/>
-          </a:p>
-        </p:txBody>
-      </p:sp>
-      <p:sp>
-        <p:nvSpPr>
-          <p:cNvPr id="8" name="Text 6"/>
-          <p:cNvSpPr/>
-          <p:nvPr/>
-        </p:nvSpPr>
-        <p:spPr>
-          <a:xfrm>
-            <a:off x="896112" y="1335024"/>
-            <a:ext cx="1975104" cy="310896"/>
+          <p:cNvPr id="6" name="Text 4"/>
+          <p:cNvSpPr/>
+          <p:nvPr/>
+        </p:nvSpPr>
+        <p:spPr>
+          <a:xfrm>
+            <a:off x="512064" y="1197864"/>
+            <a:ext cx="2377440" cy="310896"/>
           </a:xfrm>
           <a:prstGeom prst="rect">
             <a:avLst/>
@@ -10429,7 +10483,7 @@
                 <a:ea typeface="Calibri" pitchFamily="34" charset="-122"/>
                 <a:cs typeface="Calibri" pitchFamily="34" charset="-120"/>
               </a:rPr>
-              <a:t>A · State + response</a:t>
+              <a:t>tool_call_accuracy</a:t>
             </a:r>
             <a:endParaRPr lang="en-US" sz="1500" dirty="0"/>
           </a:p>
@@ -10437,14 +10491,14 @@
       </p:sp>
       <p:sp>
         <p:nvSpPr>
-          <p:cNvPr id="9" name="Text 7"/>
-          <p:cNvSpPr/>
-          <p:nvPr/>
-        </p:nvSpPr>
-        <p:spPr>
-          <a:xfrm>
-            <a:off x="512064" y="1719072"/>
-            <a:ext cx="2340864" cy="950976"/>
+          <p:cNvPr id="7" name="Text 5"/>
+          <p:cNvSpPr/>
+          <p:nvPr/>
+        </p:nvSpPr>
+        <p:spPr>
+          <a:xfrm>
+            <a:off x="512064" y="1581912"/>
+            <a:ext cx="2377440" cy="1033272"/>
           </a:xfrm>
           <a:prstGeom prst="rect">
             <a:avLst/>
@@ -10470,7 +10524,7 @@
                 <a:ea typeface="Calibri" pitchFamily="34" charset="-122"/>
                 <a:cs typeface="Calibri" pitchFamily="34" charset="-120"/>
               </a:rPr>
-              <a:t>Session, serialization, stream, TriageResult</a:t>
+              <a:t>Overall correctness of tool calls</a:t>
             </a:r>
             <a:endParaRPr lang="en-US" sz="1150" dirty="0"/>
           </a:p>
@@ -10478,38 +10532,18 @@
       </p:sp>
       <p:sp>
         <p:nvSpPr>
-          <p:cNvPr id="10" name="Shape 8"/>
-          <p:cNvSpPr/>
-          <p:nvPr/>
-        </p:nvSpPr>
-        <p:spPr>
-          <a:xfrm>
-            <a:off x="3035808" y="1892808"/>
-            <a:ext cx="164592" cy="219456"/>
-          </a:xfrm>
-          <a:prstGeom prst="chevron">
-            <a:avLst/>
-          </a:prstGeom>
-          <a:solidFill>
-            <a:srgbClr val="E8A87C"/>
-          </a:solidFill>
-          <a:ln/>
-        </p:spPr>
-      </p:sp>
-      <p:sp>
-        <p:nvSpPr>
-          <p:cNvPr id="11" name="Shape 9"/>
-          <p:cNvSpPr/>
-          <p:nvPr/>
-        </p:nvSpPr>
-        <p:spPr>
-          <a:xfrm>
-            <a:off x="3255264" y="1216152"/>
-            <a:ext cx="2633472" cy="1572768"/>
+          <p:cNvPr id="8" name="Shape 6"/>
+          <p:cNvSpPr/>
+          <p:nvPr/>
+        </p:nvSpPr>
+        <p:spPr>
+          <a:xfrm>
+            <a:off x="3236976" y="1078992"/>
+            <a:ext cx="2670048" cy="1655064"/>
           </a:xfrm>
           <a:prstGeom prst="roundRect">
             <a:avLst>
-              <a:gd name="adj" fmla="val 3488"/>
+              <a:gd name="adj" fmla="val 3315"/>
             </a:avLst>
           </a:prstGeom>
           <a:solidFill>
@@ -10525,73 +10559,14 @@
       </p:sp>
       <p:sp>
         <p:nvSpPr>
-          <p:cNvPr id="12" name="Shape 10"/>
-          <p:cNvSpPr/>
-          <p:nvPr/>
-        </p:nvSpPr>
-        <p:spPr>
-          <a:xfrm>
-            <a:off x="3364992" y="1335024"/>
-            <a:ext cx="320040" cy="320040"/>
-          </a:xfrm>
-          <a:prstGeom prst="ellipse">
-            <a:avLst/>
-          </a:prstGeom>
-          <a:solidFill>
-            <a:srgbClr val="1E2761"/>
-          </a:solidFill>
-          <a:ln/>
-        </p:spPr>
-      </p:sp>
-      <p:sp>
-        <p:nvSpPr>
-          <p:cNvPr id="13" name="Text 11"/>
-          <p:cNvSpPr/>
-          <p:nvPr/>
-        </p:nvSpPr>
-        <p:spPr>
-          <a:xfrm>
-            <a:off x="3364992" y="1385316"/>
-            <a:ext cx="320040" cy="146304"/>
-          </a:xfrm>
-          <a:prstGeom prst="rect">
-            <a:avLst/>
-          </a:prstGeom>
-          <a:noFill/>
-          <a:ln/>
-        </p:spPr>
-        <p:txBody>
-          <a:bodyPr wrap="square" lIns="0" tIns="0" rIns="0" bIns="0" rtlCol="0" anchor="ctr"/>
-          <a:lstStyle/>
-          <a:p>
-            <a:pPr algn="ctr" indent="0" marL="0">
-              <a:buNone/>
-            </a:pPr>
-            <a:r>
-              <a:rPr lang="en-US" sz="900" b="1" dirty="0">
-                <a:solidFill>
-                  <a:srgbClr val="FFFFFF"/>
-                </a:solidFill>
-                <a:latin typeface="Calibri" pitchFamily="34" charset="0"/>
-                <a:ea typeface="Calibri" pitchFamily="34" charset="-122"/>
-                <a:cs typeface="Calibri" pitchFamily="34" charset="-120"/>
-              </a:rPr>
-              <a:t>2</a:t>
-            </a:r>
-            <a:endParaRPr lang="en-US" sz="900" dirty="0"/>
-          </a:p>
-        </p:txBody>
-      </p:sp>
-      <p:sp>
-        <p:nvSpPr>
-          <p:cNvPr id="14" name="Text 12"/>
-          <p:cNvSpPr/>
-          <p:nvPr/>
-        </p:nvSpPr>
-        <p:spPr>
-          <a:xfrm>
-            <a:off x="3785616" y="1335024"/>
-            <a:ext cx="1975104" cy="310896"/>
+          <p:cNvPr id="9" name="Text 7"/>
+          <p:cNvSpPr/>
+          <p:nvPr/>
+        </p:nvSpPr>
+        <p:spPr>
+          <a:xfrm>
+            <a:off x="3383280" y="1197864"/>
+            <a:ext cx="2377440" cy="310896"/>
           </a:xfrm>
           <a:prstGeom prst="rect">
             <a:avLst/>
@@ -10617,7 +10592,7 @@
                 <a:ea typeface="Calibri" pitchFamily="34" charset="-122"/>
                 <a:cs typeface="Calibri" pitchFamily="34" charset="-120"/>
               </a:rPr>
-              <a:t>B · Robustness</a:t>
+              <a:t>tool_selection</a:t>
             </a:r>
             <a:endParaRPr lang="en-US" sz="1500" dirty="0"/>
           </a:p>
@@ -10625,14 +10600,14 @@
       </p:sp>
       <p:sp>
         <p:nvSpPr>
-          <p:cNvPr id="15" name="Text 13"/>
-          <p:cNvSpPr/>
-          <p:nvPr/>
-        </p:nvSpPr>
-        <p:spPr>
-          <a:xfrm>
-            <a:off x="3401568" y="1719072"/>
-            <a:ext cx="2340864" cy="950976"/>
+          <p:cNvPr id="10" name="Text 8"/>
+          <p:cNvSpPr/>
+          <p:nvPr/>
+        </p:nvSpPr>
+        <p:spPr>
+          <a:xfrm>
+            <a:off x="3383280" y="1581912"/>
+            <a:ext cx="2377440" cy="1033272"/>
           </a:xfrm>
           <a:prstGeom prst="rect">
             <a:avLst/>
@@ -10658,7 +10633,7 @@
                 <a:ea typeface="Calibri" pitchFamily="34" charset="-122"/>
                 <a:cs typeface="Calibri" pitchFamily="34" charset="-120"/>
               </a:rPr>
-              <a:t>Timing, guardrail, exception handling</a:t>
+              <a:t>Whether the right tool was chosen</a:t>
             </a:r>
             <a:endParaRPr lang="en-US" sz="1150" dirty="0"/>
           </a:p>
@@ -10666,38 +10641,18 @@
       </p:sp>
       <p:sp>
         <p:nvSpPr>
-          <p:cNvPr id="16" name="Shape 14"/>
-          <p:cNvSpPr/>
-          <p:nvPr/>
-        </p:nvSpPr>
-        <p:spPr>
-          <a:xfrm>
-            <a:off x="5925312" y="1892808"/>
-            <a:ext cx="164592" cy="219456"/>
-          </a:xfrm>
-          <a:prstGeom prst="chevron">
-            <a:avLst/>
-          </a:prstGeom>
-          <a:solidFill>
-            <a:srgbClr val="E8A87C"/>
-          </a:solidFill>
-          <a:ln/>
-        </p:spPr>
-      </p:sp>
-      <p:sp>
-        <p:nvSpPr>
-          <p:cNvPr id="17" name="Shape 15"/>
-          <p:cNvSpPr/>
-          <p:nvPr/>
-        </p:nvSpPr>
-        <p:spPr>
-          <a:xfrm>
-            <a:off x="6144768" y="1216152"/>
-            <a:ext cx="2633472" cy="1572768"/>
+          <p:cNvPr id="11" name="Shape 9"/>
+          <p:cNvSpPr/>
+          <p:nvPr/>
+        </p:nvSpPr>
+        <p:spPr>
+          <a:xfrm>
+            <a:off x="6108192" y="1078992"/>
+            <a:ext cx="2670048" cy="1655064"/>
           </a:xfrm>
           <a:prstGeom prst="roundRect">
             <a:avLst>
-              <a:gd name="adj" fmla="val 3488"/>
+              <a:gd name="adj" fmla="val 3315"/>
             </a:avLst>
           </a:prstGeom>
           <a:solidFill>
@@ -10713,73 +10668,14 @@
       </p:sp>
       <p:sp>
         <p:nvSpPr>
-          <p:cNvPr id="18" name="Shape 16"/>
-          <p:cNvSpPr/>
-          <p:nvPr/>
-        </p:nvSpPr>
-        <p:spPr>
-          <a:xfrm>
-            <a:off x="6254496" y="1335024"/>
-            <a:ext cx="320040" cy="320040"/>
-          </a:xfrm>
-          <a:prstGeom prst="ellipse">
-            <a:avLst/>
-          </a:prstGeom>
-          <a:solidFill>
-            <a:srgbClr val="1E2761"/>
-          </a:solidFill>
-          <a:ln/>
-        </p:spPr>
-      </p:sp>
-      <p:sp>
-        <p:nvSpPr>
-          <p:cNvPr id="19" name="Text 17"/>
-          <p:cNvSpPr/>
-          <p:nvPr/>
-        </p:nvSpPr>
-        <p:spPr>
-          <a:xfrm>
-            <a:off x="6254496" y="1385316"/>
-            <a:ext cx="320040" cy="146304"/>
-          </a:xfrm>
-          <a:prstGeom prst="rect">
-            <a:avLst/>
-          </a:prstGeom>
-          <a:noFill/>
-          <a:ln/>
-        </p:spPr>
-        <p:txBody>
-          <a:bodyPr wrap="square" lIns="0" tIns="0" rIns="0" bIns="0" rtlCol="0" anchor="ctr"/>
-          <a:lstStyle/>
-          <a:p>
-            <a:pPr algn="ctr" indent="0" marL="0">
-              <a:buNone/>
-            </a:pPr>
-            <a:r>
-              <a:rPr lang="en-US" sz="900" b="1" dirty="0">
-                <a:solidFill>
-                  <a:srgbClr val="FFFFFF"/>
-                </a:solidFill>
-                <a:latin typeface="Calibri" pitchFamily="34" charset="0"/>
-                <a:ea typeface="Calibri" pitchFamily="34" charset="-122"/>
-                <a:cs typeface="Calibri" pitchFamily="34" charset="-120"/>
-              </a:rPr>
-              <a:t>3</a:t>
-            </a:r>
-            <a:endParaRPr lang="en-US" sz="900" dirty="0"/>
-          </a:p>
-        </p:txBody>
-      </p:sp>
-      <p:sp>
-        <p:nvSpPr>
-          <p:cNvPr id="20" name="Text 18"/>
-          <p:cNvSpPr/>
-          <p:nvPr/>
-        </p:nvSpPr>
-        <p:spPr>
-          <a:xfrm>
-            <a:off x="6675120" y="1335024"/>
-            <a:ext cx="1975104" cy="310896"/>
+          <p:cNvPr id="12" name="Text 10"/>
+          <p:cNvSpPr/>
+          <p:nvPr/>
+        </p:nvSpPr>
+        <p:spPr>
+          <a:xfrm>
+            <a:off x="6254496" y="1197864"/>
+            <a:ext cx="2377440" cy="310896"/>
           </a:xfrm>
           <a:prstGeom prst="rect">
             <a:avLst/>
@@ -10805,7 +10701,7 @@
                 <a:ea typeface="Calibri" pitchFamily="34" charset="-122"/>
                 <a:cs typeface="Calibri" pitchFamily="34" charset="-120"/>
               </a:rPr>
-              <a:t>C · Read</a:t>
+              <a:t>tool_input_accuracy</a:t>
             </a:r>
             <a:endParaRPr lang="en-US" sz="1500" dirty="0"/>
           </a:p>
@@ -10813,14 +10709,14 @@
       </p:sp>
       <p:sp>
         <p:nvSpPr>
-          <p:cNvPr id="21" name="Text 19"/>
-          <p:cNvSpPr/>
-          <p:nvPr/>
-        </p:nvSpPr>
-        <p:spPr>
-          <a:xfrm>
-            <a:off x="6291072" y="1719072"/>
-            <a:ext cx="2340864" cy="950976"/>
+          <p:cNvPr id="13" name="Text 11"/>
+          <p:cNvSpPr/>
+          <p:nvPr/>
+        </p:nvSpPr>
+        <p:spPr>
+          <a:xfrm>
+            <a:off x="6254496" y="1581912"/>
+            <a:ext cx="2377440" cy="1033272"/>
           </a:xfrm>
           <a:prstGeom prst="rect">
             <a:avLst/>
@@ -10846,7 +10742,7 @@
                 <a:ea typeface="Calibri" pitchFamily="34" charset="-122"/>
                 <a:cs typeface="Calibri" pitchFamily="34" charset="-120"/>
               </a:rPr>
-              <a:t>Read-only Azure DevOps MCP</a:t>
+              <a:t>Whether arguments were appropriate</a:t>
             </a:r>
             <a:endParaRPr lang="en-US" sz="1150" dirty="0"/>
           </a:p>
@@ -10854,18 +10750,18 @@
       </p:sp>
       <p:sp>
         <p:nvSpPr>
-          <p:cNvPr id="22" name="Shape 20"/>
-          <p:cNvSpPr/>
-          <p:nvPr/>
-        </p:nvSpPr>
-        <p:spPr>
-          <a:xfrm>
-            <a:off x="365760" y="3044952"/>
-            <a:ext cx="2633472" cy="1572768"/>
+          <p:cNvPr id="14" name="Shape 12"/>
+          <p:cNvSpPr/>
+          <p:nvPr/>
+        </p:nvSpPr>
+        <p:spPr>
+          <a:xfrm>
+            <a:off x="365760" y="2935224"/>
+            <a:ext cx="2670048" cy="1655064"/>
           </a:xfrm>
           <a:prstGeom prst="roundRect">
             <a:avLst>
-              <a:gd name="adj" fmla="val 3488"/>
+              <a:gd name="adj" fmla="val 3315"/>
             </a:avLst>
           </a:prstGeom>
           <a:solidFill>
@@ -10881,73 +10777,14 @@
       </p:sp>
       <p:sp>
         <p:nvSpPr>
-          <p:cNvPr id="23" name="Shape 21"/>
-          <p:cNvSpPr/>
-          <p:nvPr/>
-        </p:nvSpPr>
-        <p:spPr>
-          <a:xfrm>
-            <a:off x="475488" y="3163824"/>
-            <a:ext cx="320040" cy="320040"/>
-          </a:xfrm>
-          <a:prstGeom prst="ellipse">
-            <a:avLst/>
-          </a:prstGeom>
-          <a:solidFill>
-            <a:srgbClr val="1E2761"/>
-          </a:solidFill>
-          <a:ln/>
-        </p:spPr>
-      </p:sp>
-      <p:sp>
-        <p:nvSpPr>
-          <p:cNvPr id="24" name="Text 22"/>
-          <p:cNvSpPr/>
-          <p:nvPr/>
-        </p:nvSpPr>
-        <p:spPr>
-          <a:xfrm>
-            <a:off x="475488" y="3214116"/>
-            <a:ext cx="320040" cy="146304"/>
-          </a:xfrm>
-          <a:prstGeom prst="rect">
-            <a:avLst/>
-          </a:prstGeom>
-          <a:noFill/>
-          <a:ln/>
-        </p:spPr>
-        <p:txBody>
-          <a:bodyPr wrap="square" lIns="0" tIns="0" rIns="0" bIns="0" rtlCol="0" anchor="ctr"/>
-          <a:lstStyle/>
-          <a:p>
-            <a:pPr algn="ctr" indent="0" marL="0">
-              <a:buNone/>
-            </a:pPr>
-            <a:r>
-              <a:rPr lang="en-US" sz="900" b="1" dirty="0">
-                <a:solidFill>
-                  <a:srgbClr val="FFFFFF"/>
-                </a:solidFill>
-                <a:latin typeface="Calibri" pitchFamily="34" charset="0"/>
-                <a:ea typeface="Calibri" pitchFamily="34" charset="-122"/>
-                <a:cs typeface="Calibri" pitchFamily="34" charset="-120"/>
-              </a:rPr>
-              <a:t>4</a:t>
-            </a:r>
-            <a:endParaRPr lang="en-US" sz="900" dirty="0"/>
-          </a:p>
-        </p:txBody>
-      </p:sp>
-      <p:sp>
-        <p:nvSpPr>
-          <p:cNvPr id="25" name="Text 23"/>
-          <p:cNvSpPr/>
-          <p:nvPr/>
-        </p:nvSpPr>
-        <p:spPr>
-          <a:xfrm>
-            <a:off x="896112" y="3163824"/>
-            <a:ext cx="1975104" cy="310896"/>
+          <p:cNvPr id="15" name="Text 13"/>
+          <p:cNvSpPr/>
+          <p:nvPr/>
+        </p:nvSpPr>
+        <p:spPr>
+          <a:xfrm>
+            <a:off x="512064" y="3054096"/>
+            <a:ext cx="2377440" cy="310896"/>
           </a:xfrm>
           <a:prstGeom prst="rect">
             <a:avLst/>
@@ -10973,7 +10810,7 @@
                 <a:ea typeface="Calibri" pitchFamily="34" charset="-122"/>
                 <a:cs typeface="Calibri" pitchFamily="34" charset="-120"/>
               </a:rPr>
-              <a:t>D · Write</a:t>
+              <a:t>tool_output_utilization</a:t>
             </a:r>
             <a:endParaRPr lang="en-US" sz="1500" dirty="0"/>
           </a:p>
@@ -10981,14 +10818,14 @@
       </p:sp>
       <p:sp>
         <p:nvSpPr>
-          <p:cNvPr id="26" name="Text 24"/>
-          <p:cNvSpPr/>
-          <p:nvPr/>
-        </p:nvSpPr>
-        <p:spPr>
-          <a:xfrm>
-            <a:off x="512064" y="3547872"/>
-            <a:ext cx="2340864" cy="950976"/>
+          <p:cNvPr id="16" name="Text 14"/>
+          <p:cNvSpPr/>
+          <p:nvPr/>
+        </p:nvSpPr>
+        <p:spPr>
+          <a:xfrm>
+            <a:off x="512064" y="3438144"/>
+            <a:ext cx="2377440" cy="1033272"/>
           </a:xfrm>
           <a:prstGeom prst="rect">
             <a:avLst/>
@@ -11014,7 +10851,7 @@
                 <a:ea typeface="Calibri" pitchFamily="34" charset="-122"/>
                 <a:cs typeface="Calibri" pitchFamily="34" charset="-120"/>
               </a:rPr>
-              <a:t>Explicitly approved work-item mutation</a:t>
+              <a:t>Whether the response used the result</a:t>
             </a:r>
             <a:endParaRPr lang="en-US" sz="1150" dirty="0"/>
           </a:p>
@@ -11022,46 +10859,26 @@
       </p:sp>
       <p:sp>
         <p:nvSpPr>
-          <p:cNvPr id="27" name="Shape 25"/>
-          <p:cNvSpPr/>
-          <p:nvPr/>
-        </p:nvSpPr>
-        <p:spPr>
-          <a:xfrm>
-            <a:off x="3035808" y="3721608"/>
-            <a:ext cx="164592" cy="219456"/>
-          </a:xfrm>
-          <a:prstGeom prst="chevron">
-            <a:avLst/>
-          </a:prstGeom>
-          <a:solidFill>
-            <a:srgbClr val="E8A87C"/>
-          </a:solidFill>
-          <a:ln/>
-        </p:spPr>
-      </p:sp>
-      <p:sp>
-        <p:nvSpPr>
-          <p:cNvPr id="28" name="Shape 26"/>
-          <p:cNvSpPr/>
-          <p:nvPr/>
-        </p:nvSpPr>
-        <p:spPr>
-          <a:xfrm>
-            <a:off x="3255264" y="3044952"/>
-            <a:ext cx="2633472" cy="1572768"/>
+          <p:cNvPr id="17" name="Shape 15"/>
+          <p:cNvSpPr/>
+          <p:nvPr/>
+        </p:nvSpPr>
+        <p:spPr>
+          <a:xfrm>
+            <a:off x="3236976" y="2935224"/>
+            <a:ext cx="2670048" cy="1655064"/>
           </a:xfrm>
           <a:prstGeom prst="roundRect">
             <a:avLst>
-              <a:gd name="adj" fmla="val 3488"/>
+              <a:gd name="adj" fmla="val 3315"/>
             </a:avLst>
           </a:prstGeom>
           <a:solidFill>
-            <a:srgbClr val="CADCFC"/>
+            <a:srgbClr val="F3F4F6"/>
           </a:solidFill>
           <a:ln w="10160">
             <a:solidFill>
-              <a:srgbClr val="1E2761"/>
+              <a:srgbClr val="D1D5DB"/>
             </a:solidFill>
             <a:prstDash val="solid"/>
           </a:ln>
@@ -11069,73 +10886,14 @@
       </p:sp>
       <p:sp>
         <p:nvSpPr>
-          <p:cNvPr id="29" name="Shape 27"/>
-          <p:cNvSpPr/>
-          <p:nvPr/>
-        </p:nvSpPr>
-        <p:spPr>
-          <a:xfrm>
-            <a:off x="3364992" y="3163824"/>
-            <a:ext cx="320040" cy="320040"/>
-          </a:xfrm>
-          <a:prstGeom prst="ellipse">
-            <a:avLst/>
-          </a:prstGeom>
-          <a:solidFill>
-            <a:srgbClr val="1E2761"/>
-          </a:solidFill>
-          <a:ln/>
-        </p:spPr>
-      </p:sp>
-      <p:sp>
-        <p:nvSpPr>
-          <p:cNvPr id="30" name="Text 28"/>
-          <p:cNvSpPr/>
-          <p:nvPr/>
-        </p:nvSpPr>
-        <p:spPr>
-          <a:xfrm>
-            <a:off x="3364992" y="3214116"/>
-            <a:ext cx="320040" cy="146304"/>
-          </a:xfrm>
-          <a:prstGeom prst="rect">
-            <a:avLst/>
-          </a:prstGeom>
-          <a:noFill/>
-          <a:ln/>
-        </p:spPr>
-        <p:txBody>
-          <a:bodyPr wrap="square" lIns="0" tIns="0" rIns="0" bIns="0" rtlCol="0" anchor="ctr"/>
-          <a:lstStyle/>
-          <a:p>
-            <a:pPr algn="ctr" indent="0" marL="0">
-              <a:buNone/>
-            </a:pPr>
-            <a:r>
-              <a:rPr lang="en-US" sz="900" b="1" dirty="0">
-                <a:solidFill>
-                  <a:srgbClr val="FFFFFF"/>
-                </a:solidFill>
-                <a:latin typeface="Calibri" pitchFamily="34" charset="0"/>
-                <a:ea typeface="Calibri" pitchFamily="34" charset="-122"/>
-                <a:cs typeface="Calibri" pitchFamily="34" charset="-120"/>
-              </a:rPr>
-              <a:t>5</a:t>
-            </a:r>
-            <a:endParaRPr lang="en-US" sz="900" dirty="0"/>
-          </a:p>
-        </p:txBody>
-      </p:sp>
-      <p:sp>
-        <p:nvSpPr>
-          <p:cNvPr id="31" name="Text 29"/>
-          <p:cNvSpPr/>
-          <p:nvPr/>
-        </p:nvSpPr>
-        <p:spPr>
-          <a:xfrm>
-            <a:off x="3785616" y="3163824"/>
-            <a:ext cx="1975104" cy="310896"/>
+          <p:cNvPr id="18" name="Text 16"/>
+          <p:cNvSpPr/>
+          <p:nvPr/>
+        </p:nvSpPr>
+        <p:spPr>
+          <a:xfrm>
+            <a:off x="3383280" y="3054096"/>
+            <a:ext cx="2377440" cy="310896"/>
           </a:xfrm>
           <a:prstGeom prst="rect">
             <a:avLst/>
@@ -11161,7 +10919,7 @@
                 <a:ea typeface="Calibri" pitchFamily="34" charset="-122"/>
                 <a:cs typeface="Calibri" pitchFamily="34" charset="-120"/>
               </a:rPr>
-              <a:t>E · Evaluate</a:t>
+              <a:t>tool_call_success</a:t>
             </a:r>
             <a:endParaRPr lang="en-US" sz="1500" dirty="0"/>
           </a:p>
@@ -11169,14 +10927,14 @@
       </p:sp>
       <p:sp>
         <p:nvSpPr>
-          <p:cNvPr id="32" name="Text 30"/>
-          <p:cNvSpPr/>
-          <p:nvPr/>
-        </p:nvSpPr>
-        <p:spPr>
-          <a:xfrm>
-            <a:off x="3401568" y="3547872"/>
-            <a:ext cx="2340864" cy="950976"/>
+          <p:cNvPr id="19" name="Text 17"/>
+          <p:cNvSpPr/>
+          <p:nvPr/>
+        </p:nvSpPr>
+        <p:spPr>
+          <a:xfrm>
+            <a:off x="3383280" y="3438144"/>
+            <a:ext cx="2377440" cy="1033272"/>
           </a:xfrm>
           <a:prstGeom prst="rect">
             <a:avLst/>
@@ -11202,7 +10960,7 @@
                 <a:ea typeface="Calibri" pitchFamily="34" charset="-122"/>
                 <a:cs typeface="Calibri" pitchFamily="34" charset="-120"/>
               </a:rPr>
-              <a:t>Exact local checks plus selected Foundry evaluators</a:t>
+              <a:t>Whether the call completed successfully</a:t>
             </a:r>
             <a:endParaRPr lang="en-US" sz="1150" dirty="0"/>
           </a:p>
@@ -11210,7 +10968,116 @@
       </p:sp>
       <p:sp>
         <p:nvSpPr>
-          <p:cNvPr id="33" name="Shape 31"/>
+          <p:cNvPr id="20" name="Shape 18"/>
+          <p:cNvSpPr/>
+          <p:nvPr/>
+        </p:nvSpPr>
+        <p:spPr>
+          <a:xfrm>
+            <a:off x="6108192" y="2935224"/>
+            <a:ext cx="2670048" cy="1655064"/>
+          </a:xfrm>
+          <a:prstGeom prst="roundRect">
+            <a:avLst>
+              <a:gd name="adj" fmla="val 3315"/>
+            </a:avLst>
+          </a:prstGeom>
+          <a:solidFill>
+            <a:srgbClr val="F3F4F6"/>
+          </a:solidFill>
+          <a:ln w="10160">
+            <a:solidFill>
+              <a:srgbClr val="D1D5DB"/>
+            </a:solidFill>
+            <a:prstDash val="solid"/>
+          </a:ln>
+        </p:spPr>
+      </p:sp>
+      <p:sp>
+        <p:nvSpPr>
+          <p:cNvPr id="21" name="Text 19"/>
+          <p:cNvSpPr/>
+          <p:nvPr/>
+        </p:nvSpPr>
+        <p:spPr>
+          <a:xfrm>
+            <a:off x="6254496" y="3054096"/>
+            <a:ext cx="2377440" cy="310896"/>
+          </a:xfrm>
+          <a:prstGeom prst="rect">
+            <a:avLst/>
+          </a:prstGeom>
+          <a:noFill/>
+          <a:ln/>
+        </p:spPr>
+        <p:txBody>
+          <a:bodyPr wrap="square" lIns="0" tIns="0" rIns="0" bIns="0" rtlCol="0" anchor="ctr">
+            <a:normAutofit/>
+          </a:bodyPr>
+          <a:lstStyle/>
+          <a:p>
+            <a:pPr indent="0" marL="0">
+              <a:buNone/>
+            </a:pPr>
+            <a:r>
+              <a:rPr lang="en-US" sz="1500" b="1" dirty="0">
+                <a:solidFill>
+                  <a:srgbClr val="1E2761"/>
+                </a:solidFill>
+                <a:latin typeface="Calibri" pitchFamily="34" charset="0"/>
+                <a:ea typeface="Calibri" pitchFamily="34" charset="-122"/>
+                <a:cs typeface="Calibri" pitchFamily="34" charset="-120"/>
+              </a:rPr>
+              <a:t>task_adherence</a:t>
+            </a:r>
+            <a:endParaRPr lang="en-US" sz="1500" dirty="0"/>
+          </a:p>
+        </p:txBody>
+      </p:sp>
+      <p:sp>
+        <p:nvSpPr>
+          <p:cNvPr id="22" name="Text 20"/>
+          <p:cNvSpPr/>
+          <p:nvPr/>
+        </p:nvSpPr>
+        <p:spPr>
+          <a:xfrm>
+            <a:off x="6254496" y="3438144"/>
+            <a:ext cx="2377440" cy="1033272"/>
+          </a:xfrm>
+          <a:prstGeom prst="rect">
+            <a:avLst/>
+          </a:prstGeom>
+          <a:noFill/>
+          <a:ln/>
+        </p:spPr>
+        <p:txBody>
+          <a:bodyPr wrap="square" lIns="0" tIns="0" rIns="0" bIns="0" rtlCol="0" anchor="t">
+            <a:normAutofit/>
+          </a:bodyPr>
+          <a:lstStyle/>
+          <a:p>
+            <a:pPr indent="0" marL="0">
+              <a:buNone/>
+            </a:pPr>
+            <a:r>
+              <a:rPr lang="en-US" sz="1150" dirty="0">
+                <a:solidFill>
+                  <a:srgbClr val="212121"/>
+                </a:solidFill>
+                <a:latin typeface="Calibri" pitchFamily="34" charset="0"/>
+                <a:ea typeface="Calibri" pitchFamily="34" charset="-122"/>
+                <a:cs typeface="Calibri" pitchFamily="34" charset="-120"/>
+              </a:rPr>
+              <a:t>Whether the agent followed the requested task</a:t>
+            </a:r>
+            <a:endParaRPr lang="en-US" sz="1150" dirty="0"/>
+          </a:p>
+        </p:txBody>
+      </p:sp>
+      <p:sp>
+        <p:nvSpPr>
+          <p:cNvPr id="23" name="Shape 21"/>
           <p:cNvSpPr/>
           <p:nvPr/>
         </p:nvSpPr>
@@ -11233,7 +11100,7 @@
       </p:sp>
       <p:sp>
         <p:nvSpPr>
-          <p:cNvPr id="34" name="Text 32"/>
+          <p:cNvPr id="24" name="Text 22"/>
           <p:cNvSpPr/>
           <p:nvPr/>
         </p:nvSpPr>
@@ -11266,7 +11133,7 @@
                 <a:ea typeface="Calibri" pitchFamily="34" charset="-122"/>
                 <a:cs typeface="Calibri" pitchFamily="34" charset="-120"/>
               </a:rPr>
-              <a:t>Source: https://learn.microsoft.com/en-us/agent-framework/concepts/agents/conversations/session?tabs=python  ·  +2 in notes</a:t>
+              <a:t>Source: https://learn.microsoft.com/en-us/agent-framework/agents/evaluation?tabs=python</a:t>
             </a:r>
             <a:endParaRPr lang="en-US" sz="820" dirty="0"/>
           </a:p>
@@ -11400,7 +11267,7 @@
                 <a:ea typeface="Calibri" pitchFamily="34" charset="-122"/>
                 <a:cs typeface="Calibri" pitchFamily="34" charset="-120"/>
               </a:rPr>
-              <a:t>Part A + B: runtime foundation</a:t>
+              <a:t>Future lab architecture</a:t>
             </a:r>
             <a:endParaRPr lang="en-US" sz="2800" dirty="0"/>
           </a:p>
@@ -11414,16 +11281,206 @@
         </p:nvSpPr>
         <p:spPr>
           <a:xfrm>
-            <a:off x="365760" y="1078992"/>
-            <a:ext cx="4114800" cy="3493008"/>
+            <a:off x="365760" y="1216152"/>
+            <a:ext cx="2633472" cy="1572768"/>
           </a:xfrm>
           <a:prstGeom prst="roundRect">
-            <a:avLst/>
+            <a:avLst>
+              <a:gd name="adj" fmla="val 3488"/>
+            </a:avLst>
+          </a:prstGeom>
+          <a:solidFill>
+            <a:srgbClr val="CADCFC"/>
+          </a:solidFill>
+          <a:ln w="10160">
+            <a:solidFill>
+              <a:srgbClr val="1E2761"/>
+            </a:solidFill>
+            <a:prstDash val="solid"/>
+          </a:ln>
+        </p:spPr>
+      </p:sp>
+      <p:sp>
+        <p:nvSpPr>
+          <p:cNvPr id="6" name="Shape 4"/>
+          <p:cNvSpPr/>
+          <p:nvPr/>
+        </p:nvSpPr>
+        <p:spPr>
+          <a:xfrm>
+            <a:off x="475488" y="1335024"/>
+            <a:ext cx="320040" cy="320040"/>
+          </a:xfrm>
+          <a:prstGeom prst="ellipse">
+            <a:avLst/>
+          </a:prstGeom>
+          <a:solidFill>
+            <a:srgbClr val="1E2761"/>
+          </a:solidFill>
+          <a:ln/>
+        </p:spPr>
+      </p:sp>
+      <p:sp>
+        <p:nvSpPr>
+          <p:cNvPr id="7" name="Text 5"/>
+          <p:cNvSpPr/>
+          <p:nvPr/>
+        </p:nvSpPr>
+        <p:spPr>
+          <a:xfrm>
+            <a:off x="475488" y="1385316"/>
+            <a:ext cx="320040" cy="146304"/>
+          </a:xfrm>
+          <a:prstGeom prst="rect">
+            <a:avLst/>
+          </a:prstGeom>
+          <a:noFill/>
+          <a:ln/>
+        </p:spPr>
+        <p:txBody>
+          <a:bodyPr wrap="square" lIns="0" tIns="0" rIns="0" bIns="0" rtlCol="0" anchor="ctr"/>
+          <a:lstStyle/>
+          <a:p>
+            <a:pPr algn="ctr" indent="0" marL="0">
+              <a:buNone/>
+            </a:pPr>
+            <a:r>
+              <a:rPr lang="en-US" sz="900" b="1" dirty="0">
+                <a:solidFill>
+                  <a:srgbClr val="FFFFFF"/>
+                </a:solidFill>
+                <a:latin typeface="Calibri" pitchFamily="34" charset="0"/>
+                <a:ea typeface="Calibri" pitchFamily="34" charset="-122"/>
+                <a:cs typeface="Calibri" pitchFamily="34" charset="-120"/>
+              </a:rPr>
+              <a:t>1</a:t>
+            </a:r>
+            <a:endParaRPr lang="en-US" sz="900" dirty="0"/>
+          </a:p>
+        </p:txBody>
+      </p:sp>
+      <p:sp>
+        <p:nvSpPr>
+          <p:cNvPr id="8" name="Text 6"/>
+          <p:cNvSpPr/>
+          <p:nvPr/>
+        </p:nvSpPr>
+        <p:spPr>
+          <a:xfrm>
+            <a:off x="896112" y="1335024"/>
+            <a:ext cx="1975104" cy="310896"/>
+          </a:xfrm>
+          <a:prstGeom prst="rect">
+            <a:avLst/>
+          </a:prstGeom>
+          <a:noFill/>
+          <a:ln/>
+        </p:spPr>
+        <p:txBody>
+          <a:bodyPr wrap="square" lIns="0" tIns="0" rIns="0" bIns="0" rtlCol="0" anchor="ctr">
+            <a:normAutofit/>
+          </a:bodyPr>
+          <a:lstStyle/>
+          <a:p>
+            <a:pPr indent="0" marL="0">
+              <a:buNone/>
+            </a:pPr>
+            <a:r>
+              <a:rPr lang="en-US" sz="1500" b="1" dirty="0">
+                <a:solidFill>
+                  <a:srgbClr val="1E2761"/>
+                </a:solidFill>
+                <a:latin typeface="Calibri" pitchFamily="34" charset="0"/>
+                <a:ea typeface="Calibri" pitchFamily="34" charset="-122"/>
+                <a:cs typeface="Calibri" pitchFamily="34" charset="-120"/>
+              </a:rPr>
+              <a:t>A · State + response</a:t>
+            </a:r>
+            <a:endParaRPr lang="en-US" sz="1500" dirty="0"/>
+          </a:p>
+        </p:txBody>
+      </p:sp>
+      <p:sp>
+        <p:nvSpPr>
+          <p:cNvPr id="9" name="Text 7"/>
+          <p:cNvSpPr/>
+          <p:nvPr/>
+        </p:nvSpPr>
+        <p:spPr>
+          <a:xfrm>
+            <a:off x="512064" y="1719072"/>
+            <a:ext cx="2340864" cy="950976"/>
+          </a:xfrm>
+          <a:prstGeom prst="rect">
+            <a:avLst/>
+          </a:prstGeom>
+          <a:noFill/>
+          <a:ln/>
+        </p:spPr>
+        <p:txBody>
+          <a:bodyPr wrap="square" lIns="0" tIns="0" rIns="0" bIns="0" rtlCol="0" anchor="t">
+            <a:normAutofit/>
+          </a:bodyPr>
+          <a:lstStyle/>
+          <a:p>
+            <a:pPr indent="0" marL="0">
+              <a:buNone/>
+            </a:pPr>
+            <a:r>
+              <a:rPr lang="en-US" sz="1150" dirty="0">
+                <a:solidFill>
+                  <a:srgbClr val="212121"/>
+                </a:solidFill>
+                <a:latin typeface="Calibri" pitchFamily="34" charset="0"/>
+                <a:ea typeface="Calibri" pitchFamily="34" charset="-122"/>
+                <a:cs typeface="Calibri" pitchFamily="34" charset="-120"/>
+              </a:rPr>
+              <a:t>Session, serialization, stream, TriageResult</a:t>
+            </a:r>
+            <a:endParaRPr lang="en-US" sz="1150" dirty="0"/>
+          </a:p>
+        </p:txBody>
+      </p:sp>
+      <p:sp>
+        <p:nvSpPr>
+          <p:cNvPr id="10" name="Shape 8"/>
+          <p:cNvSpPr/>
+          <p:nvPr/>
+        </p:nvSpPr>
+        <p:spPr>
+          <a:xfrm>
+            <a:off x="3035808" y="1892808"/>
+            <a:ext cx="164592" cy="219456"/>
+          </a:xfrm>
+          <a:prstGeom prst="chevron">
+            <a:avLst/>
+          </a:prstGeom>
+          <a:solidFill>
+            <a:srgbClr val="E8A87C"/>
+          </a:solidFill>
+          <a:ln/>
+        </p:spPr>
+      </p:sp>
+      <p:sp>
+        <p:nvSpPr>
+          <p:cNvPr id="11" name="Shape 9"/>
+          <p:cNvSpPr/>
+          <p:nvPr/>
+        </p:nvSpPr>
+        <p:spPr>
+          <a:xfrm>
+            <a:off x="3255264" y="1216152"/>
+            <a:ext cx="2633472" cy="1572768"/>
+          </a:xfrm>
+          <a:prstGeom prst="roundRect">
+            <a:avLst>
+              <a:gd name="adj" fmla="val 3488"/>
+            </a:avLst>
           </a:prstGeom>
           <a:solidFill>
             <a:srgbClr val="F3F4F6"/>
           </a:solidFill>
-          <a:ln w="11430">
+          <a:ln w="10160">
             <a:solidFill>
               <a:srgbClr val="D1D5DB"/>
             </a:solidFill>
@@ -11433,14 +11490,73 @@
       </p:sp>
       <p:sp>
         <p:nvSpPr>
-          <p:cNvPr id="6" name="Text 4"/>
-          <p:cNvSpPr/>
-          <p:nvPr/>
-        </p:nvSpPr>
-        <p:spPr>
-          <a:xfrm>
-            <a:off x="566928" y="1298448"/>
-            <a:ext cx="3712464" cy="411480"/>
+          <p:cNvPr id="12" name="Shape 10"/>
+          <p:cNvSpPr/>
+          <p:nvPr/>
+        </p:nvSpPr>
+        <p:spPr>
+          <a:xfrm>
+            <a:off x="3364992" y="1335024"/>
+            <a:ext cx="320040" cy="320040"/>
+          </a:xfrm>
+          <a:prstGeom prst="ellipse">
+            <a:avLst/>
+          </a:prstGeom>
+          <a:solidFill>
+            <a:srgbClr val="1E2761"/>
+          </a:solidFill>
+          <a:ln/>
+        </p:spPr>
+      </p:sp>
+      <p:sp>
+        <p:nvSpPr>
+          <p:cNvPr id="13" name="Text 11"/>
+          <p:cNvSpPr/>
+          <p:nvPr/>
+        </p:nvSpPr>
+        <p:spPr>
+          <a:xfrm>
+            <a:off x="3364992" y="1385316"/>
+            <a:ext cx="320040" cy="146304"/>
+          </a:xfrm>
+          <a:prstGeom prst="rect">
+            <a:avLst/>
+          </a:prstGeom>
+          <a:noFill/>
+          <a:ln/>
+        </p:spPr>
+        <p:txBody>
+          <a:bodyPr wrap="square" lIns="0" tIns="0" rIns="0" bIns="0" rtlCol="0" anchor="ctr"/>
+          <a:lstStyle/>
+          <a:p>
+            <a:pPr algn="ctr" indent="0" marL="0">
+              <a:buNone/>
+            </a:pPr>
+            <a:r>
+              <a:rPr lang="en-US" sz="900" b="1" dirty="0">
+                <a:solidFill>
+                  <a:srgbClr val="FFFFFF"/>
+                </a:solidFill>
+                <a:latin typeface="Calibri" pitchFamily="34" charset="0"/>
+                <a:ea typeface="Calibri" pitchFamily="34" charset="-122"/>
+                <a:cs typeface="Calibri" pitchFamily="34" charset="-120"/>
+              </a:rPr>
+              <a:t>2</a:t>
+            </a:r>
+            <a:endParaRPr lang="en-US" sz="900" dirty="0"/>
+          </a:p>
+        </p:txBody>
+      </p:sp>
+      <p:sp>
+        <p:nvSpPr>
+          <p:cNvPr id="14" name="Text 12"/>
+          <p:cNvSpPr/>
+          <p:nvPr/>
+        </p:nvSpPr>
+        <p:spPr>
+          <a:xfrm>
+            <a:off x="3785616" y="1335024"/>
+            <a:ext cx="1975104" cy="310896"/>
           </a:xfrm>
           <a:prstGeom prst="rect">
             <a:avLst/>
@@ -11458,7 +11574,7 @@
               <a:buNone/>
             </a:pPr>
             <a:r>
-              <a:rPr lang="en-US" sz="2000" b="1" dirty="0">
+              <a:rPr lang="en-US" sz="1500" b="1" dirty="0">
                 <a:solidFill>
                   <a:srgbClr val="1E2761"/>
                 </a:solidFill>
@@ -11466,41 +11582,40 @@
                 <a:ea typeface="Calibri" pitchFamily="34" charset="-122"/>
                 <a:cs typeface="Calibri" pitchFamily="34" charset="-120"/>
               </a:rPr>
-              <a:t>Part A</a:t>
-            </a:r>
-            <a:endParaRPr lang="en-US" sz="2000" dirty="0"/>
-          </a:p>
-        </p:txBody>
-      </p:sp>
-      <p:sp>
-        <p:nvSpPr>
-          <p:cNvPr id="7" name="Text 5"/>
-          <p:cNvSpPr/>
-          <p:nvPr/>
-        </p:nvSpPr>
-        <p:spPr>
-          <a:xfrm>
-            <a:off x="594360" y="1828800"/>
-            <a:ext cx="3639312" cy="2395728"/>
-          </a:xfrm>
-          <a:prstGeom prst="rect">
-            <a:avLst/>
-          </a:prstGeom>
-          <a:noFill/>
-          <a:ln/>
-        </p:spPr>
-        <p:txBody>
-          <a:bodyPr wrap="square" lIns="381" tIns="381" rIns="381" bIns="381" rtlCol="0" anchor="ctr">
+              <a:t>B · Robustness</a:t>
+            </a:r>
+            <a:endParaRPr lang="en-US" sz="1500" dirty="0"/>
+          </a:p>
+        </p:txBody>
+      </p:sp>
+      <p:sp>
+        <p:nvSpPr>
+          <p:cNvPr id="15" name="Text 13"/>
+          <p:cNvSpPr/>
+          <p:nvPr/>
+        </p:nvSpPr>
+        <p:spPr>
+          <a:xfrm>
+            <a:off x="3401568" y="1719072"/>
+            <a:ext cx="2340864" cy="950976"/>
+          </a:xfrm>
+          <a:prstGeom prst="rect">
+            <a:avLst/>
+          </a:prstGeom>
+          <a:noFill/>
+          <a:ln/>
+        </p:spPr>
+        <p:txBody>
+          <a:bodyPr wrap="square" lIns="0" tIns="0" rIns="0" bIns="0" rtlCol="0" anchor="t">
             <a:normAutofit/>
           </a:bodyPr>
           <a:lstStyle/>
           <a:p>
-            <a:pPr marL="342900" indent="-342900">
-              <a:buSzPct val="100000"/>
-              <a:buChar char="•"/>
-            </a:pPr>
-            <a:r>
-              <a:rPr lang="en-US" sz="1300" dirty="0">
+            <a:pPr indent="0" marL="0">
+              <a:buNone/>
+            </a:pPr>
+            <a:r>
+              <a:rPr lang="en-US" sz="1150" dirty="0">
                 <a:solidFill>
                   <a:srgbClr val="212121"/>
                 </a:solidFill>
@@ -11508,17 +11623,187 @@
                 <a:ea typeface="Calibri" pitchFamily="34" charset="-122"/>
                 <a:cs typeface="Calibri" pitchFamily="34" charset="-120"/>
               </a:rPr>
-              <a:t>Create and reuse AgentSession</a:t>
-            </a:r>
-            <a:endParaRPr lang="en-US" sz="1300" dirty="0"/>
-          </a:p>
-          <a:p>
-            <a:pPr marL="342900" indent="-342900">
-              <a:buSzPct val="100000"/>
-              <a:buChar char="•"/>
-            </a:pPr>
-            <a:r>
-              <a:rPr lang="en-US" sz="1300" dirty="0">
+              <a:t>Timing, guardrail, exception handling</a:t>
+            </a:r>
+            <a:endParaRPr lang="en-US" sz="1150" dirty="0"/>
+          </a:p>
+        </p:txBody>
+      </p:sp>
+      <p:sp>
+        <p:nvSpPr>
+          <p:cNvPr id="16" name="Shape 14"/>
+          <p:cNvSpPr/>
+          <p:nvPr/>
+        </p:nvSpPr>
+        <p:spPr>
+          <a:xfrm>
+            <a:off x="5925312" y="1892808"/>
+            <a:ext cx="164592" cy="219456"/>
+          </a:xfrm>
+          <a:prstGeom prst="chevron">
+            <a:avLst/>
+          </a:prstGeom>
+          <a:solidFill>
+            <a:srgbClr val="E8A87C"/>
+          </a:solidFill>
+          <a:ln/>
+        </p:spPr>
+      </p:sp>
+      <p:sp>
+        <p:nvSpPr>
+          <p:cNvPr id="17" name="Shape 15"/>
+          <p:cNvSpPr/>
+          <p:nvPr/>
+        </p:nvSpPr>
+        <p:spPr>
+          <a:xfrm>
+            <a:off x="6144768" y="1216152"/>
+            <a:ext cx="2633472" cy="1572768"/>
+          </a:xfrm>
+          <a:prstGeom prst="roundRect">
+            <a:avLst>
+              <a:gd name="adj" fmla="val 3488"/>
+            </a:avLst>
+          </a:prstGeom>
+          <a:solidFill>
+            <a:srgbClr val="F3F4F6"/>
+          </a:solidFill>
+          <a:ln w="10160">
+            <a:solidFill>
+              <a:srgbClr val="D1D5DB"/>
+            </a:solidFill>
+            <a:prstDash val="solid"/>
+          </a:ln>
+        </p:spPr>
+      </p:sp>
+      <p:sp>
+        <p:nvSpPr>
+          <p:cNvPr id="18" name="Shape 16"/>
+          <p:cNvSpPr/>
+          <p:nvPr/>
+        </p:nvSpPr>
+        <p:spPr>
+          <a:xfrm>
+            <a:off x="6254496" y="1335024"/>
+            <a:ext cx="320040" cy="320040"/>
+          </a:xfrm>
+          <a:prstGeom prst="ellipse">
+            <a:avLst/>
+          </a:prstGeom>
+          <a:solidFill>
+            <a:srgbClr val="1E2761"/>
+          </a:solidFill>
+          <a:ln/>
+        </p:spPr>
+      </p:sp>
+      <p:sp>
+        <p:nvSpPr>
+          <p:cNvPr id="19" name="Text 17"/>
+          <p:cNvSpPr/>
+          <p:nvPr/>
+        </p:nvSpPr>
+        <p:spPr>
+          <a:xfrm>
+            <a:off x="6254496" y="1385316"/>
+            <a:ext cx="320040" cy="146304"/>
+          </a:xfrm>
+          <a:prstGeom prst="rect">
+            <a:avLst/>
+          </a:prstGeom>
+          <a:noFill/>
+          <a:ln/>
+        </p:spPr>
+        <p:txBody>
+          <a:bodyPr wrap="square" lIns="0" tIns="0" rIns="0" bIns="0" rtlCol="0" anchor="ctr"/>
+          <a:lstStyle/>
+          <a:p>
+            <a:pPr algn="ctr" indent="0" marL="0">
+              <a:buNone/>
+            </a:pPr>
+            <a:r>
+              <a:rPr lang="en-US" sz="900" b="1" dirty="0">
+                <a:solidFill>
+                  <a:srgbClr val="FFFFFF"/>
+                </a:solidFill>
+                <a:latin typeface="Calibri" pitchFamily="34" charset="0"/>
+                <a:ea typeface="Calibri" pitchFamily="34" charset="-122"/>
+                <a:cs typeface="Calibri" pitchFamily="34" charset="-120"/>
+              </a:rPr>
+              <a:t>3</a:t>
+            </a:r>
+            <a:endParaRPr lang="en-US" sz="900" dirty="0"/>
+          </a:p>
+        </p:txBody>
+      </p:sp>
+      <p:sp>
+        <p:nvSpPr>
+          <p:cNvPr id="20" name="Text 18"/>
+          <p:cNvSpPr/>
+          <p:nvPr/>
+        </p:nvSpPr>
+        <p:spPr>
+          <a:xfrm>
+            <a:off x="6675120" y="1335024"/>
+            <a:ext cx="1975104" cy="310896"/>
+          </a:xfrm>
+          <a:prstGeom prst="rect">
+            <a:avLst/>
+          </a:prstGeom>
+          <a:noFill/>
+          <a:ln/>
+        </p:spPr>
+        <p:txBody>
+          <a:bodyPr wrap="square" lIns="0" tIns="0" rIns="0" bIns="0" rtlCol="0" anchor="ctr">
+            <a:normAutofit/>
+          </a:bodyPr>
+          <a:lstStyle/>
+          <a:p>
+            <a:pPr indent="0" marL="0">
+              <a:buNone/>
+            </a:pPr>
+            <a:r>
+              <a:rPr lang="en-US" sz="1500" b="1" dirty="0">
+                <a:solidFill>
+                  <a:srgbClr val="1E2761"/>
+                </a:solidFill>
+                <a:latin typeface="Calibri" pitchFamily="34" charset="0"/>
+                <a:ea typeface="Calibri" pitchFamily="34" charset="-122"/>
+                <a:cs typeface="Calibri" pitchFamily="34" charset="-120"/>
+              </a:rPr>
+              <a:t>C · Read</a:t>
+            </a:r>
+            <a:endParaRPr lang="en-US" sz="1500" dirty="0"/>
+          </a:p>
+        </p:txBody>
+      </p:sp>
+      <p:sp>
+        <p:nvSpPr>
+          <p:cNvPr id="21" name="Text 19"/>
+          <p:cNvSpPr/>
+          <p:nvPr/>
+        </p:nvSpPr>
+        <p:spPr>
+          <a:xfrm>
+            <a:off x="6291072" y="1719072"/>
+            <a:ext cx="2340864" cy="950976"/>
+          </a:xfrm>
+          <a:prstGeom prst="rect">
+            <a:avLst/>
+          </a:prstGeom>
+          <a:noFill/>
+          <a:ln/>
+        </p:spPr>
+        <p:txBody>
+          <a:bodyPr wrap="square" lIns="0" tIns="0" rIns="0" bIns="0" rtlCol="0" anchor="t">
+            <a:normAutofit/>
+          </a:bodyPr>
+          <a:lstStyle/>
+          <a:p>
+            <a:pPr indent="0" marL="0">
+              <a:buNone/>
+            </a:pPr>
+            <a:r>
+              <a:rPr lang="en-US" sz="1150" dirty="0">
                 <a:solidFill>
                   <a:srgbClr val="212121"/>
                 </a:solidFill>
@@ -11526,17 +11811,167 @@
                 <a:ea typeface="Calibri" pitchFamily="34" charset="-122"/>
                 <a:cs typeface="Calibri" pitchFamily="34" charset="-120"/>
               </a:rPr>
-              <a:t>Serialize and restore with to_dict/from_dict</a:t>
-            </a:r>
-            <a:endParaRPr lang="en-US" sz="1300" dirty="0"/>
-          </a:p>
-          <a:p>
-            <a:pPr marL="342900" indent="-342900">
-              <a:buSzPct val="100000"/>
-              <a:buChar char="•"/>
-            </a:pPr>
-            <a:r>
-              <a:rPr lang="en-US" sz="1300" dirty="0">
+              <a:t>Read-only Azure DevOps MCP</a:t>
+            </a:r>
+            <a:endParaRPr lang="en-US" sz="1150" dirty="0"/>
+          </a:p>
+        </p:txBody>
+      </p:sp>
+      <p:sp>
+        <p:nvSpPr>
+          <p:cNvPr id="22" name="Shape 20"/>
+          <p:cNvSpPr/>
+          <p:nvPr/>
+        </p:nvSpPr>
+        <p:spPr>
+          <a:xfrm>
+            <a:off x="365760" y="3044952"/>
+            <a:ext cx="2633472" cy="1572768"/>
+          </a:xfrm>
+          <a:prstGeom prst="roundRect">
+            <a:avLst>
+              <a:gd name="adj" fmla="val 3488"/>
+            </a:avLst>
+          </a:prstGeom>
+          <a:solidFill>
+            <a:srgbClr val="F3F4F6"/>
+          </a:solidFill>
+          <a:ln w="10160">
+            <a:solidFill>
+              <a:srgbClr val="D1D5DB"/>
+            </a:solidFill>
+            <a:prstDash val="solid"/>
+          </a:ln>
+        </p:spPr>
+      </p:sp>
+      <p:sp>
+        <p:nvSpPr>
+          <p:cNvPr id="23" name="Shape 21"/>
+          <p:cNvSpPr/>
+          <p:nvPr/>
+        </p:nvSpPr>
+        <p:spPr>
+          <a:xfrm>
+            <a:off x="475488" y="3163824"/>
+            <a:ext cx="320040" cy="320040"/>
+          </a:xfrm>
+          <a:prstGeom prst="ellipse">
+            <a:avLst/>
+          </a:prstGeom>
+          <a:solidFill>
+            <a:srgbClr val="1E2761"/>
+          </a:solidFill>
+          <a:ln/>
+        </p:spPr>
+      </p:sp>
+      <p:sp>
+        <p:nvSpPr>
+          <p:cNvPr id="24" name="Text 22"/>
+          <p:cNvSpPr/>
+          <p:nvPr/>
+        </p:nvSpPr>
+        <p:spPr>
+          <a:xfrm>
+            <a:off x="475488" y="3214116"/>
+            <a:ext cx="320040" cy="146304"/>
+          </a:xfrm>
+          <a:prstGeom prst="rect">
+            <a:avLst/>
+          </a:prstGeom>
+          <a:noFill/>
+          <a:ln/>
+        </p:spPr>
+        <p:txBody>
+          <a:bodyPr wrap="square" lIns="0" tIns="0" rIns="0" bIns="0" rtlCol="0" anchor="ctr"/>
+          <a:lstStyle/>
+          <a:p>
+            <a:pPr algn="ctr" indent="0" marL="0">
+              <a:buNone/>
+            </a:pPr>
+            <a:r>
+              <a:rPr lang="en-US" sz="900" b="1" dirty="0">
+                <a:solidFill>
+                  <a:srgbClr val="FFFFFF"/>
+                </a:solidFill>
+                <a:latin typeface="Calibri" pitchFamily="34" charset="0"/>
+                <a:ea typeface="Calibri" pitchFamily="34" charset="-122"/>
+                <a:cs typeface="Calibri" pitchFamily="34" charset="-120"/>
+              </a:rPr>
+              <a:t>4</a:t>
+            </a:r>
+            <a:endParaRPr lang="en-US" sz="900" dirty="0"/>
+          </a:p>
+        </p:txBody>
+      </p:sp>
+      <p:sp>
+        <p:nvSpPr>
+          <p:cNvPr id="25" name="Text 23"/>
+          <p:cNvSpPr/>
+          <p:nvPr/>
+        </p:nvSpPr>
+        <p:spPr>
+          <a:xfrm>
+            <a:off x="896112" y="3163824"/>
+            <a:ext cx="1975104" cy="310896"/>
+          </a:xfrm>
+          <a:prstGeom prst="rect">
+            <a:avLst/>
+          </a:prstGeom>
+          <a:noFill/>
+          <a:ln/>
+        </p:spPr>
+        <p:txBody>
+          <a:bodyPr wrap="square" lIns="0" tIns="0" rIns="0" bIns="0" rtlCol="0" anchor="ctr">
+            <a:normAutofit/>
+          </a:bodyPr>
+          <a:lstStyle/>
+          <a:p>
+            <a:pPr indent="0" marL="0">
+              <a:buNone/>
+            </a:pPr>
+            <a:r>
+              <a:rPr lang="en-US" sz="1500" b="1" dirty="0">
+                <a:solidFill>
+                  <a:srgbClr val="1E2761"/>
+                </a:solidFill>
+                <a:latin typeface="Calibri" pitchFamily="34" charset="0"/>
+                <a:ea typeface="Calibri" pitchFamily="34" charset="-122"/>
+                <a:cs typeface="Calibri" pitchFamily="34" charset="-120"/>
+              </a:rPr>
+              <a:t>D · Write</a:t>
+            </a:r>
+            <a:endParaRPr lang="en-US" sz="1500" dirty="0"/>
+          </a:p>
+        </p:txBody>
+      </p:sp>
+      <p:sp>
+        <p:nvSpPr>
+          <p:cNvPr id="26" name="Text 24"/>
+          <p:cNvSpPr/>
+          <p:nvPr/>
+        </p:nvSpPr>
+        <p:spPr>
+          <a:xfrm>
+            <a:off x="512064" y="3547872"/>
+            <a:ext cx="2340864" cy="950976"/>
+          </a:xfrm>
+          <a:prstGeom prst="rect">
+            <a:avLst/>
+          </a:prstGeom>
+          <a:noFill/>
+          <a:ln/>
+        </p:spPr>
+        <p:txBody>
+          <a:bodyPr wrap="square" lIns="0" tIns="0" rIns="0" bIns="0" rtlCol="0" anchor="t">
+            <a:normAutofit/>
+          </a:bodyPr>
+          <a:lstStyle/>
+          <a:p>
+            <a:pPr indent="0" marL="0">
+              <a:buNone/>
+            </a:pPr>
+            <a:r>
+              <a:rPr lang="en-US" sz="1150" dirty="0">
                 <a:solidFill>
                   <a:srgbClr val="212121"/>
                 </a:solidFill>
@@ -11544,48 +11979,52 @@
                 <a:ea typeface="Calibri" pitchFamily="34" charset="-122"/>
                 <a:cs typeface="Calibri" pitchFamily="34" charset="-120"/>
               </a:rPr>
-              <a:t>Stream display updates</a:t>
-            </a:r>
-            <a:endParaRPr lang="en-US" sz="1300" dirty="0"/>
-          </a:p>
-          <a:p>
-            <a:pPr marL="342900" indent="-342900">
-              <a:buSzPct val="100000"/>
-              <a:buChar char="•"/>
-            </a:pPr>
-            <a:r>
-              <a:rPr lang="en-US" sz="1300" dirty="0">
-                <a:solidFill>
-                  <a:srgbClr val="212121"/>
-                </a:solidFill>
-                <a:latin typeface="Calibri" pitchFamily="34" charset="0"/>
-                <a:ea typeface="Calibri" pitchFamily="34" charset="-122"/>
-                <a:cs typeface="Calibri" pitchFamily="34" charset="-120"/>
-              </a:rPr>
-              <a:t>Finalize a typed TriageResult</a:t>
-            </a:r>
-            <a:endParaRPr lang="en-US" sz="1300" dirty="0"/>
-          </a:p>
-        </p:txBody>
-      </p:sp>
-      <p:sp>
-        <p:nvSpPr>
-          <p:cNvPr id="8" name="Shape 6"/>
-          <p:cNvSpPr/>
-          <p:nvPr/>
-        </p:nvSpPr>
-        <p:spPr>
-          <a:xfrm>
-            <a:off x="4663440" y="1078992"/>
-            <a:ext cx="4114800" cy="3493008"/>
+              <a:t>Explicitly approved work-item mutation</a:t>
+            </a:r>
+            <a:endParaRPr lang="en-US" sz="1150" dirty="0"/>
+          </a:p>
+        </p:txBody>
+      </p:sp>
+      <p:sp>
+        <p:nvSpPr>
+          <p:cNvPr id="27" name="Shape 25"/>
+          <p:cNvSpPr/>
+          <p:nvPr/>
+        </p:nvSpPr>
+        <p:spPr>
+          <a:xfrm>
+            <a:off x="3035808" y="3721608"/>
+            <a:ext cx="164592" cy="219456"/>
+          </a:xfrm>
+          <a:prstGeom prst="chevron">
+            <a:avLst/>
+          </a:prstGeom>
+          <a:solidFill>
+            <a:srgbClr val="E8A87C"/>
+          </a:solidFill>
+          <a:ln/>
+        </p:spPr>
+      </p:sp>
+      <p:sp>
+        <p:nvSpPr>
+          <p:cNvPr id="28" name="Shape 26"/>
+          <p:cNvSpPr/>
+          <p:nvPr/>
+        </p:nvSpPr>
+        <p:spPr>
+          <a:xfrm>
+            <a:off x="3255264" y="3044952"/>
+            <a:ext cx="2633472" cy="1572768"/>
           </a:xfrm>
           <a:prstGeom prst="roundRect">
-            <a:avLst/>
+            <a:avLst>
+              <a:gd name="adj" fmla="val 3488"/>
+            </a:avLst>
           </a:prstGeom>
           <a:solidFill>
             <a:srgbClr val="CADCFC"/>
           </a:solidFill>
-          <a:ln w="11430">
+          <a:ln w="10160">
             <a:solidFill>
               <a:srgbClr val="1E2761"/>
             </a:solidFill>
@@ -11595,14 +12034,73 @@
       </p:sp>
       <p:sp>
         <p:nvSpPr>
-          <p:cNvPr id="9" name="Text 7"/>
-          <p:cNvSpPr/>
-          <p:nvPr/>
-        </p:nvSpPr>
-        <p:spPr>
-          <a:xfrm>
-            <a:off x="4864608" y="1298448"/>
-            <a:ext cx="3712464" cy="411480"/>
+          <p:cNvPr id="29" name="Shape 27"/>
+          <p:cNvSpPr/>
+          <p:nvPr/>
+        </p:nvSpPr>
+        <p:spPr>
+          <a:xfrm>
+            <a:off x="3364992" y="3163824"/>
+            <a:ext cx="320040" cy="320040"/>
+          </a:xfrm>
+          <a:prstGeom prst="ellipse">
+            <a:avLst/>
+          </a:prstGeom>
+          <a:solidFill>
+            <a:srgbClr val="1E2761"/>
+          </a:solidFill>
+          <a:ln/>
+        </p:spPr>
+      </p:sp>
+      <p:sp>
+        <p:nvSpPr>
+          <p:cNvPr id="30" name="Text 28"/>
+          <p:cNvSpPr/>
+          <p:nvPr/>
+        </p:nvSpPr>
+        <p:spPr>
+          <a:xfrm>
+            <a:off x="3364992" y="3214116"/>
+            <a:ext cx="320040" cy="146304"/>
+          </a:xfrm>
+          <a:prstGeom prst="rect">
+            <a:avLst/>
+          </a:prstGeom>
+          <a:noFill/>
+          <a:ln/>
+        </p:spPr>
+        <p:txBody>
+          <a:bodyPr wrap="square" lIns="0" tIns="0" rIns="0" bIns="0" rtlCol="0" anchor="ctr"/>
+          <a:lstStyle/>
+          <a:p>
+            <a:pPr algn="ctr" indent="0" marL="0">
+              <a:buNone/>
+            </a:pPr>
+            <a:r>
+              <a:rPr lang="en-US" sz="900" b="1" dirty="0">
+                <a:solidFill>
+                  <a:srgbClr val="FFFFFF"/>
+                </a:solidFill>
+                <a:latin typeface="Calibri" pitchFamily="34" charset="0"/>
+                <a:ea typeface="Calibri" pitchFamily="34" charset="-122"/>
+                <a:cs typeface="Calibri" pitchFamily="34" charset="-120"/>
+              </a:rPr>
+              <a:t>5</a:t>
+            </a:r>
+            <a:endParaRPr lang="en-US" sz="900" dirty="0"/>
+          </a:p>
+        </p:txBody>
+      </p:sp>
+      <p:sp>
+        <p:nvSpPr>
+          <p:cNvPr id="31" name="Text 29"/>
+          <p:cNvSpPr/>
+          <p:nvPr/>
+        </p:nvSpPr>
+        <p:spPr>
+          <a:xfrm>
+            <a:off x="3785616" y="3163824"/>
+            <a:ext cx="1975104" cy="310896"/>
           </a:xfrm>
           <a:prstGeom prst="rect">
             <a:avLst/>
@@ -11620,7 +12118,7 @@
               <a:buNone/>
             </a:pPr>
             <a:r>
-              <a:rPr lang="en-US" sz="2000" b="1" dirty="0">
+              <a:rPr lang="en-US" sz="1500" b="1" dirty="0">
                 <a:solidFill>
                   <a:srgbClr val="1E2761"/>
                 </a:solidFill>
@@ -11628,41 +12126,40 @@
                 <a:ea typeface="Calibri" pitchFamily="34" charset="-122"/>
                 <a:cs typeface="Calibri" pitchFamily="34" charset="-120"/>
               </a:rPr>
-              <a:t>Part B</a:t>
-            </a:r>
-            <a:endParaRPr lang="en-US" sz="2000" dirty="0"/>
-          </a:p>
-        </p:txBody>
-      </p:sp>
-      <p:sp>
-        <p:nvSpPr>
-          <p:cNvPr id="10" name="Text 8"/>
-          <p:cNvSpPr/>
-          <p:nvPr/>
-        </p:nvSpPr>
-        <p:spPr>
-          <a:xfrm>
-            <a:off x="4892040" y="1828800"/>
-            <a:ext cx="3639312" cy="2395728"/>
-          </a:xfrm>
-          <a:prstGeom prst="rect">
-            <a:avLst/>
-          </a:prstGeom>
-          <a:noFill/>
-          <a:ln/>
-        </p:spPr>
-        <p:txBody>
-          <a:bodyPr wrap="square" lIns="381" tIns="381" rIns="381" bIns="381" rtlCol="0" anchor="ctr">
+              <a:t>E · Evaluate</a:t>
+            </a:r>
+            <a:endParaRPr lang="en-US" sz="1500" dirty="0"/>
+          </a:p>
+        </p:txBody>
+      </p:sp>
+      <p:sp>
+        <p:nvSpPr>
+          <p:cNvPr id="32" name="Text 30"/>
+          <p:cNvSpPr/>
+          <p:nvPr/>
+        </p:nvSpPr>
+        <p:spPr>
+          <a:xfrm>
+            <a:off x="3401568" y="3547872"/>
+            <a:ext cx="2340864" cy="950976"/>
+          </a:xfrm>
+          <a:prstGeom prst="rect">
+            <a:avLst/>
+          </a:prstGeom>
+          <a:noFill/>
+          <a:ln/>
+        </p:spPr>
+        <p:txBody>
+          <a:bodyPr wrap="square" lIns="0" tIns="0" rIns="0" bIns="0" rtlCol="0" anchor="t">
             <a:normAutofit/>
           </a:bodyPr>
           <a:lstStyle/>
           <a:p>
-            <a:pPr marL="342900" indent="-342900">
-              <a:buSzPct val="100000"/>
-              <a:buChar char="•"/>
-            </a:pPr>
-            <a:r>
-              <a:rPr lang="en-US" sz="1300" dirty="0">
+            <a:pPr indent="0" marL="0">
+              <a:buNone/>
+            </a:pPr>
+            <a:r>
+              <a:rPr lang="en-US" sz="1150" dirty="0">
                 <a:solidFill>
                   <a:srgbClr val="212121"/>
                 </a:solidFill>
@@ -11670,69 +12167,15 @@
                 <a:ea typeface="Calibri" pitchFamily="34" charset="-122"/>
                 <a:cs typeface="Calibri" pitchFamily="34" charset="-120"/>
               </a:rPr>
-              <a:t>Add logging/timing middleware</a:t>
-            </a:r>
-            <a:endParaRPr lang="en-US" sz="1300" dirty="0"/>
-          </a:p>
-          <a:p>
-            <a:pPr marL="342900" indent="-342900">
-              <a:buSzPct val="100000"/>
-              <a:buChar char="•"/>
-            </a:pPr>
-            <a:r>
-              <a:rPr lang="en-US" sz="1300" dirty="0">
-                <a:solidFill>
-                  <a:srgbClr val="212121"/>
-                </a:solidFill>
-                <a:latin typeface="Calibri" pitchFamily="34" charset="0"/>
-                <a:ea typeface="Calibri" pitchFamily="34" charset="-122"/>
-                <a:cs typeface="Calibri" pitchFamily="34" charset="-120"/>
-              </a:rPr>
-              <a:t>Short-circuit one blocked request</a:t>
-            </a:r>
-            <a:endParaRPr lang="en-US" sz="1300" dirty="0"/>
-          </a:p>
-          <a:p>
-            <a:pPr marL="342900" indent="-342900">
-              <a:buSzPct val="100000"/>
-              <a:buChar char="•"/>
-            </a:pPr>
-            <a:r>
-              <a:rPr lang="en-US" sz="1300" dirty="0">
-                <a:solidFill>
-                  <a:srgbClr val="212121"/>
-                </a:solidFill>
-                <a:latin typeface="Calibri" pitchFamily="34" charset="0"/>
-                <a:ea typeface="Calibri" pitchFamily="34" charset="-122"/>
-                <a:cs typeface="Calibri" pitchFamily="34" charset="-120"/>
-              </a:rPr>
-              <a:t>Handle a classified exception</a:t>
-            </a:r>
-            <a:endParaRPr lang="en-US" sz="1300" dirty="0"/>
-          </a:p>
-          <a:p>
-            <a:pPr marL="342900" indent="-342900">
-              <a:buSzPct val="100000"/>
-              <a:buChar char="•"/>
-            </a:pPr>
-            <a:r>
-              <a:rPr lang="en-US" sz="1300" dirty="0">
-                <a:solidFill>
-                  <a:srgbClr val="212121"/>
-                </a:solidFill>
-                <a:latin typeface="Calibri" pitchFamily="34" charset="0"/>
-                <a:ea typeface="Calibri" pitchFamily="34" charset="-122"/>
-                <a:cs typeface="Calibri" pitchFamily="34" charset="-120"/>
-              </a:rPr>
-              <a:t>Demonstrate a bounded retry policy</a:t>
-            </a:r>
-            <a:endParaRPr lang="en-US" sz="1300" dirty="0"/>
-          </a:p>
-        </p:txBody>
-      </p:sp>
-      <p:sp>
-        <p:nvSpPr>
-          <p:cNvPr id="11" name="Shape 9"/>
+              <a:t>Exact local checks plus selected Foundry evaluators</a:t>
+            </a:r>
+            <a:endParaRPr lang="en-US" sz="1150" dirty="0"/>
+          </a:p>
+        </p:txBody>
+      </p:sp>
+      <p:sp>
+        <p:nvSpPr>
+          <p:cNvPr id="33" name="Shape 31"/>
           <p:cNvSpPr/>
           <p:nvPr/>
         </p:nvSpPr>
@@ -11755,7 +12198,7 @@
       </p:sp>
       <p:sp>
         <p:nvSpPr>
-          <p:cNvPr id="12" name="Text 10"/>
+          <p:cNvPr id="34" name="Text 32"/>
           <p:cNvSpPr/>
           <p:nvPr/>
         </p:nvSpPr>
@@ -11922,7 +12365,7 @@
                 <a:ea typeface="Calibri" pitchFamily="34" charset="-122"/>
                 <a:cs typeface="Calibri" pitchFamily="34" charset="-120"/>
               </a:rPr>
-              <a:t>Part C + D: read before write</a:t>
+              <a:t>Part A + B: runtime foundation</a:t>
             </a:r>
             <a:endParaRPr lang="en-US" sz="2800" dirty="0"/>
           </a:p>
@@ -11988,7 +12431,7 @@
                 <a:ea typeface="Calibri" pitchFamily="34" charset="-122"/>
                 <a:cs typeface="Calibri" pitchFamily="34" charset="-120"/>
               </a:rPr>
-              <a:t>Part C · Read-only</a:t>
+              <a:t>Part A</a:t>
             </a:r>
             <a:endParaRPr lang="en-US" sz="2000" dirty="0"/>
           </a:p>
@@ -12030,7 +12473,7 @@
                 <a:ea typeface="Calibri" pitchFamily="34" charset="-122"/>
                 <a:cs typeface="Calibri" pitchFamily="34" charset="-120"/>
               </a:rPr>
-              <a:t>X-MCP-Toolsets: wit</a:t>
+              <a:t>Create and reuse AgentSession</a:t>
             </a:r>
             <a:endParaRPr lang="en-US" sz="1300" dirty="0"/>
           </a:p>
@@ -12048,7 +12491,7 @@
                 <a:ea typeface="Calibri" pitchFamily="34" charset="-122"/>
                 <a:cs typeface="Calibri" pitchFamily="34" charset="-120"/>
               </a:rPr>
-              <a:t>X-MCP-Readonly: true</a:t>
+              <a:t>Serialize and restore with to_dict/from_dict</a:t>
             </a:r>
             <a:endParaRPr lang="en-US" sz="1300" dirty="0"/>
           </a:p>
@@ -12066,7 +12509,7 @@
                 <a:ea typeface="Calibri" pitchFamily="34" charset="-122"/>
                 <a:cs typeface="Calibri" pitchFamily="34" charset="-120"/>
               </a:rPr>
-              <a:t>wit_work_item with get or my</a:t>
+              <a:t>Stream display updates</a:t>
             </a:r>
             <a:endParaRPr lang="en-US" sz="1300" dirty="0"/>
           </a:p>
@@ -12084,7 +12527,7 @@
                 <a:ea typeface="Calibri" pitchFamily="34" charset="-122"/>
                 <a:cs typeface="Calibri" pitchFamily="34" charset="-120"/>
               </a:rPr>
-              <a:t>Verify result against the workshop project</a:t>
+              <a:t>Finalize a typed TriageResult</a:t>
             </a:r>
             <a:endParaRPr lang="en-US" sz="1300" dirty="0"/>
           </a:p>
@@ -12150,7 +12593,7 @@
                 <a:ea typeface="Calibri" pitchFamily="34" charset="-122"/>
                 <a:cs typeface="Calibri" pitchFamily="34" charset="-120"/>
               </a:rPr>
-              <a:t>Part D · Approved write</a:t>
+              <a:t>Part B</a:t>
             </a:r>
             <a:endParaRPr lang="en-US" sz="2000" dirty="0"/>
           </a:p>
@@ -12192,7 +12635,7 @@
                 <a:ea typeface="Calibri" pitchFamily="34" charset="-122"/>
                 <a:cs typeface="Calibri" pitchFamily="34" charset="-120"/>
               </a:rPr>
-              <a:t>Allow wit_work_item_write</a:t>
+              <a:t>Add logging/timing middleware</a:t>
             </a:r>
             <a:endParaRPr lang="en-US" sz="1300" dirty="0"/>
           </a:p>
@@ -12210,7 +12653,7 @@
                 <a:ea typeface="Calibri" pitchFamily="34" charset="-122"/>
                 <a:cs typeface="Calibri" pitchFamily="34" charset="-120"/>
               </a:rPr>
-              <a:t>Use create or update</a:t>
+              <a:t>Short-circuit one blocked request</a:t>
             </a:r>
             <a:endParaRPr lang="en-US" sz="1300" dirty="0"/>
           </a:p>
@@ -12228,7 +12671,7 @@
                 <a:ea typeface="Calibri" pitchFamily="34" charset="-122"/>
                 <a:cs typeface="Calibri" pitchFamily="34" charset="-120"/>
               </a:rPr>
-              <a:t>Show exact arguments before approval</a:t>
+              <a:t>Handle a classified exception</a:t>
             </a:r>
             <a:endParaRPr lang="en-US" sz="1300" dirty="0"/>
           </a:p>
@@ -12246,7 +12689,7 @@
                 <a:ea typeface="Calibri" pitchFamily="34" charset="-122"/>
                 <a:cs typeface="Calibri" pitchFamily="34" charset="-120"/>
               </a:rPr>
-              <a:t>Read again to verify the mutation</a:t>
+              <a:t>Demonstrate a bounded retry policy</a:t>
             </a:r>
             <a:endParaRPr lang="en-US" sz="1300" dirty="0"/>
           </a:p>
@@ -12310,7 +12753,7 @@
                 <a:ea typeface="Calibri" pitchFamily="34" charset="-122"/>
                 <a:cs typeface="Calibri" pitchFamily="34" charset="-120"/>
               </a:rPr>
-              <a:t>Source: https://learn.microsoft.com/en-us/azure/devops/mcp-server/remote-mcp-server?view=azure-devops  ·  +1 in notes</a:t>
+              <a:t>Source: https://learn.microsoft.com/en-us/agent-framework/concepts/agents/conversations/session?tabs=python  ·  +2 in notes</a:t>
             </a:r>
             <a:endParaRPr lang="en-US" sz="820" dirty="0"/>
           </a:p>

--- a/decks/day3/module-7-eval-lab-kickoff.pptx
+++ b/decks/day3/module-7-eval-lab-kickoff.pptx
@@ -8232,7 +8232,7 @@
                 <a:ea typeface="Consolas" pitchFamily="34" charset="-122"/>
                 <a:cs typeface="Consolas" pitchFamily="34" charset="-120"/>
               </a:rPr>
-              <a:t>    "wit_work_item",</a:t>
+              <a:t>    </a:t>
             </a:r>
             <a:endParaRPr lang="en-US" sz="1080" dirty="0"/>
           </a:p>
@@ -8243,17 +8243,14 @@
             <a:r>
               <a:rPr lang="en-US" sz="1080" dirty="0">
                 <a:solidFill>
-                  <a:srgbClr val="212121"/>
+                  <a:srgbClr val="1F7A4D"/>
                 </a:solidFill>
                 <a:latin typeface="Consolas" pitchFamily="34" charset="0"/>
                 <a:ea typeface="Consolas" pitchFamily="34" charset="-122"/>
                 <a:cs typeface="Consolas" pitchFamily="34" charset="-120"/>
               </a:rPr>
-              <a:t>    {"action": "get", "id": 42},</a:t>
-            </a:r>
-            <a:endParaRPr lang="en-US" sz="1080" dirty="0"/>
-          </a:p>
-          <a:p>
+              <a:t>"wit_work_item"</a:t>
+            </a:r>
             <a:pPr indent="0" marL="0">
               <a:buNone/>
             </a:pPr>
@@ -8266,14 +8263,8 @@
                 <a:ea typeface="Consolas" pitchFamily="34" charset="-122"/>
                 <a:cs typeface="Consolas" pitchFamily="34" charset="-120"/>
               </a:rPr>
-              <a:t>)</a:t>
-            </a:r>
-            <a:endParaRPr lang="en-US" sz="1080" dirty="0"/>
-          </a:p>
-          <a:p>
-            <a:pPr indent="0" marL="0">
-              <a:buNone/>
-            </a:pPr>
+              <a:t>,</a:t>
+            </a:r>
             <a:endParaRPr lang="en-US" sz="1080" dirty="0"/>
           </a:p>
           <a:p>
@@ -8289,7 +8280,7 @@
                 <a:ea typeface="Consolas" pitchFamily="34" charset="-122"/>
                 <a:cs typeface="Consolas" pitchFamily="34" charset="-120"/>
               </a:rPr>
-              <a:t>local = LocalEvaluator(</a:t>
+              <a:t>    {</a:t>
             </a:r>
             <a:endParaRPr lang="en-US" sz="1080" dirty="0"/>
           </a:p>
@@ -8300,17 +8291,14 @@
             <a:r>
               <a:rPr lang="en-US" sz="1080" dirty="0">
                 <a:solidFill>
-                  <a:srgbClr val="212121"/>
+                  <a:srgbClr val="1F7A4D"/>
                 </a:solidFill>
                 <a:latin typeface="Consolas" pitchFamily="34" charset="0"/>
                 <a:ea typeface="Consolas" pitchFamily="34" charset="-122"/>
                 <a:cs typeface="Consolas" pitchFamily="34" charset="-120"/>
               </a:rPr>
-              <a:t>    tool_calls_present,</a:t>
-            </a:r>
-            <a:endParaRPr lang="en-US" sz="1080" dirty="0"/>
-          </a:p>
-          <a:p>
+              <a:t>"action"</a:t>
+            </a:r>
             <a:pPr indent="0" marL="0">
               <a:buNone/>
             </a:pPr>
@@ -8323,34 +8311,22 @@
                 <a:ea typeface="Consolas" pitchFamily="34" charset="-122"/>
                 <a:cs typeface="Consolas" pitchFamily="34" charset="-120"/>
               </a:rPr>
-              <a:t>    tool_call_args_match,</a:t>
-            </a:r>
-            <a:endParaRPr lang="en-US" sz="1080" dirty="0"/>
-          </a:p>
-          <a:p>
+              <a:t>: </a:t>
+            </a:r>
             <a:pPr indent="0" marL="0">
               <a:buNone/>
             </a:pPr>
             <a:r>
               <a:rPr lang="en-US" sz="1080" dirty="0">
                 <a:solidFill>
-                  <a:srgbClr val="212121"/>
+                  <a:srgbClr val="1F7A4D"/>
                 </a:solidFill>
                 <a:latin typeface="Consolas" pitchFamily="34" charset="0"/>
                 <a:ea typeface="Consolas" pitchFamily="34" charset="-122"/>
                 <a:cs typeface="Consolas" pitchFamily="34" charset="-120"/>
               </a:rPr>
-              <a:t>)</a:t>
-            </a:r>
-            <a:endParaRPr lang="en-US" sz="1080" dirty="0"/>
-          </a:p>
-          <a:p>
-            <a:pPr indent="0" marL="0">
-              <a:buNone/>
-            </a:pPr>
-            <a:endParaRPr lang="en-US" sz="1080" dirty="0"/>
-          </a:p>
-          <a:p>
+              <a:t>"get"</a:t>
+            </a:r>
             <a:pPr indent="0" marL="0">
               <a:buNone/>
             </a:pPr>
@@ -8363,28 +8339,22 @@
                 <a:ea typeface="Consolas" pitchFamily="34" charset="-122"/>
                 <a:cs typeface="Consolas" pitchFamily="34" charset="-120"/>
               </a:rPr>
-              <a:t>results = await evaluate_agent(</a:t>
-            </a:r>
-            <a:endParaRPr lang="en-US" sz="1080" dirty="0"/>
-          </a:p>
-          <a:p>
+              <a:t>, </a:t>
+            </a:r>
             <a:pPr indent="0" marL="0">
               <a:buNone/>
             </a:pPr>
             <a:r>
               <a:rPr lang="en-US" sz="1080" dirty="0">
                 <a:solidFill>
-                  <a:srgbClr val="212121"/>
+                  <a:srgbClr val="1F7A4D"/>
                 </a:solidFill>
                 <a:latin typeface="Consolas" pitchFamily="34" charset="0"/>
                 <a:ea typeface="Consolas" pitchFamily="34" charset="-122"/>
                 <a:cs typeface="Consolas" pitchFamily="34" charset="-120"/>
               </a:rPr>
-              <a:t>    agent=agent,</a:t>
-            </a:r>
-            <a:endParaRPr lang="en-US" sz="1080" dirty="0"/>
-          </a:p>
-          <a:p>
+              <a:t>"id"</a:t>
+            </a:r>
             <a:pPr indent="0" marL="0">
               <a:buNone/>
             </a:pPr>
@@ -8397,7 +8367,217 @@
                 <a:ea typeface="Consolas" pitchFamily="34" charset="-122"/>
                 <a:cs typeface="Consolas" pitchFamily="34" charset="-120"/>
               </a:rPr>
-              <a:t>    queries=["Get work item 42."],</a:t>
+              <a:t>: 42},</a:t>
+            </a:r>
+            <a:endParaRPr lang="en-US" sz="1080" dirty="0"/>
+          </a:p>
+          <a:p>
+            <a:pPr indent="0" marL="0">
+              <a:buNone/>
+            </a:pPr>
+            <a:r>
+              <a:rPr lang="en-US" sz="1080" dirty="0">
+                <a:solidFill>
+                  <a:srgbClr val="212121"/>
+                </a:solidFill>
+                <a:latin typeface="Consolas" pitchFamily="34" charset="0"/>
+                <a:ea typeface="Consolas" pitchFamily="34" charset="-122"/>
+                <a:cs typeface="Consolas" pitchFamily="34" charset="-120"/>
+              </a:rPr>
+              <a:t>)</a:t>
+            </a:r>
+            <a:endParaRPr lang="en-US" sz="1080" dirty="0"/>
+          </a:p>
+          <a:p>
+            <a:pPr indent="0" marL="0">
+              <a:buNone/>
+            </a:pPr>
+            <a:endParaRPr lang="en-US" sz="1080" dirty="0"/>
+          </a:p>
+          <a:p>
+            <a:pPr indent="0" marL="0">
+              <a:buNone/>
+            </a:pPr>
+            <a:r>
+              <a:rPr lang="en-US" sz="1080" dirty="0">
+                <a:solidFill>
+                  <a:srgbClr val="212121"/>
+                </a:solidFill>
+                <a:latin typeface="Consolas" pitchFamily="34" charset="0"/>
+                <a:ea typeface="Consolas" pitchFamily="34" charset="-122"/>
+                <a:cs typeface="Consolas" pitchFamily="34" charset="-120"/>
+              </a:rPr>
+              <a:t>local = LocalEvaluator(</a:t>
+            </a:r>
+            <a:endParaRPr lang="en-US" sz="1080" dirty="0"/>
+          </a:p>
+          <a:p>
+            <a:pPr indent="0" marL="0">
+              <a:buNone/>
+            </a:pPr>
+            <a:r>
+              <a:rPr lang="en-US" sz="1080" dirty="0">
+                <a:solidFill>
+                  <a:srgbClr val="212121"/>
+                </a:solidFill>
+                <a:latin typeface="Consolas" pitchFamily="34" charset="0"/>
+                <a:ea typeface="Consolas" pitchFamily="34" charset="-122"/>
+                <a:cs typeface="Consolas" pitchFamily="34" charset="-120"/>
+              </a:rPr>
+              <a:t>    tool_calls_present,</a:t>
+            </a:r>
+            <a:endParaRPr lang="en-US" sz="1080" dirty="0"/>
+          </a:p>
+          <a:p>
+            <a:pPr indent="0" marL="0">
+              <a:buNone/>
+            </a:pPr>
+            <a:r>
+              <a:rPr lang="en-US" sz="1080" dirty="0">
+                <a:solidFill>
+                  <a:srgbClr val="212121"/>
+                </a:solidFill>
+                <a:latin typeface="Consolas" pitchFamily="34" charset="0"/>
+                <a:ea typeface="Consolas" pitchFamily="34" charset="-122"/>
+                <a:cs typeface="Consolas" pitchFamily="34" charset="-120"/>
+              </a:rPr>
+              <a:t>    tool_call_args_match,</a:t>
+            </a:r>
+            <a:endParaRPr lang="en-US" sz="1080" dirty="0"/>
+          </a:p>
+          <a:p>
+            <a:pPr indent="0" marL="0">
+              <a:buNone/>
+            </a:pPr>
+            <a:r>
+              <a:rPr lang="en-US" sz="1080" dirty="0">
+                <a:solidFill>
+                  <a:srgbClr val="212121"/>
+                </a:solidFill>
+                <a:latin typeface="Consolas" pitchFamily="34" charset="0"/>
+                <a:ea typeface="Consolas" pitchFamily="34" charset="-122"/>
+                <a:cs typeface="Consolas" pitchFamily="34" charset="-120"/>
+              </a:rPr>
+              <a:t>)</a:t>
+            </a:r>
+            <a:endParaRPr lang="en-US" sz="1080" dirty="0"/>
+          </a:p>
+          <a:p>
+            <a:pPr indent="0" marL="0">
+              <a:buNone/>
+            </a:pPr>
+            <a:endParaRPr lang="en-US" sz="1080" dirty="0"/>
+          </a:p>
+          <a:p>
+            <a:pPr indent="0" marL="0">
+              <a:buNone/>
+            </a:pPr>
+            <a:r>
+              <a:rPr lang="en-US" sz="1080" dirty="0">
+                <a:solidFill>
+                  <a:srgbClr val="212121"/>
+                </a:solidFill>
+                <a:latin typeface="Consolas" pitchFamily="34" charset="0"/>
+                <a:ea typeface="Consolas" pitchFamily="34" charset="-122"/>
+                <a:cs typeface="Consolas" pitchFamily="34" charset="-120"/>
+              </a:rPr>
+              <a:t>results = </a:t>
+            </a:r>
+            <a:endParaRPr lang="en-US" sz="1080" dirty="0"/>
+          </a:p>
+          <a:p>
+            <a:pPr indent="0" marL="0">
+              <a:buNone/>
+            </a:pPr>
+            <a:r>
+              <a:rPr lang="en-US" sz="1080" dirty="0">
+                <a:solidFill>
+                  <a:srgbClr val="1E2761"/>
+                </a:solidFill>
+                <a:latin typeface="Consolas" pitchFamily="34" charset="0"/>
+                <a:ea typeface="Consolas" pitchFamily="34" charset="-122"/>
+                <a:cs typeface="Consolas" pitchFamily="34" charset="-120"/>
+              </a:rPr>
+              <a:t>await</a:t>
+            </a:r>
+            <a:pPr indent="0" marL="0">
+              <a:buNone/>
+            </a:pPr>
+            <a:r>
+              <a:rPr lang="en-US" sz="1080" dirty="0">
+                <a:solidFill>
+                  <a:srgbClr val="212121"/>
+                </a:solidFill>
+                <a:latin typeface="Consolas" pitchFamily="34" charset="0"/>
+                <a:ea typeface="Consolas" pitchFamily="34" charset="-122"/>
+                <a:cs typeface="Consolas" pitchFamily="34" charset="-120"/>
+              </a:rPr>
+              <a:t> evaluate_agent(</a:t>
+            </a:r>
+            <a:endParaRPr lang="en-US" sz="1080" dirty="0"/>
+          </a:p>
+          <a:p>
+            <a:pPr indent="0" marL="0">
+              <a:buNone/>
+            </a:pPr>
+            <a:r>
+              <a:rPr lang="en-US" sz="1080" dirty="0">
+                <a:solidFill>
+                  <a:srgbClr val="212121"/>
+                </a:solidFill>
+                <a:latin typeface="Consolas" pitchFamily="34" charset="0"/>
+                <a:ea typeface="Consolas" pitchFamily="34" charset="-122"/>
+                <a:cs typeface="Consolas" pitchFamily="34" charset="-120"/>
+              </a:rPr>
+              <a:t>    agent=agent,</a:t>
+            </a:r>
+            <a:endParaRPr lang="en-US" sz="1080" dirty="0"/>
+          </a:p>
+          <a:p>
+            <a:pPr indent="0" marL="0">
+              <a:buNone/>
+            </a:pPr>
+            <a:r>
+              <a:rPr lang="en-US" sz="1080" dirty="0">
+                <a:solidFill>
+                  <a:srgbClr val="212121"/>
+                </a:solidFill>
+                <a:latin typeface="Consolas" pitchFamily="34" charset="0"/>
+                <a:ea typeface="Consolas" pitchFamily="34" charset="-122"/>
+                <a:cs typeface="Consolas" pitchFamily="34" charset="-120"/>
+              </a:rPr>
+              <a:t>    queries=[</a:t>
+            </a:r>
+            <a:endParaRPr lang="en-US" sz="1080" dirty="0"/>
+          </a:p>
+          <a:p>
+            <a:pPr indent="0" marL="0">
+              <a:buNone/>
+            </a:pPr>
+            <a:r>
+              <a:rPr lang="en-US" sz="1080" dirty="0">
+                <a:solidFill>
+                  <a:srgbClr val="1F7A4D"/>
+                </a:solidFill>
+                <a:latin typeface="Consolas" pitchFamily="34" charset="0"/>
+                <a:ea typeface="Consolas" pitchFamily="34" charset="-122"/>
+                <a:cs typeface="Consolas" pitchFamily="34" charset="-120"/>
+              </a:rPr>
+              <a:t>"Get work item 42."</a:t>
+            </a:r>
+            <a:pPr indent="0" marL="0">
+              <a:buNone/>
+            </a:pPr>
+            <a:r>
+              <a:rPr lang="en-US" sz="1080" dirty="0">
+                <a:solidFill>
+                  <a:srgbClr val="212121"/>
+                </a:solidFill>
+                <a:latin typeface="Consolas" pitchFamily="34" charset="0"/>
+                <a:ea typeface="Consolas" pitchFamily="34" charset="-122"/>
+                <a:cs typeface="Consolas" pitchFamily="34" charset="-120"/>
+              </a:rPr>
+              <a:t>],</a:t>
             </a:r>
             <a:endParaRPr lang="en-US" sz="1080" dirty="0"/>
           </a:p>

--- a/decks/day3/module-7-eval-lab-kickoff.pptx
+++ b/decks/day3/module-7-eval-lab-kickoff.pptx
@@ -8172,11 +8172,11 @@
             <a:avLst/>
           </a:prstGeom>
           <a:solidFill>
-            <a:srgbClr val="F3F4F6"/>
+            <a:srgbClr val="1D1E22"/>
           </a:solidFill>
-          <a:ln w="6350">
+          <a:ln w="9525">
             <a:solidFill>
-              <a:srgbClr val="D1D5DB"/>
+              <a:srgbClr val="2A2B2E"/>
             </a:solidFill>
             <a:prstDash val="solid"/>
           </a:ln>
@@ -8209,7 +8209,7 @@
             <a:r>
               <a:rPr lang="en-US" sz="1080" dirty="0">
                 <a:solidFill>
-                  <a:srgbClr val="212121"/>
+                  <a:srgbClr val="FFFFFF"/>
                 </a:solidFill>
                 <a:latin typeface="Consolas" pitchFamily="34" charset="0"/>
                 <a:ea typeface="Consolas" pitchFamily="34" charset="-122"/>
@@ -8226,7 +8226,7 @@
             <a:r>
               <a:rPr lang="en-US" sz="1080" dirty="0">
                 <a:solidFill>
-                  <a:srgbClr val="212121"/>
+                  <a:srgbClr val="FFFFFF"/>
                 </a:solidFill>
                 <a:latin typeface="Consolas" pitchFamily="34" charset="0"/>
                 <a:ea typeface="Consolas" pitchFamily="34" charset="-122"/>
@@ -8243,7 +8243,7 @@
             <a:r>
               <a:rPr lang="en-US" sz="1080" dirty="0">
                 <a:solidFill>
-                  <a:srgbClr val="1F7A4D"/>
+                  <a:srgbClr val="E4C98A"/>
                 </a:solidFill>
                 <a:latin typeface="Consolas" pitchFamily="34" charset="0"/>
                 <a:ea typeface="Consolas" pitchFamily="34" charset="-122"/>
@@ -8257,7 +8257,7 @@
             <a:r>
               <a:rPr lang="en-US" sz="1080" dirty="0">
                 <a:solidFill>
-                  <a:srgbClr val="212121"/>
+                  <a:srgbClr val="FFFFFF"/>
                 </a:solidFill>
                 <a:latin typeface="Consolas" pitchFamily="34" charset="0"/>
                 <a:ea typeface="Consolas" pitchFamily="34" charset="-122"/>
@@ -8274,7 +8274,7 @@
             <a:r>
               <a:rPr lang="en-US" sz="1080" dirty="0">
                 <a:solidFill>
-                  <a:srgbClr val="212121"/>
+                  <a:srgbClr val="FFFFFF"/>
                 </a:solidFill>
                 <a:latin typeface="Consolas" pitchFamily="34" charset="0"/>
                 <a:ea typeface="Consolas" pitchFamily="34" charset="-122"/>
@@ -8291,7 +8291,7 @@
             <a:r>
               <a:rPr lang="en-US" sz="1080" dirty="0">
                 <a:solidFill>
-                  <a:srgbClr val="1F7A4D"/>
+                  <a:srgbClr val="E4C98A"/>
                 </a:solidFill>
                 <a:latin typeface="Consolas" pitchFamily="34" charset="0"/>
                 <a:ea typeface="Consolas" pitchFamily="34" charset="-122"/>
@@ -8305,7 +8305,7 @@
             <a:r>
               <a:rPr lang="en-US" sz="1080" dirty="0">
                 <a:solidFill>
-                  <a:srgbClr val="212121"/>
+                  <a:srgbClr val="FFFFFF"/>
                 </a:solidFill>
                 <a:latin typeface="Consolas" pitchFamily="34" charset="0"/>
                 <a:ea typeface="Consolas" pitchFamily="34" charset="-122"/>
@@ -8319,7 +8319,7 @@
             <a:r>
               <a:rPr lang="en-US" sz="1080" dirty="0">
                 <a:solidFill>
-                  <a:srgbClr val="1F7A4D"/>
+                  <a:srgbClr val="E4C98A"/>
                 </a:solidFill>
                 <a:latin typeface="Consolas" pitchFamily="34" charset="0"/>
                 <a:ea typeface="Consolas" pitchFamily="34" charset="-122"/>
@@ -8333,7 +8333,7 @@
             <a:r>
               <a:rPr lang="en-US" sz="1080" dirty="0">
                 <a:solidFill>
-                  <a:srgbClr val="212121"/>
+                  <a:srgbClr val="FFFFFF"/>
                 </a:solidFill>
                 <a:latin typeface="Consolas" pitchFamily="34" charset="0"/>
                 <a:ea typeface="Consolas" pitchFamily="34" charset="-122"/>
@@ -8347,7 +8347,7 @@
             <a:r>
               <a:rPr lang="en-US" sz="1080" dirty="0">
                 <a:solidFill>
-                  <a:srgbClr val="1F7A4D"/>
+                  <a:srgbClr val="E4C98A"/>
                 </a:solidFill>
                 <a:latin typeface="Consolas" pitchFamily="34" charset="0"/>
                 <a:ea typeface="Consolas" pitchFamily="34" charset="-122"/>
@@ -8361,7 +8361,7 @@
             <a:r>
               <a:rPr lang="en-US" sz="1080" dirty="0">
                 <a:solidFill>
-                  <a:srgbClr val="212121"/>
+                  <a:srgbClr val="FFFFFF"/>
                 </a:solidFill>
                 <a:latin typeface="Consolas" pitchFamily="34" charset="0"/>
                 <a:ea typeface="Consolas" pitchFamily="34" charset="-122"/>
@@ -8378,7 +8378,7 @@
             <a:r>
               <a:rPr lang="en-US" sz="1080" dirty="0">
                 <a:solidFill>
-                  <a:srgbClr val="212121"/>
+                  <a:srgbClr val="FFFFFF"/>
                 </a:solidFill>
                 <a:latin typeface="Consolas" pitchFamily="34" charset="0"/>
                 <a:ea typeface="Consolas" pitchFamily="34" charset="-122"/>
@@ -8401,7 +8401,7 @@
             <a:r>
               <a:rPr lang="en-US" sz="1080" dirty="0">
                 <a:solidFill>
-                  <a:srgbClr val="212121"/>
+                  <a:srgbClr val="FFFFFF"/>
                 </a:solidFill>
                 <a:latin typeface="Consolas" pitchFamily="34" charset="0"/>
                 <a:ea typeface="Consolas" pitchFamily="34" charset="-122"/>
@@ -8418,7 +8418,7 @@
             <a:r>
               <a:rPr lang="en-US" sz="1080" dirty="0">
                 <a:solidFill>
-                  <a:srgbClr val="212121"/>
+                  <a:srgbClr val="FFFFFF"/>
                 </a:solidFill>
                 <a:latin typeface="Consolas" pitchFamily="34" charset="0"/>
                 <a:ea typeface="Consolas" pitchFamily="34" charset="-122"/>
@@ -8435,7 +8435,7 @@
             <a:r>
               <a:rPr lang="en-US" sz="1080" dirty="0">
                 <a:solidFill>
-                  <a:srgbClr val="212121"/>
+                  <a:srgbClr val="FFFFFF"/>
                 </a:solidFill>
                 <a:latin typeface="Consolas" pitchFamily="34" charset="0"/>
                 <a:ea typeface="Consolas" pitchFamily="34" charset="-122"/>
@@ -8452,7 +8452,7 @@
             <a:r>
               <a:rPr lang="en-US" sz="1080" dirty="0">
                 <a:solidFill>
-                  <a:srgbClr val="212121"/>
+                  <a:srgbClr val="FFFFFF"/>
                 </a:solidFill>
                 <a:latin typeface="Consolas" pitchFamily="34" charset="0"/>
                 <a:ea typeface="Consolas" pitchFamily="34" charset="-122"/>
@@ -8475,7 +8475,7 @@
             <a:r>
               <a:rPr lang="en-US" sz="1080" dirty="0">
                 <a:solidFill>
-                  <a:srgbClr val="212121"/>
+                  <a:srgbClr val="FFFFFF"/>
                 </a:solidFill>
                 <a:latin typeface="Consolas" pitchFamily="34" charset="0"/>
                 <a:ea typeface="Consolas" pitchFamily="34" charset="-122"/>
@@ -8492,7 +8492,7 @@
             <a:r>
               <a:rPr lang="en-US" sz="1080" dirty="0">
                 <a:solidFill>
-                  <a:srgbClr val="1E2761"/>
+                  <a:srgbClr val="A996B6"/>
                 </a:solidFill>
                 <a:latin typeface="Consolas" pitchFamily="34" charset="0"/>
                 <a:ea typeface="Consolas" pitchFamily="34" charset="-122"/>
@@ -8506,7 +8506,7 @@
             <a:r>
               <a:rPr lang="en-US" sz="1080" dirty="0">
                 <a:solidFill>
-                  <a:srgbClr val="212121"/>
+                  <a:srgbClr val="FFFFFF"/>
                 </a:solidFill>
                 <a:latin typeface="Consolas" pitchFamily="34" charset="0"/>
                 <a:ea typeface="Consolas" pitchFamily="34" charset="-122"/>
@@ -8523,7 +8523,7 @@
             <a:r>
               <a:rPr lang="en-US" sz="1080" dirty="0">
                 <a:solidFill>
-                  <a:srgbClr val="212121"/>
+                  <a:srgbClr val="FFFFFF"/>
                 </a:solidFill>
                 <a:latin typeface="Consolas" pitchFamily="34" charset="0"/>
                 <a:ea typeface="Consolas" pitchFamily="34" charset="-122"/>
@@ -8540,7 +8540,7 @@
             <a:r>
               <a:rPr lang="en-US" sz="1080" dirty="0">
                 <a:solidFill>
-                  <a:srgbClr val="212121"/>
+                  <a:srgbClr val="FFFFFF"/>
                 </a:solidFill>
                 <a:latin typeface="Consolas" pitchFamily="34" charset="0"/>
                 <a:ea typeface="Consolas" pitchFamily="34" charset="-122"/>
@@ -8557,7 +8557,7 @@
             <a:r>
               <a:rPr lang="en-US" sz="1080" dirty="0">
                 <a:solidFill>
-                  <a:srgbClr val="1F7A4D"/>
+                  <a:srgbClr val="E4C98A"/>
                 </a:solidFill>
                 <a:latin typeface="Consolas" pitchFamily="34" charset="0"/>
                 <a:ea typeface="Consolas" pitchFamily="34" charset="-122"/>
@@ -8571,7 +8571,7 @@
             <a:r>
               <a:rPr lang="en-US" sz="1080" dirty="0">
                 <a:solidFill>
-                  <a:srgbClr val="212121"/>
+                  <a:srgbClr val="FFFFFF"/>
                 </a:solidFill>
                 <a:latin typeface="Consolas" pitchFamily="34" charset="0"/>
                 <a:ea typeface="Consolas" pitchFamily="34" charset="-122"/>
@@ -8588,7 +8588,7 @@
             <a:r>
               <a:rPr lang="en-US" sz="1080" dirty="0">
                 <a:solidFill>
-                  <a:srgbClr val="212121"/>
+                  <a:srgbClr val="FFFFFF"/>
                 </a:solidFill>
                 <a:latin typeface="Consolas" pitchFamily="34" charset="0"/>
                 <a:ea typeface="Consolas" pitchFamily="34" charset="-122"/>
@@ -8605,7 +8605,7 @@
             <a:r>
               <a:rPr lang="en-US" sz="1080" dirty="0">
                 <a:solidFill>
-                  <a:srgbClr val="212121"/>
+                  <a:srgbClr val="FFFFFF"/>
                 </a:solidFill>
                 <a:latin typeface="Consolas" pitchFamily="34" charset="0"/>
                 <a:ea typeface="Consolas" pitchFamily="34" charset="-122"/>
@@ -8622,7 +8622,7 @@
             <a:r>
               <a:rPr lang="en-US" sz="1080" dirty="0">
                 <a:solidFill>
-                  <a:srgbClr val="212121"/>
+                  <a:srgbClr val="FFFFFF"/>
                 </a:solidFill>
                 <a:latin typeface="Consolas" pitchFamily="34" charset="0"/>
                 <a:ea typeface="Consolas" pitchFamily="34" charset="-122"/>
